--- a/V2授课PPT/W14-第12次课-CNN或LSTM二选一（.pptx
+++ b/V2授课PPT/W14-第12次课-CNN或LSTM二选一（.pptx
@@ -12,6 +12,8 @@
     <p:sldId id="318" r:id="rId70"/>
     <p:sldId id="366" r:id="rId16"/>
     <p:sldId id="367" r:id="rId17"/>
+    <p:sldId id="368" r:id="rId18"/>
+    <p:sldId id="369" r:id="rId19"/>
     <p:sldId id="365" r:id="rId15"/>
     <p:sldId id="363" r:id="rId115"/>
     <p:sldId id="364" r:id="rId116"/>
@@ -4670,6 +4672,2131 @@
 </p:sld>
 </file>
 
+<file path=ppt/slides/slide11.xml><?xml version="1.0" encoding="utf-8"?>
+<p:sld xmlns:a="http://schemas.openxmlformats.org/drawingml/2006/main" xmlns:p="http://schemas.openxmlformats.org/presentationml/2006/main" xmlns:r="http://schemas.openxmlformats.org/officeDocument/2006/relationships">
+  <p:cSld>
+    <p:spTree>
+      <p:nvGrpSpPr>
+        <p:cNvPr id="1" name=""/>
+        <p:cNvGrpSpPr/>
+        <p:nvPr/>
+      </p:nvGrpSpPr>
+      <p:grpSpPr/>
+      <p:sp>
+        <p:nvSpPr>
+          <p:cNvPr id="2" name="Rectangle 1"/>
+          <p:cNvSpPr/>
+          <p:nvPr/>
+        </p:nvSpPr>
+        <p:spPr>
+          <a:xfrm>
+            <a:off x="0" y="0"/>
+            <a:ext cx="12192000" cy="1150000"/>
+          </a:xfrm>
+          <a:prstGeom prst="rect">
+            <a:avLst/>
+          </a:prstGeom>
+          <a:solidFill>
+            <a:srgbClr val="010328"/>
+          </a:solidFill>
+          <a:ln>
+            <a:noFill/>
+          </a:ln>
+          <a:effectLst/>
+        </p:spPr>
+        <p:style>
+          <a:lnRef idx="1">
+            <a:schemeClr val="accent1"/>
+          </a:lnRef>
+          <a:fillRef idx="3">
+            <a:schemeClr val="accent1"/>
+          </a:fillRef>
+          <a:effectRef idx="2">
+            <a:schemeClr val="accent1"/>
+          </a:effectRef>
+          <a:fontRef idx="minor">
+            <a:schemeClr val="lt1"/>
+          </a:fontRef>
+        </p:style>
+        <p:txBody>
+          <a:bodyPr rtlCol="0" anchor="ctr"/>
+          <a:lstStyle/>
+          <a:p>
+            <a:pPr algn="ctr"/>
+          </a:p>
+        </p:txBody>
+      </p:sp>
+      <p:sp>
+        <p:nvSpPr>
+          <p:cNvPr id="3" name="Rectangle 2"/>
+          <p:cNvSpPr/>
+          <p:nvPr/>
+        </p:nvSpPr>
+        <p:spPr>
+          <a:xfrm>
+            <a:off x="0" y="1150000"/>
+            <a:ext cx="2600000" cy="70000"/>
+          </a:xfrm>
+          <a:prstGeom prst="rect">
+            <a:avLst/>
+          </a:prstGeom>
+          <a:solidFill>
+            <a:srgbClr val="F5670F"/>
+          </a:solidFill>
+          <a:ln>
+            <a:noFill/>
+          </a:ln>
+          <a:effectLst/>
+        </p:spPr>
+        <p:style>
+          <a:lnRef idx="1">
+            <a:schemeClr val="accent1"/>
+          </a:lnRef>
+          <a:fillRef idx="3">
+            <a:schemeClr val="accent1"/>
+          </a:fillRef>
+          <a:effectRef idx="2">
+            <a:schemeClr val="accent1"/>
+          </a:effectRef>
+          <a:fontRef idx="minor">
+            <a:schemeClr val="lt1"/>
+          </a:fontRef>
+        </p:style>
+        <p:txBody>
+          <a:bodyPr rtlCol="0" anchor="ctr"/>
+          <a:lstStyle/>
+          <a:p>
+            <a:pPr algn="ctr"/>
+          </a:p>
+        </p:txBody>
+      </p:sp>
+      <p:sp>
+        <p:nvSpPr>
+          <p:cNvPr id="4" name="TextBox 3"/>
+          <p:cNvSpPr txBox="1"/>
+          <p:nvPr/>
+        </p:nvSpPr>
+        <p:spPr>
+          <a:xfrm>
+            <a:off x="700000" y="300000"/>
+            <a:ext cx="10792000" cy="700000"/>
+          </a:xfrm>
+          <a:prstGeom prst="rect">
+            <a:avLst/>
+          </a:prstGeom>
+          <a:noFill/>
+        </p:spPr>
+        <p:txBody>
+          <a:bodyPr wrap="square" anchor="t">
+            <a:spAutoFit/>
+          </a:bodyPr>
+          <a:lstStyle/>
+          <a:p>
+            <a:pPr algn="l">
+              <a:lnSpc>
+                <a:spcPct val="110000"/>
+              </a:lnSpc>
+              <a:spcAft>
+                <a:spcPts val="600"/>
+              </a:spcAft>
+            </a:pPr>
+            <a:r>
+              <a:rPr sz="2400" b="1">
+                <a:solidFill>
+                  <a:srgbClr val="FFFFFF"/>
+                </a:solidFill>
+                <a:latin typeface="微软雅黑"/>
+              </a:rPr>
+              <a:t>实测验收 · m23b_bidding</a:t>
+            </a:r>
+          </a:p>
+        </p:txBody>
+      </p:sp>
+      <p:sp>
+        <p:nvSpPr>
+          <p:cNvPr id="11" name="Rectangle 10"/>
+          <p:cNvSpPr/>
+          <p:nvPr/>
+        </p:nvSpPr>
+        <p:spPr>
+          <a:xfrm>
+            <a:off x="500000" y="6500000"/>
+            <a:ext cx="11100000" cy="20000"/>
+          </a:xfrm>
+          <a:prstGeom prst="rect">
+            <a:avLst/>
+          </a:prstGeom>
+          <a:solidFill>
+            <a:srgbClr val="C9D4EE"/>
+          </a:solidFill>
+          <a:ln>
+            <a:noFill/>
+          </a:ln>
+          <a:effectLst/>
+        </p:spPr>
+        <p:style>
+          <a:lnRef idx="1">
+            <a:schemeClr val="accent1"/>
+          </a:lnRef>
+          <a:fillRef idx="3">
+            <a:schemeClr val="accent1"/>
+          </a:fillRef>
+          <a:effectRef idx="2">
+            <a:schemeClr val="accent1"/>
+          </a:effectRef>
+          <a:fontRef idx="minor">
+            <a:schemeClr val="lt1"/>
+          </a:fontRef>
+        </p:style>
+        <p:txBody>
+          <a:bodyPr rtlCol="0" anchor="ctr"/>
+          <a:lstStyle/>
+          <a:p>
+            <a:pPr algn="ctr"/>
+          </a:p>
+        </p:txBody>
+      </p:sp>
+      <p:sp>
+        <p:nvSpPr>
+          <p:cNvPr id="12" name="TextBox 11"/>
+          <p:cNvSpPr txBox="1"/>
+          <p:nvPr/>
+        </p:nvSpPr>
+        <p:spPr>
+          <a:xfrm>
+            <a:off x="500000" y="6540000"/>
+            <a:ext cx="7000000" cy="300000"/>
+          </a:xfrm>
+          <a:prstGeom prst="rect">
+            <a:avLst/>
+          </a:prstGeom>
+          <a:noFill/>
+        </p:spPr>
+        <p:txBody>
+          <a:bodyPr wrap="square" anchor="t">
+            <a:spAutoFit/>
+          </a:bodyPr>
+          <a:lstStyle/>
+          <a:p>
+            <a:pPr algn="l">
+              <a:lnSpc>
+                <a:spcPct val="110000"/>
+              </a:lnSpc>
+              <a:spcAft>
+                <a:spcPts val="600"/>
+              </a:spcAft>
+            </a:pPr>
+            <a:r>
+              <a:rPr sz="1000" b="0">
+                <a:solidFill>
+                  <a:srgbClr val="8A97B5"/>
+                </a:solidFill>
+                <a:latin typeface="微软雅黑"/>
+              </a:rPr>
+              <a:t>两江智造集团 · AI应用基础48课时版</a:t>
+            </a:r>
+          </a:p>
+        </p:txBody>
+      </p:sp>
+      <p:sp>
+        <p:nvSpPr>
+          <p:cNvPr id="13" name="TextBox 12"/>
+          <p:cNvSpPr txBox="1"/>
+          <p:nvPr/>
+        </p:nvSpPr>
+        <p:spPr>
+          <a:xfrm>
+            <a:off x="10600000" y="6540000"/>
+            <a:ext cx="1000000" cy="300000"/>
+          </a:xfrm>
+          <a:prstGeom prst="rect">
+            <a:avLst/>
+          </a:prstGeom>
+          <a:noFill/>
+        </p:spPr>
+        <p:txBody>
+          <a:bodyPr wrap="square" anchor="t">
+            <a:spAutoFit/>
+          </a:bodyPr>
+          <a:lstStyle/>
+          <a:p>
+            <a:pPr algn="r">
+              <a:lnSpc>
+                <a:spcPct val="110000"/>
+              </a:lnSpc>
+              <a:spcAft>
+                <a:spcPts val="600"/>
+              </a:spcAft>
+            </a:pPr>
+            <a:r>
+              <a:rPr sz="1000" b="0">
+                <a:solidFill>
+                  <a:srgbClr val="8A97B5"/>
+                </a:solidFill>
+                <a:latin typeface="微软雅黑"/>
+              </a:rPr>
+              <a:t>8 / 12</a:t>
+            </a:r>
+          </a:p>
+        </p:txBody>
+      </p:sp>
+      <p:sp>
+        <p:nvSpPr>
+          <p:cNvPr id="14" name="Rectangle 13"/>
+          <p:cNvSpPr/>
+          <p:nvPr/>
+        </p:nvSpPr>
+        <p:spPr>
+          <a:xfrm>
+            <a:off x="0" y="1371600"/>
+            <a:ext cx="12188952" cy="713232"/>
+          </a:xfrm>
+          <a:prstGeom prst="rect">
+            <a:avLst/>
+          </a:prstGeom>
+          <a:solidFill>
+            <a:srgbClr val="F2F5F9"/>
+          </a:solidFill>
+          <a:ln>
+            <a:noFill/>
+          </a:ln>
+          <a:effectLst/>
+        </p:spPr>
+        <p:style>
+          <a:lnRef idx="1">
+            <a:schemeClr val="accent1"/>
+          </a:lnRef>
+          <a:fillRef idx="3">
+            <a:schemeClr val="accent1"/>
+          </a:fillRef>
+          <a:effectRef idx="2">
+            <a:schemeClr val="accent1"/>
+          </a:effectRef>
+          <a:fontRef idx="minor">
+            <a:schemeClr val="lt1"/>
+          </a:fontRef>
+        </p:style>
+        <p:txBody>
+          <a:bodyPr rtlCol="0" anchor="ctr" wrap="square"/>
+          <a:lstStyle/>
+          <a:p>
+            <a:pPr algn="ctr"/>
+          </a:p>
+        </p:txBody>
+      </p:sp>
+      <p:sp>
+        <p:nvSpPr>
+          <p:cNvPr id="15" name="TextBox 14"/>
+          <p:cNvSpPr txBox="1"/>
+          <p:nvPr/>
+        </p:nvSpPr>
+        <p:spPr>
+          <a:xfrm>
+            <a:off x="457200" y="1426464"/>
+            <a:ext cx="2651760" cy="566928"/>
+          </a:xfrm>
+          <a:prstGeom prst="rect">
+            <a:avLst/>
+          </a:prstGeom>
+          <a:noFill/>
+        </p:spPr>
+        <p:txBody>
+          <a:bodyPr wrap="square">
+            <a:spAutoFit/>
+          </a:bodyPr>
+          <a:lstStyle/>
+          <a:p>
+            <a:r>
+              <a:rPr sz="1400" b="1">
+                <a:solidFill>
+                  <a:srgbClr val="2E7D46"/>
+                </a:solidFill>
+                <a:latin typeface="微软雅黑"/>
+              </a:rPr>
+              <a:t>实测达成档位</a:t>
+            </a:r>
+          </a:p>
+          <a:p>
+            <a:r>
+              <a:rPr sz="1400" b="1">
+                <a:solidFill>
+                  <a:srgbClr val="2E7D46"/>
+                </a:solidFill>
+                <a:latin typeface="微软雅黑"/>
+              </a:rPr>
+              <a:t>优(A)</a:t>
+            </a:r>
+          </a:p>
+        </p:txBody>
+      </p:sp>
+      <p:sp>
+        <p:nvSpPr>
+          <p:cNvPr id="16" name="Rectangle 15"/>
+          <p:cNvSpPr/>
+          <p:nvPr/>
+        </p:nvSpPr>
+        <p:spPr>
+          <a:xfrm>
+            <a:off x="3200400" y="1426464"/>
+            <a:ext cx="1627632" cy="603504"/>
+          </a:xfrm>
+          <a:prstGeom prst="rect">
+            <a:avLst/>
+          </a:prstGeom>
+          <a:solidFill>
+            <a:srgbClr val="FFFFFF"/>
+          </a:solidFill>
+          <a:ln>
+            <a:solidFill>
+              <a:srgbClr val="D6DCE4"/>
+            </a:solidFill>
+          </a:ln>
+          <a:effectLst/>
+        </p:spPr>
+        <p:style>
+          <a:lnRef idx="1">
+            <a:schemeClr val="accent1"/>
+          </a:lnRef>
+          <a:fillRef idx="3">
+            <a:schemeClr val="accent1"/>
+          </a:fillRef>
+          <a:effectRef idx="2">
+            <a:schemeClr val="accent1"/>
+          </a:effectRef>
+          <a:fontRef idx="minor">
+            <a:schemeClr val="lt1"/>
+          </a:fontRef>
+        </p:style>
+        <p:txBody>
+          <a:bodyPr rtlCol="0" anchor="ctr" wrap="square"/>
+          <a:lstStyle/>
+          <a:p>
+            <a:pPr algn="ctr"/>
+          </a:p>
+        </p:txBody>
+      </p:sp>
+      <p:sp>
+        <p:nvSpPr>
+          <p:cNvPr id="17" name="TextBox 16"/>
+          <p:cNvSpPr txBox="1"/>
+          <p:nvPr/>
+        </p:nvSpPr>
+        <p:spPr>
+          <a:xfrm>
+            <a:off x="3246120" y="1463040"/>
+            <a:ext cx="1536192" cy="548640"/>
+          </a:xfrm>
+          <a:prstGeom prst="rect">
+            <a:avLst/>
+          </a:prstGeom>
+          <a:noFill/>
+        </p:spPr>
+        <p:txBody>
+          <a:bodyPr wrap="square">
+            <a:spAutoFit/>
+          </a:bodyPr>
+          <a:lstStyle/>
+          <a:p>
+            <a:r>
+              <a:rPr sz="900" b="0">
+                <a:solidFill>
+                  <a:srgbClr val="35506E"/>
+                </a:solidFill>
+                <a:latin typeface="微软雅黑"/>
+              </a:rPr>
+              <a:t>代码规范率 95.11%（工单把≥70%钉在 D 档）</a:t>
+            </a:r>
+          </a:p>
+        </p:txBody>
+      </p:sp>
+      <p:sp>
+        <p:nvSpPr>
+          <p:cNvPr id="18" name="Rectangle 17"/>
+          <p:cNvSpPr/>
+          <p:nvPr/>
+        </p:nvSpPr>
+        <p:spPr>
+          <a:xfrm>
+            <a:off x="4901184" y="1426464"/>
+            <a:ext cx="1627632" cy="603504"/>
+          </a:xfrm>
+          <a:prstGeom prst="rect">
+            <a:avLst/>
+          </a:prstGeom>
+          <a:solidFill>
+            <a:srgbClr val="FFFFFF"/>
+          </a:solidFill>
+          <a:ln>
+            <a:solidFill>
+              <a:srgbClr val="D6DCE4"/>
+            </a:solidFill>
+          </a:ln>
+          <a:effectLst/>
+        </p:spPr>
+        <p:style>
+          <a:lnRef idx="1">
+            <a:schemeClr val="accent1"/>
+          </a:lnRef>
+          <a:fillRef idx="3">
+            <a:schemeClr val="accent1"/>
+          </a:fillRef>
+          <a:effectRef idx="2">
+            <a:schemeClr val="accent1"/>
+          </a:effectRef>
+          <a:fontRef idx="minor">
+            <a:schemeClr val="lt1"/>
+          </a:fontRef>
+        </p:style>
+        <p:txBody>
+          <a:bodyPr rtlCol="0" anchor="ctr" wrap="square"/>
+          <a:lstStyle/>
+          <a:p>
+            <a:pPr algn="ctr"/>
+          </a:p>
+        </p:txBody>
+      </p:sp>
+      <p:sp>
+        <p:nvSpPr>
+          <p:cNvPr id="19" name="TextBox 18"/>
+          <p:cNvSpPr txBox="1"/>
+          <p:nvPr/>
+        </p:nvSpPr>
+        <p:spPr>
+          <a:xfrm>
+            <a:off x="4946904" y="1463040"/>
+            <a:ext cx="1536192" cy="548640"/>
+          </a:xfrm>
+          <a:prstGeom prst="rect">
+            <a:avLst/>
+          </a:prstGeom>
+          <a:noFill/>
+        </p:spPr>
+        <p:txBody>
+          <a:bodyPr wrap="square">
+            <a:spAutoFit/>
+          </a:bodyPr>
+          <a:lstStyle/>
+          <a:p>
+            <a:r>
+              <a:rPr sz="900" b="0">
+                <a:solidFill>
+                  <a:srgbClr val="35506E"/>
+                </a:solidFill>
+                <a:latin typeface="微软雅黑"/>
+              </a:rPr>
+              <a:t>复现比对 一致</a:t>
+            </a:r>
+          </a:p>
+        </p:txBody>
+      </p:sp>
+      <p:sp>
+        <p:nvSpPr>
+          <p:cNvPr id="20" name="Rectangle 19"/>
+          <p:cNvSpPr/>
+          <p:nvPr/>
+        </p:nvSpPr>
+        <p:spPr>
+          <a:xfrm>
+            <a:off x="6601968" y="1426464"/>
+            <a:ext cx="1627632" cy="603504"/>
+          </a:xfrm>
+          <a:prstGeom prst="rect">
+            <a:avLst/>
+          </a:prstGeom>
+          <a:solidFill>
+            <a:srgbClr val="FFFFFF"/>
+          </a:solidFill>
+          <a:ln>
+            <a:solidFill>
+              <a:srgbClr val="D6DCE4"/>
+            </a:solidFill>
+          </a:ln>
+          <a:effectLst/>
+        </p:spPr>
+        <p:style>
+          <a:lnRef idx="1">
+            <a:schemeClr val="accent1"/>
+          </a:lnRef>
+          <a:fillRef idx="3">
+            <a:schemeClr val="accent1"/>
+          </a:fillRef>
+          <a:effectRef idx="2">
+            <a:schemeClr val="accent1"/>
+          </a:effectRef>
+          <a:fontRef idx="minor">
+            <a:schemeClr val="lt1"/>
+          </a:fontRef>
+        </p:style>
+        <p:txBody>
+          <a:bodyPr rtlCol="0" anchor="ctr" wrap="square"/>
+          <a:lstStyle/>
+          <a:p>
+            <a:pPr algn="ctr"/>
+          </a:p>
+        </p:txBody>
+      </p:sp>
+      <p:sp>
+        <p:nvSpPr>
+          <p:cNvPr id="21" name="TextBox 20"/>
+          <p:cNvSpPr txBox="1"/>
+          <p:nvPr/>
+        </p:nvSpPr>
+        <p:spPr>
+          <a:xfrm>
+            <a:off x="6647688" y="1463040"/>
+            <a:ext cx="1536192" cy="548640"/>
+          </a:xfrm>
+          <a:prstGeom prst="rect">
+            <a:avLst/>
+          </a:prstGeom>
+          <a:noFill/>
+        </p:spPr>
+        <p:txBody>
+          <a:bodyPr wrap="square">
+            <a:spAutoFit/>
+          </a:bodyPr>
+          <a:lstStyle/>
+          <a:p>
+            <a:r>
+              <a:rPr sz="900" b="0">
+                <a:solidFill>
+                  <a:srgbClr val="35506E"/>
+                </a:solidFill>
+                <a:latin typeface="微软雅黑"/>
+              </a:rPr>
+              <a:t>CNN(torch) acc 1.0000</a:t>
+            </a:r>
+          </a:p>
+        </p:txBody>
+      </p:sp>
+      <p:sp>
+        <p:nvSpPr>
+          <p:cNvPr id="22" name="Rectangle 21"/>
+          <p:cNvSpPr/>
+          <p:nvPr/>
+        </p:nvSpPr>
+        <p:spPr>
+          <a:xfrm>
+            <a:off x="8302752" y="1426464"/>
+            <a:ext cx="1627632" cy="603504"/>
+          </a:xfrm>
+          <a:prstGeom prst="rect">
+            <a:avLst/>
+          </a:prstGeom>
+          <a:solidFill>
+            <a:srgbClr val="FFFFFF"/>
+          </a:solidFill>
+          <a:ln>
+            <a:solidFill>
+              <a:srgbClr val="D6DCE4"/>
+            </a:solidFill>
+          </a:ln>
+          <a:effectLst/>
+        </p:spPr>
+        <p:style>
+          <a:lnRef idx="1">
+            <a:schemeClr val="accent1"/>
+          </a:lnRef>
+          <a:fillRef idx="3">
+            <a:schemeClr val="accent1"/>
+          </a:fillRef>
+          <a:effectRef idx="2">
+            <a:schemeClr val="accent1"/>
+          </a:effectRef>
+          <a:fontRef idx="minor">
+            <a:schemeClr val="lt1"/>
+          </a:fontRef>
+        </p:style>
+        <p:txBody>
+          <a:bodyPr rtlCol="0" anchor="ctr" wrap="square"/>
+          <a:lstStyle/>
+          <a:p>
+            <a:pPr algn="ctr"/>
+          </a:p>
+        </p:txBody>
+      </p:sp>
+      <p:sp>
+        <p:nvSpPr>
+          <p:cNvPr id="23" name="TextBox 22"/>
+          <p:cNvSpPr txBox="1"/>
+          <p:nvPr/>
+        </p:nvSpPr>
+        <p:spPr>
+          <a:xfrm>
+            <a:off x="8348472" y="1463040"/>
+            <a:ext cx="1536192" cy="548640"/>
+          </a:xfrm>
+          <a:prstGeom prst="rect">
+            <a:avLst/>
+          </a:prstGeom>
+          <a:noFill/>
+        </p:spPr>
+        <p:txBody>
+          <a:bodyPr wrap="square">
+            <a:spAutoFit/>
+          </a:bodyPr>
+          <a:lstStyle/>
+          <a:p>
+            <a:r>
+              <a:rPr sz="900" b="0">
+                <a:solidFill>
+                  <a:srgbClr val="35506E"/>
+                </a:solidFill>
+                <a:latin typeface="微软雅黑"/>
+              </a:rPr>
+              <a:t>LSTM 误差 0.2593</a:t>
+            </a:r>
+          </a:p>
+        </p:txBody>
+      </p:sp>
+      <p:sp>
+        <p:nvSpPr>
+          <p:cNvPr id="24" name="Rectangle 23"/>
+          <p:cNvSpPr/>
+          <p:nvPr/>
+        </p:nvSpPr>
+        <p:spPr>
+          <a:xfrm>
+            <a:off x="10003536" y="1426464"/>
+            <a:ext cx="1627632" cy="603504"/>
+          </a:xfrm>
+          <a:prstGeom prst="rect">
+            <a:avLst/>
+          </a:prstGeom>
+          <a:solidFill>
+            <a:srgbClr val="FFFFFF"/>
+          </a:solidFill>
+          <a:ln>
+            <a:solidFill>
+              <a:srgbClr val="D6DCE4"/>
+            </a:solidFill>
+          </a:ln>
+          <a:effectLst/>
+        </p:spPr>
+        <p:style>
+          <a:lnRef idx="1">
+            <a:schemeClr val="accent1"/>
+          </a:lnRef>
+          <a:fillRef idx="3">
+            <a:schemeClr val="accent1"/>
+          </a:fillRef>
+          <a:effectRef idx="2">
+            <a:schemeClr val="accent1"/>
+          </a:effectRef>
+          <a:fontRef idx="minor">
+            <a:schemeClr val="lt1"/>
+          </a:fontRef>
+        </p:style>
+        <p:txBody>
+          <a:bodyPr rtlCol="0" anchor="ctr" wrap="square"/>
+          <a:lstStyle/>
+          <a:p>
+            <a:pPr algn="ctr"/>
+          </a:p>
+        </p:txBody>
+      </p:sp>
+      <p:sp>
+        <p:nvSpPr>
+          <p:cNvPr id="25" name="TextBox 24"/>
+          <p:cNvSpPr txBox="1"/>
+          <p:nvPr/>
+        </p:nvSpPr>
+        <p:spPr>
+          <a:xfrm>
+            <a:off x="10049256" y="1463040"/>
+            <a:ext cx="1536192" cy="548640"/>
+          </a:xfrm>
+          <a:prstGeom prst="rect">
+            <a:avLst/>
+          </a:prstGeom>
+          <a:noFill/>
+        </p:spPr>
+        <p:txBody>
+          <a:bodyPr wrap="square">
+            <a:spAutoFit/>
+          </a:bodyPr>
+          <a:lstStyle/>
+          <a:p>
+            <a:r>
+              <a:rPr sz="900" b="0">
+                <a:solidFill>
+                  <a:srgbClr val="35506E"/>
+                </a:solidFill>
+                <a:latin typeface="微软雅黑"/>
+              </a:rPr>
+              <a:t>决策矩阵 6 行</a:t>
+            </a:r>
+          </a:p>
+        </p:txBody>
+      </p:sp>
+      <p:graphicFrame>
+        <p:nvGraphicFramePr>
+          <p:cNvPr id="26" name="Table 25"/>
+          <p:cNvGraphicFramePr>
+            <a:graphicFrameLocks noGrp="1"/>
+          </p:cNvGraphicFramePr>
+          <p:nvPr/>
+        </p:nvGraphicFramePr>
+        <p:xfrm>
+          <a:off x="457200" y="2212848"/>
+          <a:ext cx="11274552" cy="2834640"/>
+        </p:xfrm>
+        <a:graphic>
+          <a:graphicData uri="http://schemas.openxmlformats.org/drawingml/2006/table">
+            <a:tbl>
+              <a:tblPr firstRow="1" bandRow="1">
+                <a:tableStyleId>{5C22544A-7EE6-4342-B048-85BDC9FD1C3A}</a:tableStyleId>
+              </a:tblPr>
+              <a:tblGrid>
+                <a:gridCol w="1188720"/>
+                <a:gridCol w="5120640"/>
+                <a:gridCol w="3886200"/>
+                <a:gridCol w="1078992"/>
+              </a:tblGrid>
+              <a:tr h="566928">
+                <a:tc>
+                  <a:txBody>
+                    <a:bodyPr/>
+                    <a:lstStyle/>
+                    <a:p>
+                      <a:r>
+                        <a:rPr sz="1050" b="1">
+                          <a:solidFill>
+                            <a:srgbClr val="FFFFFF"/>
+                          </a:solidFill>
+                          <a:latin typeface="微软雅黑"/>
+                        </a:rPr>
+                        <a:t>档位</a:t>
+                      </a:r>
+                    </a:p>
+                  </a:txBody>
+                  <a:tcPr>
+                    <a:solidFill>
+                      <a:srgbClr val="010328"/>
+                    </a:solidFill>
+                  </a:tcPr>
+                </a:tc>
+                <a:tc>
+                  <a:txBody>
+                    <a:bodyPr/>
+                    <a:lstStyle/>
+                    <a:p>
+                      <a:r>
+                        <a:rPr sz="1050" b="1">
+                          <a:solidFill>
+                            <a:srgbClr val="FFFFFF"/>
+                          </a:solidFill>
+                          <a:latin typeface="微软雅黑"/>
+                        </a:rPr>
+                        <a:t>工单验收标准（原文）</a:t>
+                      </a:r>
+                    </a:p>
+                  </a:txBody>
+                  <a:tcPr>
+                    <a:solidFill>
+                      <a:srgbClr val="010328"/>
+                    </a:solidFill>
+                  </a:tcPr>
+                </a:tc>
+                <a:tc>
+                  <a:txBody>
+                    <a:bodyPr/>
+                    <a:lstStyle/>
+                    <a:p>
+                      <a:r>
+                        <a:rPr sz="1050" b="1">
+                          <a:solidFill>
+                            <a:srgbClr val="FFFFFF"/>
+                          </a:solidFill>
+                          <a:latin typeface="微软雅黑"/>
+                        </a:rPr>
+                        <a:t>本次实测判定</a:t>
+                      </a:r>
+                    </a:p>
+                  </a:txBody>
+                  <a:tcPr>
+                    <a:solidFill>
+                      <a:srgbClr val="010328"/>
+                    </a:solidFill>
+                  </a:tcPr>
+                </a:tc>
+                <a:tc>
+                  <a:txBody>
+                    <a:bodyPr/>
+                    <a:lstStyle/>
+                    <a:p>
+                      <a:r>
+                        <a:rPr sz="1050" b="1">
+                          <a:solidFill>
+                            <a:srgbClr val="FFFFFF"/>
+                          </a:solidFill>
+                          <a:latin typeface="微软雅黑"/>
+                        </a:rPr>
+                        <a:t>判定</a:t>
+                      </a:r>
+                    </a:p>
+                  </a:txBody>
+                  <a:tcPr>
+                    <a:solidFill>
+                      <a:srgbClr val="010328"/>
+                    </a:solidFill>
+                  </a:tcPr>
+                </a:tc>
+              </a:tr>
+              <a:tr h="566928">
+                <a:tc>
+                  <a:txBody>
+                    <a:bodyPr/>
+                    <a:lstStyle/>
+                    <a:p>
+                      <a:r>
+                        <a:rPr sz="1000" b="1">
+                          <a:solidFill>
+                            <a:srgbClr val="2B2F36"/>
+                          </a:solidFill>
+                          <a:latin typeface="微软雅黑"/>
+                        </a:rPr>
+                        <a:t>及格(D)</a:t>
+                      </a:r>
+                    </a:p>
+                  </a:txBody>
+                  <a:tcPr>
+                    <a:solidFill>
+                      <a:srgbClr val="FFFFFF"/>
+                    </a:solidFill>
+                  </a:tcPr>
+                </a:tc>
+                <a:tc>
+                  <a:txBody>
+                    <a:bodyPr/>
+                    <a:lstStyle/>
+                    <a:p>
+                      <a:r>
+                        <a:rPr sz="950" b="0">
+                          <a:solidFill>
+                            <a:srgbClr val="2B2F36"/>
+                          </a:solidFill>
+                          <a:latin typeface="微软雅黑"/>
+                        </a:rPr>
+                        <a:t>实测 同种子两次 RF 拟合留出 acc 一致（0.8175 vs 0.8175）；规范率 95.11%</a:t>
+                      </a:r>
+                    </a:p>
+                  </a:txBody>
+                  <a:tcPr>
+                    <a:solidFill>
+                      <a:srgbClr val="FFFFFF"/>
+                    </a:solidFill>
+                  </a:tcPr>
+                </a:tc>
+                <a:tc>
+                  <a:txBody>
+                    <a:bodyPr/>
+                    <a:lstStyle/>
+                    <a:p>
+                      <a:r>
+                        <a:rPr sz="950" b="0">
+                          <a:solidFill>
+                            <a:srgbClr val="2B2F36"/>
+                          </a:solidFill>
+                          <a:latin typeface="微软雅黑"/>
+                        </a:rPr>
+                        <a:t>规范率门槛≥70% [达标] ｜ 功能OK ｜ 指标可复现；代码规范率≥70%</a:t>
+                      </a:r>
+                    </a:p>
+                  </a:txBody>
+                  <a:tcPr>
+                    <a:solidFill>
+                      <a:srgbClr val="FFFFFF"/>
+                    </a:solidFill>
+                  </a:tcPr>
+                </a:tc>
+                <a:tc>
+                  <a:txBody>
+                    <a:bodyPr/>
+                    <a:lstStyle/>
+                    <a:p>
+                      <a:r>
+                        <a:rPr sz="1000" b="1">
+                          <a:solidFill>
+                            <a:srgbClr val="2E7D46"/>
+                          </a:solidFill>
+                          <a:latin typeface="微软雅黑"/>
+                        </a:rPr>
+                        <a:t>✓ 达标</a:t>
+                      </a:r>
+                    </a:p>
+                  </a:txBody>
+                  <a:tcPr>
+                    <a:solidFill>
+                      <a:srgbClr val="FFFFFF"/>
+                    </a:solidFill>
+                  </a:tcPr>
+                </a:tc>
+              </a:tr>
+              <a:tr h="566928">
+                <a:tc>
+                  <a:txBody>
+                    <a:bodyPr/>
+                    <a:lstStyle/>
+                    <a:p>
+                      <a:r>
+                        <a:rPr sz="1000" b="1">
+                          <a:solidFill>
+                            <a:srgbClr val="2B2F36"/>
+                          </a:solidFill>
+                          <a:latin typeface="微软雅黑"/>
+                        </a:rPr>
+                        <a:t>良好(C)</a:t>
+                      </a:r>
+                    </a:p>
+                  </a:txBody>
+                  <a:tcPr>
+                    <a:solidFill>
+                      <a:srgbClr val="F7F9FB"/>
+                    </a:solidFill>
+                  </a:tcPr>
+                </a:tc>
+                <a:tc>
+                  <a:txBody>
+                    <a:bodyPr/>
+                    <a:lstStyle/>
+                    <a:p>
+                      <a:r>
+                        <a:rPr sz="950" b="0">
+                          <a:solidFill>
+                            <a:srgbClr val="2B2F36"/>
+                          </a:solidFill>
+                          <a:latin typeface="微软雅黑"/>
+                        </a:rPr>
+                        <a:t>LSTM(torch) 窗口错误率=0.2593（线≤0.25）——兜底臂数字不认（require_real_engine=True）</a:t>
+                      </a:r>
+                    </a:p>
+                  </a:txBody>
+                  <a:tcPr>
+                    <a:solidFill>
+                      <a:srgbClr val="F7F9FB"/>
+                    </a:solidFill>
+                  </a:tcPr>
+                </a:tc>
+                <a:tc>
+                  <a:txBody>
+                    <a:bodyPr/>
+                    <a:lstStyle/>
+                    <a:p>
+                      <a:r>
+                        <a:rPr sz="950" b="0">
+                          <a:solidFill>
+                            <a:srgbClr val="2B2F36"/>
+                          </a:solidFill>
+                          <a:latin typeface="微软雅黑"/>
+                        </a:rPr>
+                        <a:t>规范率不另设线（工单仅 D 档设线，实测 95.11%） [达标] ｜ 功能OK ｜ CNN≥75% 或 LSTM 误差≤25%（仅认真卷积/真 LSTM 臂的实测数字） ｜ 实测 CN</a:t>
+                      </a:r>
+                    </a:p>
+                  </a:txBody>
+                  <a:tcPr>
+                    <a:solidFill>
+                      <a:srgbClr val="F7F9FB"/>
+                    </a:solidFill>
+                  </a:tcPr>
+                </a:tc>
+                <a:tc>
+                  <a:txBody>
+                    <a:bodyPr/>
+                    <a:lstStyle/>
+                    <a:p>
+                      <a:r>
+                        <a:rPr sz="1000" b="1">
+                          <a:solidFill>
+                            <a:srgbClr val="2E7D46"/>
+                          </a:solidFill>
+                          <a:latin typeface="微软雅黑"/>
+                        </a:rPr>
+                        <a:t>✓ 达标</a:t>
+                      </a:r>
+                    </a:p>
+                  </a:txBody>
+                  <a:tcPr>
+                    <a:solidFill>
+                      <a:srgbClr val="F7F9FB"/>
+                    </a:solidFill>
+                  </a:tcPr>
+                </a:tc>
+              </a:tr>
+              <a:tr h="566928">
+                <a:tc>
+                  <a:txBody>
+                    <a:bodyPr/>
+                    <a:lstStyle/>
+                    <a:p>
+                      <a:r>
+                        <a:rPr sz="1000" b="1">
+                          <a:solidFill>
+                            <a:srgbClr val="2B2F36"/>
+                          </a:solidFill>
+                          <a:latin typeface="微软雅黑"/>
+                        </a:rPr>
+                        <a:t>优秀(B)</a:t>
+                      </a:r>
+                    </a:p>
+                  </a:txBody>
+                  <a:tcPr>
+                    <a:solidFill>
+                      <a:srgbClr val="FFFFFF"/>
+                    </a:solidFill>
+                  </a:tcPr>
+                </a:tc>
+                <a:tc>
+                  <a:txBody>
+                    <a:bodyPr/>
+                    <a:lstStyle/>
+                    <a:p>
+                      <a:r>
+                        <a:rPr sz="950" b="0">
+                          <a:solidFill>
+                            <a:srgbClr val="2B2F36"/>
+                          </a:solidFill>
+                          <a:latin typeface="微软雅黑"/>
+                        </a:rPr>
+                        <a:t>实测 两轮对比：两臂真引擎同口径实测（acc 差 +0.2593、秒差 -0.248s）；决策记录 445 字（线 120）</a:t>
+                      </a:r>
+                    </a:p>
+                  </a:txBody>
+                  <a:tcPr>
+                    <a:solidFill>
+                      <a:srgbClr val="FFFFFF"/>
+                    </a:solidFill>
+                  </a:tcPr>
+                </a:tc>
+                <a:tc>
+                  <a:txBody>
+                    <a:bodyPr/>
+                    <a:lstStyle/>
+                    <a:p>
+                      <a:r>
+                        <a:rPr sz="950" b="0">
+                          <a:solidFill>
+                            <a:srgbClr val="2B2F36"/>
+                          </a:solidFill>
+                          <a:latin typeface="微软雅黑"/>
+                        </a:rPr>
+                        <a:t>规范率不另设线（工单仅 D 档设线，实测 95.11%） [达标] ｜ 功能OK ｜ CNN vs LSTM 两轮实测对比齐备；决策记录完整（竞标胜负/评委加分另人工）</a:t>
+                      </a:r>
+                    </a:p>
+                  </a:txBody>
+                  <a:tcPr>
+                    <a:solidFill>
+                      <a:srgbClr val="FFFFFF"/>
+                    </a:solidFill>
+                  </a:tcPr>
+                </a:tc>
+                <a:tc>
+                  <a:txBody>
+                    <a:bodyPr/>
+                    <a:lstStyle/>
+                    <a:p>
+                      <a:r>
+                        <a:rPr sz="1000" b="1">
+                          <a:solidFill>
+                            <a:srgbClr val="2E7D46"/>
+                          </a:solidFill>
+                          <a:latin typeface="微软雅黑"/>
+                        </a:rPr>
+                        <a:t>✓ 达标</a:t>
+                      </a:r>
+                    </a:p>
+                  </a:txBody>
+                  <a:tcPr>
+                    <a:solidFill>
+                      <a:srgbClr val="FFFFFF"/>
+                    </a:solidFill>
+                  </a:tcPr>
+                </a:tc>
+              </a:tr>
+              <a:tr h="566928">
+                <a:tc>
+                  <a:txBody>
+                    <a:bodyPr/>
+                    <a:lstStyle/>
+                    <a:p>
+                      <a:r>
+                        <a:rPr sz="1000" b="1">
+                          <a:solidFill>
+                            <a:srgbClr val="2B2F36"/>
+                          </a:solidFill>
+                          <a:latin typeface="微软雅黑"/>
+                        </a:rPr>
+                        <a:t>优(A)</a:t>
+                      </a:r>
+                    </a:p>
+                  </a:txBody>
+                  <a:tcPr>
+                    <a:solidFill>
+                      <a:srgbClr val="F7F9FB"/>
+                    </a:solidFill>
+                  </a:tcPr>
+                </a:tc>
+                <a:tc>
+                  <a:txBody>
+                    <a:bodyPr/>
+                    <a:lstStyle/>
+                    <a:p>
+                      <a:r>
+                        <a:rPr sz="950" b="0">
+                          <a:solidFill>
+                            <a:srgbClr val="2B2F36"/>
+                          </a:solidFill>
+                          <a:latin typeface="微软雅黑"/>
+                        </a:rPr>
+                        <a:t>实测 矩阵 6 行（线≥4）；权重 acc/speed/env=0.5/0.3/0.2 和=1.0；结论成文 136 字（线≥20）</a:t>
+                      </a:r>
+                    </a:p>
+                  </a:txBody>
+                  <a:tcPr>
+                    <a:solidFill>
+                      <a:srgbClr val="F7F9FB"/>
+                    </a:solidFill>
+                  </a:tcPr>
+                </a:tc>
+                <a:tc>
+                  <a:txBody>
+                    <a:bodyPr/>
+                    <a:lstStyle/>
+                    <a:p>
+                      <a:r>
+                        <a:rPr sz="950" b="0">
+                          <a:solidFill>
+                            <a:srgbClr val="2B2F36"/>
+                          </a:solidFill>
+                          <a:latin typeface="微软雅黑"/>
+                        </a:rPr>
+                        <a:t>规范率不另设线（工单仅 D 档设线，实测 95.11%） [达标] ｜ 功能OK ｜ 选型决策矩阵：候选×权重×实测得分→结论</a:t>
+                      </a:r>
+                    </a:p>
+                  </a:txBody>
+                  <a:tcPr>
+                    <a:solidFill>
+                      <a:srgbClr val="F7F9FB"/>
+                    </a:solidFill>
+                  </a:tcPr>
+                </a:tc>
+                <a:tc>
+                  <a:txBody>
+                    <a:bodyPr/>
+                    <a:lstStyle/>
+                    <a:p>
+                      <a:r>
+                        <a:rPr sz="1000" b="1">
+                          <a:solidFill>
+                            <a:srgbClr val="2E7D46"/>
+                          </a:solidFill>
+                          <a:latin typeface="微软雅黑"/>
+                        </a:rPr>
+                        <a:t>✓ 达标</a:t>
+                      </a:r>
+                    </a:p>
+                  </a:txBody>
+                  <a:tcPr>
+                    <a:solidFill>
+                      <a:srgbClr val="F7F9FB"/>
+                    </a:solidFill>
+                  </a:tcPr>
+                </a:tc>
+              </a:tr>
+            </a:tbl>
+          </a:graphicData>
+        </a:graphic>
+      </p:graphicFrame>
+      <p:sp>
+        <p:nvSpPr>
+          <p:cNvPr id="27" name="Rectangle 26"/>
+          <p:cNvSpPr/>
+          <p:nvPr/>
+        </p:nvSpPr>
+        <p:spPr>
+          <a:xfrm>
+            <a:off x="457200" y="5138928"/>
+            <a:ext cx="11274552" cy="1261872"/>
+          </a:xfrm>
+          <a:prstGeom prst="rect">
+            <a:avLst/>
+          </a:prstGeom>
+          <a:solidFill>
+            <a:srgbClr val="FFF7E8"/>
+          </a:solidFill>
+          <a:ln>
+            <a:solidFill>
+              <a:srgbClr val="E8C88A"/>
+            </a:solidFill>
+          </a:ln>
+          <a:effectLst/>
+        </p:spPr>
+        <p:style>
+          <a:lnRef idx="1">
+            <a:schemeClr val="accent1"/>
+          </a:lnRef>
+          <a:fillRef idx="3">
+            <a:schemeClr val="accent1"/>
+          </a:fillRef>
+          <a:effectRef idx="2">
+            <a:schemeClr val="accent1"/>
+          </a:effectRef>
+          <a:fontRef idx="minor">
+            <a:schemeClr val="lt1"/>
+          </a:fontRef>
+        </p:style>
+        <p:txBody>
+          <a:bodyPr rtlCol="0" anchor="ctr" wrap="square"/>
+          <a:lstStyle/>
+          <a:p>
+            <a:pPr algn="ctr"/>
+          </a:p>
+        </p:txBody>
+      </p:sp>
+      <p:sp>
+        <p:nvSpPr>
+          <p:cNvPr id="28" name="TextBox 27"/>
+          <p:cNvSpPr txBox="1"/>
+          <p:nvPr/>
+        </p:nvSpPr>
+        <p:spPr>
+          <a:xfrm>
+            <a:off x="621792" y="5212080"/>
+            <a:ext cx="10927080" cy="1133856"/>
+          </a:xfrm>
+          <a:prstGeom prst="rect">
+            <a:avLst/>
+          </a:prstGeom>
+          <a:noFill/>
+        </p:spPr>
+        <p:txBody>
+          <a:bodyPr wrap="square">
+            <a:spAutoFit/>
+          </a:bodyPr>
+          <a:lstStyle/>
+          <a:p>
+            <a:r>
+              <a:rPr sz="1050" b="0">
+                <a:solidFill>
+                  <a:srgbClr val="6B4E16"/>
+                </a:solidFill>
+                <a:latin typeface="微软雅黑"/>
+              </a:rPr>
+              <a:t>人工答辩项 0 条：四档门槛均由代码实测判定</a:t>
+            </a:r>
+          </a:p>
+          <a:p>
+            <a:r>
+              <a:rPr sz="1050" b="0">
+                <a:solidFill>
+                  <a:srgbClr val="6B4E16"/>
+                </a:solidFill>
+                <a:latin typeface="微软雅黑"/>
+              </a:rPr>
+              <a:t>档位是算出来的：判定值由 run.py 本次真跑产生；工单未给数字的门槛在报告里标注为「兜底口径·非工单数字」。</a:t>
+            </a:r>
+          </a:p>
+        </p:txBody>
+      </p:sp>
+    </p:spTree>
+  </p:cSld>
+  <p:clrMapOvr>
+    <a:masterClrMapping/>
+  </p:clrMapOvr>
+</p:sld>
+</file>
+
+<file path=ppt/slides/slide12.xml><?xml version="1.0" encoding="utf-8"?>
+<p:sld xmlns:a="http://schemas.openxmlformats.org/drawingml/2006/main" xmlns:p="http://schemas.openxmlformats.org/presentationml/2006/main" xmlns:r="http://schemas.openxmlformats.org/officeDocument/2006/relationships">
+  <p:cSld>
+    <p:spTree>
+      <p:nvGrpSpPr>
+        <p:cNvPr id="1" name=""/>
+        <p:cNvGrpSpPr/>
+        <p:nvPr/>
+      </p:nvGrpSpPr>
+      <p:grpSpPr/>
+      <p:sp>
+        <p:nvSpPr>
+          <p:cNvPr id="2" name="Rectangle 1"/>
+          <p:cNvSpPr/>
+          <p:nvPr/>
+        </p:nvSpPr>
+        <p:spPr>
+          <a:xfrm>
+            <a:off x="0" y="0"/>
+            <a:ext cx="12192000" cy="1150000"/>
+          </a:xfrm>
+          <a:prstGeom prst="rect">
+            <a:avLst/>
+          </a:prstGeom>
+          <a:solidFill>
+            <a:srgbClr val="010328"/>
+          </a:solidFill>
+          <a:ln>
+            <a:noFill/>
+          </a:ln>
+          <a:effectLst/>
+        </p:spPr>
+        <p:style>
+          <a:lnRef idx="1">
+            <a:schemeClr val="accent1"/>
+          </a:lnRef>
+          <a:fillRef idx="3">
+            <a:schemeClr val="accent1"/>
+          </a:fillRef>
+          <a:effectRef idx="2">
+            <a:schemeClr val="accent1"/>
+          </a:effectRef>
+          <a:fontRef idx="minor">
+            <a:schemeClr val="lt1"/>
+          </a:fontRef>
+        </p:style>
+        <p:txBody>
+          <a:bodyPr rtlCol="0" anchor="ctr"/>
+          <a:lstStyle/>
+          <a:p>
+            <a:pPr algn="ctr"/>
+          </a:p>
+        </p:txBody>
+      </p:sp>
+      <p:sp>
+        <p:nvSpPr>
+          <p:cNvPr id="3" name="Rectangle 2"/>
+          <p:cNvSpPr/>
+          <p:nvPr/>
+        </p:nvSpPr>
+        <p:spPr>
+          <a:xfrm>
+            <a:off x="0" y="1150000"/>
+            <a:ext cx="2600000" cy="70000"/>
+          </a:xfrm>
+          <a:prstGeom prst="rect">
+            <a:avLst/>
+          </a:prstGeom>
+          <a:solidFill>
+            <a:srgbClr val="F5670F"/>
+          </a:solidFill>
+          <a:ln>
+            <a:noFill/>
+          </a:ln>
+          <a:effectLst/>
+        </p:spPr>
+        <p:style>
+          <a:lnRef idx="1">
+            <a:schemeClr val="accent1"/>
+          </a:lnRef>
+          <a:fillRef idx="3">
+            <a:schemeClr val="accent1"/>
+          </a:fillRef>
+          <a:effectRef idx="2">
+            <a:schemeClr val="accent1"/>
+          </a:effectRef>
+          <a:fontRef idx="minor">
+            <a:schemeClr val="lt1"/>
+          </a:fontRef>
+        </p:style>
+        <p:txBody>
+          <a:bodyPr rtlCol="0" anchor="ctr"/>
+          <a:lstStyle/>
+          <a:p>
+            <a:pPr algn="ctr"/>
+          </a:p>
+        </p:txBody>
+      </p:sp>
+      <p:sp>
+        <p:nvSpPr>
+          <p:cNvPr id="4" name="TextBox 3"/>
+          <p:cNvSpPr txBox="1"/>
+          <p:nvPr/>
+        </p:nvSpPr>
+        <p:spPr>
+          <a:xfrm>
+            <a:off x="700000" y="300000"/>
+            <a:ext cx="10792000" cy="700000"/>
+          </a:xfrm>
+          <a:prstGeom prst="rect">
+            <a:avLst/>
+          </a:prstGeom>
+          <a:noFill/>
+        </p:spPr>
+        <p:txBody>
+          <a:bodyPr wrap="square" anchor="t">
+            <a:spAutoFit/>
+          </a:bodyPr>
+          <a:lstStyle/>
+          <a:p>
+            <a:pPr algn="l">
+              <a:lnSpc>
+                <a:spcPct val="110000"/>
+              </a:lnSpc>
+              <a:spcAft>
+                <a:spcPts val="600"/>
+              </a:spcAft>
+            </a:pPr>
+            <a:r>
+              <a:rPr sz="2400" b="1">
+                <a:solidFill>
+                  <a:srgbClr val="FFFFFF"/>
+                </a:solidFill>
+                <a:latin typeface="微软雅黑"/>
+              </a:rPr>
+              <a:t>实跑截图证据 · m23b_bidding</a:t>
+            </a:r>
+          </a:p>
+        </p:txBody>
+      </p:sp>
+      <p:sp>
+        <p:nvSpPr>
+          <p:cNvPr id="11" name="Rectangle 10"/>
+          <p:cNvSpPr/>
+          <p:nvPr/>
+        </p:nvSpPr>
+        <p:spPr>
+          <a:xfrm>
+            <a:off x="500000" y="6500000"/>
+            <a:ext cx="11100000" cy="20000"/>
+          </a:xfrm>
+          <a:prstGeom prst="rect">
+            <a:avLst/>
+          </a:prstGeom>
+          <a:solidFill>
+            <a:srgbClr val="C9D4EE"/>
+          </a:solidFill>
+          <a:ln>
+            <a:noFill/>
+          </a:ln>
+          <a:effectLst/>
+        </p:spPr>
+        <p:style>
+          <a:lnRef idx="1">
+            <a:schemeClr val="accent1"/>
+          </a:lnRef>
+          <a:fillRef idx="3">
+            <a:schemeClr val="accent1"/>
+          </a:fillRef>
+          <a:effectRef idx="2">
+            <a:schemeClr val="accent1"/>
+          </a:effectRef>
+          <a:fontRef idx="minor">
+            <a:schemeClr val="lt1"/>
+          </a:fontRef>
+        </p:style>
+        <p:txBody>
+          <a:bodyPr rtlCol="0" anchor="ctr"/>
+          <a:lstStyle/>
+          <a:p>
+            <a:pPr algn="ctr"/>
+          </a:p>
+        </p:txBody>
+      </p:sp>
+      <p:sp>
+        <p:nvSpPr>
+          <p:cNvPr id="12" name="TextBox 11"/>
+          <p:cNvSpPr txBox="1"/>
+          <p:nvPr/>
+        </p:nvSpPr>
+        <p:spPr>
+          <a:xfrm>
+            <a:off x="500000" y="6540000"/>
+            <a:ext cx="7000000" cy="300000"/>
+          </a:xfrm>
+          <a:prstGeom prst="rect">
+            <a:avLst/>
+          </a:prstGeom>
+          <a:noFill/>
+        </p:spPr>
+        <p:txBody>
+          <a:bodyPr wrap="square" anchor="t">
+            <a:spAutoFit/>
+          </a:bodyPr>
+          <a:lstStyle/>
+          <a:p>
+            <a:pPr algn="l">
+              <a:lnSpc>
+                <a:spcPct val="110000"/>
+              </a:lnSpc>
+              <a:spcAft>
+                <a:spcPts val="600"/>
+              </a:spcAft>
+            </a:pPr>
+            <a:r>
+              <a:rPr sz="1000" b="0">
+                <a:solidFill>
+                  <a:srgbClr val="8A97B5"/>
+                </a:solidFill>
+                <a:latin typeface="微软雅黑"/>
+              </a:rPr>
+              <a:t>两江智造集团 · AI应用基础48课时版</a:t>
+            </a:r>
+          </a:p>
+        </p:txBody>
+      </p:sp>
+      <p:sp>
+        <p:nvSpPr>
+          <p:cNvPr id="13" name="TextBox 12"/>
+          <p:cNvSpPr txBox="1"/>
+          <p:nvPr/>
+        </p:nvSpPr>
+        <p:spPr>
+          <a:xfrm>
+            <a:off x="10600000" y="6540000"/>
+            <a:ext cx="1000000" cy="300000"/>
+          </a:xfrm>
+          <a:prstGeom prst="rect">
+            <a:avLst/>
+          </a:prstGeom>
+          <a:noFill/>
+        </p:spPr>
+        <p:txBody>
+          <a:bodyPr wrap="square" anchor="t">
+            <a:spAutoFit/>
+          </a:bodyPr>
+          <a:lstStyle/>
+          <a:p>
+            <a:pPr algn="r">
+              <a:lnSpc>
+                <a:spcPct val="110000"/>
+              </a:lnSpc>
+              <a:spcAft>
+                <a:spcPts val="600"/>
+              </a:spcAft>
+            </a:pPr>
+            <a:r>
+              <a:rPr sz="1000" b="0">
+                <a:solidFill>
+                  <a:srgbClr val="8A97B5"/>
+                </a:solidFill>
+                <a:latin typeface="微软雅黑"/>
+              </a:rPr>
+              <a:t>9 / 12</a:t>
+            </a:r>
+          </a:p>
+        </p:txBody>
+      </p:sp>
+      <p:sp>
+        <p:nvSpPr>
+          <p:cNvPr id="14" name="Rectangle 13"/>
+          <p:cNvSpPr/>
+          <p:nvPr/>
+        </p:nvSpPr>
+        <p:spPr>
+          <a:xfrm>
+            <a:off x="457200" y="1481328"/>
+            <a:ext cx="5486400" cy="2304288"/>
+          </a:xfrm>
+          <a:prstGeom prst="rect">
+            <a:avLst/>
+          </a:prstGeom>
+          <a:solidFill>
+            <a:srgbClr val="FFFFFF"/>
+          </a:solidFill>
+          <a:ln>
+            <a:solidFill>
+              <a:srgbClr val="D6DCE4"/>
+            </a:solidFill>
+          </a:ln>
+          <a:effectLst/>
+        </p:spPr>
+        <p:style>
+          <a:lnRef idx="1">
+            <a:schemeClr val="accent1"/>
+          </a:lnRef>
+          <a:fillRef idx="3">
+            <a:schemeClr val="accent1"/>
+          </a:fillRef>
+          <a:effectRef idx="2">
+            <a:schemeClr val="accent1"/>
+          </a:effectRef>
+          <a:fontRef idx="minor">
+            <a:schemeClr val="lt1"/>
+          </a:fontRef>
+        </p:style>
+        <p:txBody>
+          <a:bodyPr rtlCol="0" anchor="ctr" wrap="square"/>
+          <a:lstStyle/>
+          <a:p>
+            <a:pPr algn="ctr"/>
+          </a:p>
+        </p:txBody>
+      </p:sp>
+      <p:sp>
+        <p:nvSpPr>
+          <p:cNvPr id="15" name="TextBox 14"/>
+          <p:cNvSpPr txBox="1"/>
+          <p:nvPr/>
+        </p:nvSpPr>
+        <p:spPr>
+          <a:xfrm>
+            <a:off x="530352" y="1517904"/>
+            <a:ext cx="5340096" cy="237744"/>
+          </a:xfrm>
+          <a:prstGeom prst="rect">
+            <a:avLst/>
+          </a:prstGeom>
+          <a:noFill/>
+        </p:spPr>
+        <p:txBody>
+          <a:bodyPr wrap="square">
+            <a:spAutoFit/>
+          </a:bodyPr>
+          <a:lstStyle/>
+          <a:p>
+            <a:r>
+              <a:rPr sz="950" b="1">
+                <a:solidFill>
+                  <a:srgbClr val="010328"/>
+                </a:solidFill>
+                <a:latin typeface="微软雅黑"/>
+              </a:rPr>
+              <a:t>① run.py 实跑终端输出（逐字捕获）</a:t>
+            </a:r>
+          </a:p>
+        </p:txBody>
+      </p:sp>
+      <p:pic>
+        <p:nvPicPr>
+          <p:cNvPr id="16" name="Picture 15" descr="shot_run.png"/>
+          <p:cNvPicPr>
+            <a:picLocks noChangeAspect="1"/>
+          </p:cNvPicPr>
+          <p:nvPr/>
+        </p:nvPicPr>
+        <p:blipFill>
+          <a:blip r:embed="rId2"/>
+          <a:stretch>
+            <a:fillRect/>
+          </a:stretch>
+        </p:blipFill>
+        <p:spPr>
+          <a:xfrm>
+            <a:off x="964038" y="1773936"/>
+            <a:ext cx="4472722" cy="1956816"/>
+          </a:xfrm>
+          <a:prstGeom prst="rect">
+            <a:avLst/>
+          </a:prstGeom>
+        </p:spPr>
+      </p:pic>
+      <p:sp>
+        <p:nvSpPr>
+          <p:cNvPr id="17" name="Rectangle 16"/>
+          <p:cNvSpPr/>
+          <p:nvPr/>
+        </p:nvSpPr>
+        <p:spPr>
+          <a:xfrm>
+            <a:off x="6327648" y="1481328"/>
+            <a:ext cx="5486400" cy="2304288"/>
+          </a:xfrm>
+          <a:prstGeom prst="rect">
+            <a:avLst/>
+          </a:prstGeom>
+          <a:solidFill>
+            <a:srgbClr val="FFFFFF"/>
+          </a:solidFill>
+          <a:ln>
+            <a:solidFill>
+              <a:srgbClr val="D6DCE4"/>
+            </a:solidFill>
+          </a:ln>
+          <a:effectLst/>
+        </p:spPr>
+        <p:style>
+          <a:lnRef idx="1">
+            <a:schemeClr val="accent1"/>
+          </a:lnRef>
+          <a:fillRef idx="3">
+            <a:schemeClr val="accent1"/>
+          </a:fillRef>
+          <a:effectRef idx="2">
+            <a:schemeClr val="accent1"/>
+          </a:effectRef>
+          <a:fontRef idx="minor">
+            <a:schemeClr val="lt1"/>
+          </a:fontRef>
+        </p:style>
+        <p:txBody>
+          <a:bodyPr rtlCol="0" anchor="ctr" wrap="square"/>
+          <a:lstStyle/>
+          <a:p>
+            <a:pPr algn="ctr"/>
+          </a:p>
+        </p:txBody>
+      </p:sp>
+      <p:sp>
+        <p:nvSpPr>
+          <p:cNvPr id="18" name="TextBox 17"/>
+          <p:cNvSpPr txBox="1"/>
+          <p:nvPr/>
+        </p:nvSpPr>
+        <p:spPr>
+          <a:xfrm>
+            <a:off x="6400800" y="1517904"/>
+            <a:ext cx="5340096" cy="237744"/>
+          </a:xfrm>
+          <a:prstGeom prst="rect">
+            <a:avLst/>
+          </a:prstGeom>
+          <a:noFill/>
+        </p:spPr>
+        <p:txBody>
+          <a:bodyPr wrap="square">
+            <a:spAutoFit/>
+          </a:bodyPr>
+          <a:lstStyle/>
+          <a:p>
+            <a:r>
+              <a:rPr sz="950" b="1">
+                <a:solidFill>
+                  <a:srgbClr val="010328"/>
+                </a:solidFill>
+                <a:latin typeface="微软雅黑"/>
+              </a:rPr>
+              <a:t>② pytest 全绿终端输出（逐字捕获）</a:t>
+            </a:r>
+          </a:p>
+        </p:txBody>
+      </p:sp>
+      <p:pic>
+        <p:nvPicPr>
+          <p:cNvPr id="19" name="Picture 18" descr="shot_test.png"/>
+          <p:cNvPicPr>
+            <a:picLocks noChangeAspect="1"/>
+          </p:cNvPicPr>
+          <p:nvPr/>
+        </p:nvPicPr>
+        <p:blipFill>
+          <a:blip r:embed="rId3"/>
+          <a:stretch>
+            <a:fillRect/>
+          </a:stretch>
+        </p:blipFill>
+        <p:spPr>
+          <a:xfrm>
+            <a:off x="6834486" y="1773936"/>
+            <a:ext cx="4472722" cy="1956816"/>
+          </a:xfrm>
+          <a:prstGeom prst="rect">
+            <a:avLst/>
+          </a:prstGeom>
+        </p:spPr>
+      </p:pic>
+      <p:sp>
+        <p:nvSpPr>
+          <p:cNvPr id="20" name="Rectangle 19"/>
+          <p:cNvSpPr/>
+          <p:nvPr/>
+        </p:nvSpPr>
+        <p:spPr>
+          <a:xfrm>
+            <a:off x="457200" y="3877056"/>
+            <a:ext cx="5486400" cy="2304288"/>
+          </a:xfrm>
+          <a:prstGeom prst="rect">
+            <a:avLst/>
+          </a:prstGeom>
+          <a:solidFill>
+            <a:srgbClr val="FFFFFF"/>
+          </a:solidFill>
+          <a:ln>
+            <a:solidFill>
+              <a:srgbClr val="D6DCE4"/>
+            </a:solidFill>
+          </a:ln>
+          <a:effectLst/>
+        </p:spPr>
+        <p:style>
+          <a:lnRef idx="1">
+            <a:schemeClr val="accent1"/>
+          </a:lnRef>
+          <a:fillRef idx="3">
+            <a:schemeClr val="accent1"/>
+          </a:fillRef>
+          <a:effectRef idx="2">
+            <a:schemeClr val="accent1"/>
+          </a:effectRef>
+          <a:fontRef idx="minor">
+            <a:schemeClr val="lt1"/>
+          </a:fontRef>
+        </p:style>
+        <p:txBody>
+          <a:bodyPr rtlCol="0" anchor="ctr" wrap="square"/>
+          <a:lstStyle/>
+          <a:p>
+            <a:pPr algn="ctr"/>
+          </a:p>
+        </p:txBody>
+      </p:sp>
+      <p:sp>
+        <p:nvSpPr>
+          <p:cNvPr id="21" name="TextBox 20"/>
+          <p:cNvSpPr txBox="1"/>
+          <p:nvPr/>
+        </p:nvSpPr>
+        <p:spPr>
+          <a:xfrm>
+            <a:off x="530352" y="3913632"/>
+            <a:ext cx="5340096" cy="237744"/>
+          </a:xfrm>
+          <a:prstGeom prst="rect">
+            <a:avLst/>
+          </a:prstGeom>
+          <a:noFill/>
+        </p:spPr>
+        <p:txBody>
+          <a:bodyPr wrap="square">
+            <a:spAutoFit/>
+          </a:bodyPr>
+          <a:lstStyle/>
+          <a:p>
+            <a:r>
+              <a:rPr sz="950" b="1">
+                <a:solidFill>
+                  <a:srgbClr val="010328"/>
+                </a:solidFill>
+                <a:latin typeface="微软雅黑"/>
+              </a:rPr>
+              <a:t>③ report.txt「验收档位判定（实测）」段</a:t>
+            </a:r>
+          </a:p>
+        </p:txBody>
+      </p:sp>
+      <p:pic>
+        <p:nvPicPr>
+          <p:cNvPr id="22" name="Picture 21" descr="shot_report.png"/>
+          <p:cNvPicPr>
+            <a:picLocks noChangeAspect="1"/>
+          </p:cNvPicPr>
+          <p:nvPr/>
+        </p:nvPicPr>
+        <p:blipFill>
+          <a:blip r:embed="rId4"/>
+          <a:stretch>
+            <a:fillRect/>
+          </a:stretch>
+        </p:blipFill>
+        <p:spPr>
+          <a:xfrm>
+            <a:off x="964038" y="4169664"/>
+            <a:ext cx="4472722" cy="1956816"/>
+          </a:xfrm>
+          <a:prstGeom prst="rect">
+            <a:avLst/>
+          </a:prstGeom>
+        </p:spPr>
+      </p:pic>
+      <p:sp>
+        <p:nvSpPr>
+          <p:cNvPr id="23" name="Rectangle 22"/>
+          <p:cNvSpPr/>
+          <p:nvPr/>
+        </p:nvSpPr>
+        <p:spPr>
+          <a:xfrm>
+            <a:off x="6327648" y="3877056"/>
+            <a:ext cx="5486400" cy="2304288"/>
+          </a:xfrm>
+          <a:prstGeom prst="rect">
+            <a:avLst/>
+          </a:prstGeom>
+          <a:solidFill>
+            <a:srgbClr val="F7F9FB"/>
+          </a:solidFill>
+          <a:ln>
+            <a:solidFill>
+              <a:srgbClr val="D6DCE4"/>
+            </a:solidFill>
+          </a:ln>
+          <a:effectLst/>
+        </p:spPr>
+        <p:style>
+          <a:lnRef idx="1">
+            <a:schemeClr val="accent1"/>
+          </a:lnRef>
+          <a:fillRef idx="3">
+            <a:schemeClr val="accent1"/>
+          </a:fillRef>
+          <a:effectRef idx="2">
+            <a:schemeClr val="accent1"/>
+          </a:effectRef>
+          <a:fontRef idx="minor">
+            <a:schemeClr val="lt1"/>
+          </a:fontRef>
+        </p:style>
+        <p:txBody>
+          <a:bodyPr rtlCol="0" anchor="ctr" wrap="square"/>
+          <a:lstStyle/>
+          <a:p>
+            <a:pPr algn="ctr"/>
+          </a:p>
+        </p:txBody>
+      </p:sp>
+      <p:sp>
+        <p:nvSpPr>
+          <p:cNvPr id="24" name="TextBox 23"/>
+          <p:cNvSpPr txBox="1"/>
+          <p:nvPr/>
+        </p:nvSpPr>
+        <p:spPr>
+          <a:xfrm>
+            <a:off x="6400800" y="3913632"/>
+            <a:ext cx="5340096" cy="237744"/>
+          </a:xfrm>
+          <a:prstGeom prst="rect">
+            <a:avLst/>
+          </a:prstGeom>
+          <a:noFill/>
+        </p:spPr>
+        <p:txBody>
+          <a:bodyPr wrap="square">
+            <a:spAutoFit/>
+          </a:bodyPr>
+          <a:lstStyle/>
+          <a:p>
+            <a:r>
+              <a:rPr sz="950" b="1">
+                <a:solidFill>
+                  <a:srgbClr val="010328"/>
+                </a:solidFill>
+                <a:latin typeface="微软雅黑"/>
+              </a:rPr>
+              <a:t>④ 采集口径（可复现）</a:t>
+            </a:r>
+          </a:p>
+        </p:txBody>
+      </p:sp>
+      <p:sp>
+        <p:nvSpPr>
+          <p:cNvPr id="25" name="TextBox 24"/>
+          <p:cNvSpPr txBox="1"/>
+          <p:nvPr/>
+        </p:nvSpPr>
+        <p:spPr>
+          <a:xfrm>
+            <a:off x="6437376" y="4187952"/>
+            <a:ext cx="5266944" cy="1920240"/>
+          </a:xfrm>
+          <a:prstGeom prst="rect">
+            <a:avLst/>
+          </a:prstGeom>
+          <a:noFill/>
+        </p:spPr>
+        <p:txBody>
+          <a:bodyPr wrap="square">
+            <a:spAutoFit/>
+          </a:bodyPr>
+          <a:lstStyle/>
+          <a:p>
+            <a:r>
+              <a:rPr sz="950" b="0">
+                <a:solidFill>
+                  <a:srgbClr val="2B2F36"/>
+                </a:solidFill>
+                <a:latin typeface="微软雅黑"/>
+              </a:rPr>
+              <a:t>项目：05-AI应用基础48课时版/工程化项目/m23b_bidding/</a:t>
+            </a:r>
+          </a:p>
+          <a:p>
+            <a:r>
+              <a:rPr sz="950" b="0">
+                <a:solidFill>
+                  <a:srgbClr val="2B2F36"/>
+                </a:solidFill>
+                <a:latin typeface="微软雅黑"/>
+              </a:rPr>
+              <a:t>命令：/opt/anaconda3/bin/python run.py ｜ /opt/anaconda3/bin/python -m pytest -q</a:t>
+            </a:r>
+          </a:p>
+          <a:p>
+            <a:r>
+              <a:rPr sz="950" b="0">
+                <a:solidFill>
+                  <a:srgbClr val="2B2F36"/>
+                </a:solidFill>
+                <a:latin typeface="微软雅黑"/>
+              </a:rPr>
+              <a:t>采集：工具/ppt97/capture97.py（2026-10-28 10:48 真跑逐字捕获输出）</a:t>
+            </a:r>
+          </a:p>
+          <a:p>
+            <a:r>
+              <a:rPr sz="950" b="0">
+                <a:solidFill>
+                  <a:srgbClr val="2B2F36"/>
+                </a:solidFill>
+                <a:latin typeface="微软雅黑"/>
+              </a:rPr>
+              <a:t>渲染：工具/ppt97/terminal_png.py（终端截图，不改写任何数字）</a:t>
+            </a:r>
+          </a:p>
+          <a:p>
+            <a:r>
+              <a:rPr sz="950" b="0">
+                <a:solidFill>
+                  <a:srgbClr val="2B2F36"/>
+                </a:solidFill>
+                <a:latin typeface="微软雅黑"/>
+              </a:rPr>
+              <a:t>退出码：run=0 ｜ pytest=0</a:t>
+            </a:r>
+          </a:p>
+          <a:p>
+            <a:r>
+              <a:rPr sz="950" b="0">
+                <a:solidFill>
+                  <a:srgbClr val="2B2F36"/>
+                </a:solidFill>
+                <a:latin typeface="微软雅黑"/>
+              </a:rPr>
+              <a:t>档位判定取自 output/report.txt「验收档位判定（实测）」段</a:t>
+            </a:r>
+          </a:p>
+        </p:txBody>
+      </p:sp>
+      <p:sp>
+        <p:nvSpPr>
+          <p:cNvPr id="26" name="TextBox 25"/>
+          <p:cNvSpPr txBox="1"/>
+          <p:nvPr/>
+        </p:nvSpPr>
+        <p:spPr>
+          <a:xfrm>
+            <a:off x="457200" y="6254496"/>
+            <a:ext cx="11247120" cy="201168"/>
+          </a:xfrm>
+          <a:prstGeom prst="rect">
+            <a:avLst/>
+          </a:prstGeom>
+          <a:noFill/>
+        </p:spPr>
+        <p:txBody>
+          <a:bodyPr wrap="square">
+            <a:spAutoFit/>
+          </a:bodyPr>
+          <a:lstStyle/>
+          <a:p>
+            <a:r>
+              <a:rPr sz="900" b="0">
+                <a:solidFill>
+                  <a:srgbClr val="7A8698"/>
+                </a:solidFill>
+                <a:latin typeface="微软雅黑"/>
+              </a:rPr>
+              <a:t>截图内容逐字取自 工具/ppt97/evidence/m23b_bidding/（capture97.py 真跑捕获，未改写数字）</a:t>
+            </a:r>
+          </a:p>
+        </p:txBody>
+      </p:sp>
+    </p:spTree>
+  </p:cSld>
+  <p:clrMapOvr>
+    <a:masterClrMapping/>
+  </p:clrMapOvr>
+</p:sld>
+</file>
+
 <file path=ppt/slides/slide2.xml><?xml version="1.0" encoding="utf-8"?>
 <p:sld xmlns:a="http://schemas.openxmlformats.org/drawingml/2006/main" xmlns:p="http://schemas.openxmlformats.org/presentationml/2006/main" xmlns:r="http://schemas.openxmlformats.org/officeDocument/2006/relationships">
   <p:cSld>
@@ -5143,7 +7270,7 @@
                 </a:solidFill>
                 <a:latin typeface="微软雅黑"/>
               </a:rPr>
-              <a:t>2 / 10</a:t>
+              <a:t>2 / 12</a:t>
             </a:r>
           </a:p>
         </p:txBody>
@@ -5617,7 +7744,7 @@
                 </a:solidFill>
                 <a:latin typeface="微软雅黑"/>
               </a:rPr>
-              <a:t>3 / 10</a:t>
+              <a:t>3 / 12</a:t>
             </a:r>
           </a:p>
         </p:txBody>
@@ -6409,7 +8536,7 @@
                 </a:solidFill>
                 <a:latin typeface="微软雅黑"/>
               </a:rPr>
-              <a:t>4 / 10</a:t>
+              <a:t>4 / 12</a:t>
             </a:r>
           </a:p>
         </p:txBody>
@@ -7080,7 +9207,7 @@
                 </a:solidFill>
                 <a:latin typeface="微软雅黑"/>
               </a:rPr>
-              <a:t>5 / 10</a:t>
+              <a:t>5 / 12</a:t>
             </a:r>
           </a:p>
         </p:txBody>
@@ -7356,7 +9483,7 @@
                 </a:solidFill>
                 <a:latin typeface="微软雅黑"/>
               </a:rPr>
-              <a:t>6 / 10</a:t>
+              <a:t>6 / 12</a:t>
             </a:r>
           </a:p>
         </p:txBody>
@@ -7528,82 +9655,67 @@
                   <a:srgbClr val="0545E8"/>
                 </a:solidFill>
               </a:rPr>
-              <a:t>① 参考实现真实运行输出（本工单完成态）</a:t>
-            </a:r>
-          </a:p>
-          <a:p>
-            <a:pPr algn="l">
-              <a:spcBef>
-                <a:spcPts val="100"/>
-              </a:spcBef>
-            </a:pPr>
-            <a:r>
-              <a:rPr sz="1000" b="0">
-                <a:solidFill>
-                  <a:srgbClr val="010328"/>
+              <a:t>① 本次真跑实测输出（逐字取自 output/report.txt）</a:t>
+            </a:r>
+          </a:p>
+          <a:p>
+            <a:r>
+              <a:rPr sz="1400" b="1">
+                <a:solidFill>
+                  <a:srgbClr val="0545E8"/>
                 </a:solidFill>
               </a:rPr>
-              <a:t>=== 工单 M2-3b 竞标：CNN焊缝 vs LSTM风机（轻量基线）· 完成态 ===</a:t>
-            </a:r>
-          </a:p>
-          <a:p>
-            <a:pPr algn="l">
-              <a:spcBef>
-                <a:spcPts val="100"/>
-              </a:spcBef>
-            </a:pPr>
-            <a:r>
-              <a:rPr sz="1000" b="0">
-                <a:solidFill>
-                  <a:srgbClr val="010328"/>
+              <a:t>实测达成档位: 优(A) ｜ 代码规范率 95.11%（工单把≥70%钉在 D 档）｜ 复现比对 一致 ｜ CNN(torch) acc 1.0000 ｜ LSTM 误差 0.2593 ｜ 决策矩阵 6 行</a:t>
+            </a:r>
+          </a:p>
+          <a:p>
+            <a:r>
+              <a:rPr sz="1400" b="1">
+                <a:solidFill>
+                  <a:srgbClr val="0545E8"/>
                 </a:solidFill>
               </a:rPr>
-              <a:t>图像线（CNN焊缝·块统计特征3维）: 3折交叉验证 cv = 1.000</a:t>
-            </a:r>
-          </a:p>
-          <a:p>
-            <a:pPr algn="l">
-              <a:spcBef>
-                <a:spcPts val="100"/>
-              </a:spcBef>
-            </a:pPr>
-            <a:r>
-              <a:rPr sz="1000" b="0">
-                <a:solidFill>
-                  <a:srgbClr val="010328"/>
+              <a:t>及格(D)    规范率门槛≥70% [达标] ｜ 功能OK ｜ 指标可复现；代码规范率≥70% ｜ 实测 同种子两次 RF 拟合留出 acc 一致（0.8175 vs 0.8175）；规范率 95.11%</a:t>
+            </a:r>
+          </a:p>
+          <a:p>
+            <a:r>
+              <a:rPr sz="1400" b="1">
+                <a:solidFill>
+                  <a:srgbClr val="0545E8"/>
                 </a:solidFill>
               </a:rPr>
-              <a:t>时序线（LSTM风机·RMS比值1维）  : 3折交叉验证 cv = 0.995</a:t>
-            </a:r>
-          </a:p>
-          <a:p>
-            <a:pPr algn="l">
-              <a:spcBef>
-                <a:spcPts val="100"/>
-              </a:spcBef>
-            </a:pPr>
-            <a:r>
-              <a:rPr sz="1000" b="0">
-                <a:solidFill>
-                  <a:srgbClr val="010328"/>
+              <a:t>良好(C)    规范率不另设线（工单仅 D 档设线，实测 95.11%） [达标] ｜ 功能OK ｜ CNN≥75% 或 LSTM 误差≤25%（仅认真卷积/真 LSTM 臂的实测数字） ｜ 实测 CNN(torch) acc=1.0000（线≥0.75）｜LSTM(torch) 窗口错误率=0.2593（线≤0.25）——兜底臂数字不认（require_real_engine=True）</a:t>
+            </a:r>
+          </a:p>
+          <a:p>
+            <a:r>
+              <a:rPr sz="1400" b="1">
+                <a:solidFill>
+                  <a:srgbClr val="0545E8"/>
                 </a:solidFill>
               </a:rPr>
-              <a:t>竞标建议: 轻量基线支持选「CNN焊缝」（差 0.005）</a:t>
-            </a:r>
-          </a:p>
-          <a:p>
-            <a:pPr algn="l">
-              <a:spcBef>
-                <a:spcPts val="100"/>
-              </a:spcBef>
-            </a:pPr>
-            <a:r>
-              <a:rPr sz="1000" b="0">
-                <a:solidFill>
-                  <a:srgbClr val="010328"/>
+              <a:t>优秀(B)    规范率不另设线（工单仅 D 档设线，实测 95.11%） [达标] ｜ 功能OK ｜ CNN vs LSTM 两轮实测对比齐备；决策记录完整（竞标胜负/评委加分另人工） ｜ 实测 两轮对比：两臂真引擎同口径实测（acc 差 +0.2593、秒差 -0.248s）；决策记录 445 字（线 120）</a:t>
+            </a:r>
+          </a:p>
+          <a:p>
+            <a:r>
+              <a:rPr sz="1400" b="1">
+                <a:solidFill>
+                  <a:srgbClr val="0545E8"/>
                 </a:solidFill>
               </a:rPr>
-              <a:t>答辩要点: 基线≠上限——本表只证明'哪条路线更容易起步'；真模型预期增益需说明数据量、算力与标注成本三项证据。</a:t>
+              <a:t>优(A)     规范率不另设线（工单仅 D 档设线，实测 95.11%） [达标] ｜ 功能OK ｜ 选型决策矩阵：候选×权重×实测得分→结论 ｜ 实测 矩阵 6 行（线≥4）；权重 acc/speed/env=0.5/0.3/0.2 和=1.0；结论成文 136 字（线≥20）</a:t>
+            </a:r>
+          </a:p>
+          <a:p>
+            <a:r>
+              <a:rPr sz="1400" b="1">
+                <a:solidFill>
+                  <a:srgbClr val="0545E8"/>
+                </a:solidFill>
+              </a:rPr>
+              <a:t>人工答辩项（程序不判、不许自称达标）：赢得竞标或评委加分：现场评委裁决，程序无实测依据（工单 B 档人评半，证据包=选型决策矩阵+两轮对比+泄漏核查）；企业元验收栏师傅签认：功能可用/参数留痕/数据可信（学校元</a:t>
             </a:r>
           </a:p>
         </p:txBody>
@@ -7977,7 +10089,7 @@
                 </a:solidFill>
                 <a:latin typeface="微软雅黑"/>
               </a:rPr>
-              <a:t>7 / 10</a:t>
+              <a:t>7 / 12</a:t>
             </a:r>
           </a:p>
         </p:txBody>
@@ -8592,7 +10704,7 @@
                 </a:solidFill>
                 <a:latin typeface="微软雅黑"/>
               </a:rPr>
-              <a:t>8 / 10</a:t>
+              <a:t>10 / 12</a:t>
             </a:r>
           </a:p>
         </p:txBody>
@@ -9297,7 +11409,7 @@
                 </a:solidFill>
                 <a:latin typeface="微软雅黑"/>
               </a:rPr>
-              <a:t>9 / 10</a:t>
+              <a:t>11 / 12</a:t>
             </a:r>
           </a:p>
         </p:txBody>

--- a/V2授课PPT/W14-第12次课-CNN或LSTM二选一（.pptx
+++ b/V2授课PPT/W14-第12次课-CNN或LSTM二选一（.pptx
@@ -13,6 +13,8 @@
     <p:sldId id="373" r:id="rId23"/>
     <p:sldId id="374" r:id="rId24"/>
     <p:sldId id="375" r:id="rId25"/>
+    <p:sldId id="376" r:id="rId14"/>
+    <p:sldId id="377" r:id="rId27"/>
     <p:sldId id="318" r:id="rId70"/>
     <p:sldId id="366" r:id="rId16"/>
     <p:sldId id="367" r:id="rId17"/>
@@ -4420,14 +4422,14 @@
       </p:sp>
       <p:sp>
         <p:nvSpPr>
-          <p:cNvPr id="4" name="TextBox 3"/>
+          <p:cNvPr id="6" name="TextBox 5"/>
           <p:cNvSpPr txBox="1"/>
           <p:nvPr/>
         </p:nvSpPr>
         <p:spPr>
           <a:xfrm>
-            <a:off x="700000" y="300000"/>
-            <a:ext cx="10792000" cy="700000"/>
+            <a:off x="1500000" y="300000"/>
+            <a:ext cx="9992000" cy="700000"/>
           </a:xfrm>
           <a:prstGeom prst="rect">
             <a:avLst/>
@@ -4455,14 +4457,14 @@
                 </a:solidFill>
                 <a:latin typeface="微软雅黑"/>
               </a:rPr>
-              <a:t>工单完成效果图 · 先看终点（本课目标预览）</a:t>
-            </a:r>
-          </a:p>
-        </p:txBody>
-      </p:sp>
-      <p:sp>
-        <p:nvSpPr>
-          <p:cNvPr id="11" name="Rectangle 10"/>
+              <a:t>下次课预告 · 带着问题去下一讲</a:t>
+            </a:r>
+          </a:p>
+        </p:txBody>
+      </p:sp>
+      <p:sp>
+        <p:nvSpPr>
+          <p:cNvPr id="17" name="Rectangle 16"/>
           <p:cNvSpPr/>
           <p:nvPr/>
         </p:nvSpPr>
@@ -4506,7 +4508,7 @@
       </p:sp>
       <p:sp>
         <p:nvSpPr>
-          <p:cNvPr id="12" name="TextBox 11"/>
+          <p:cNvPr id="18" name="TextBox 17"/>
           <p:cNvSpPr txBox="1"/>
           <p:nvPr/>
         </p:nvSpPr>
@@ -4548,7 +4550,7 @@
       </p:sp>
       <p:sp>
         <p:nvSpPr>
-          <p:cNvPr id="13" name="TextBox 12"/>
+          <p:cNvPr id="19" name="TextBox 18"/>
           <p:cNvSpPr txBox="1"/>
           <p:nvPr/>
         </p:nvSpPr>
@@ -4583,33 +4585,65 @@
                 </a:solidFill>
                 <a:latin typeface="微软雅黑"/>
               </a:rPr>
-              <a:t>10 / 18</a:t>
-            </a:r>
-          </a:p>
-        </p:txBody>
-      </p:sp>
-      <p:sp>
-        <p:nvSpPr>
-          <p:cNvPr id="14" name="Rounded Rectangle 13"/>
+              <a:t>10 / 20</a:t>
+            </a:r>
+          </a:p>
+        </p:txBody>
+      </p:sp>
+      <p:sp>
+        <p:nvSpPr>
+          <p:cNvPr id="20" name="TextBox 19"/>
+          <p:cNvSpPr txBox="1"/>
+          <p:nvPr/>
+        </p:nvSpPr>
+        <p:spPr>
+          <a:xfrm>
+            <a:off x="457200" y="1389888"/>
+            <a:ext cx="11274552" cy="274320"/>
+          </a:xfrm>
+          <a:prstGeom prst="rect">
+            <a:avLst/>
+          </a:prstGeom>
+          <a:noFill/>
+        </p:spPr>
+        <p:txBody>
+          <a:bodyPr wrap="square">
+            <a:spAutoFit/>
+          </a:bodyPr>
+          <a:lstStyle/>
+          <a:p>
+            <a:r>
+              <a:rPr sz="1050" b="0">
+                <a:solidFill>
+                  <a:srgbClr val="6B7280"/>
+                </a:solidFill>
+                <a:latin typeface="微软雅黑"/>
+              </a:rPr>
+              <a:t>带着问题去下一讲——预习任务与自测问题逐字取自课程安排，课前完成。</a:t>
+            </a:r>
+          </a:p>
+        </p:txBody>
+      </p:sp>
+      <p:sp>
+        <p:nvSpPr>
+          <p:cNvPr id="21" name="Rectangle 20"/>
           <p:cNvSpPr/>
           <p:nvPr/>
         </p:nvSpPr>
         <p:spPr>
           <a:xfrm>
-            <a:off x="758952" y="1801368"/>
-            <a:ext cx="10899648" cy="2286000"/>
-          </a:xfrm>
-          <a:prstGeom prst="roundRect">
-            <a:avLst>
-              <a:gd name="adj" fmla="val 6000"/>
-            </a:avLst>
+            <a:off x="457200" y="1920240"/>
+            <a:ext cx="11274552" cy="960120"/>
+          </a:xfrm>
+          <a:prstGeom prst="rect">
+            <a:avLst/>
           </a:prstGeom>
           <a:solidFill>
-            <a:srgbClr val="F3F6FD"/>
+            <a:srgbClr val="F7F9FC"/>
           </a:solidFill>
-          <a:ln w="9525">
+          <a:ln>
             <a:solidFill>
-              <a:srgbClr val="C9D4EE"/>
+              <a:srgbClr val="D6DCE4"/>
             </a:solidFill>
           </a:ln>
           <a:effectLst/>
@@ -4629,34 +4663,32 @@
           </a:fontRef>
         </p:style>
         <p:txBody>
-          <a:bodyPr rtlCol="0" anchor="ctr"/>
-          <a:lstStyle/>
-          <a:p/>
-        </p:txBody>
-      </p:sp>
-      <p:sp>
-        <p:nvSpPr>
-          <p:cNvPr id="15" name="Rounded Rectangle 14"/>
+          <a:bodyPr rtlCol="0" anchor="ctr" wrap="square"/>
+          <a:lstStyle/>
+          <a:p>
+            <a:pPr algn="ctr"/>
+          </a:p>
+        </p:txBody>
+      </p:sp>
+      <p:sp>
+        <p:nvSpPr>
+          <p:cNvPr id="22" name="Rectangle 21"/>
           <p:cNvSpPr/>
           <p:nvPr/>
         </p:nvSpPr>
         <p:spPr>
           <a:xfrm>
-            <a:off x="758952" y="4178808"/>
-            <a:ext cx="10899648" cy="1051560"/>
-          </a:xfrm>
-          <a:prstGeom prst="roundRect">
-            <a:avLst>
-              <a:gd name="adj" fmla="val 6000"/>
-            </a:avLst>
+            <a:off x="457200" y="1920240"/>
+            <a:ext cx="82296" cy="960120"/>
+          </a:xfrm>
+          <a:prstGeom prst="rect">
+            <a:avLst/>
           </a:prstGeom>
           <a:solidFill>
-            <a:srgbClr val="FFFFFF"/>
+            <a:srgbClr val="2F5D8C"/>
           </a:solidFill>
-          <a:ln w="9525">
-            <a:solidFill>
-              <a:srgbClr val="C9D4EE"/>
-            </a:solidFill>
+          <a:ln>
+            <a:noFill/>
           </a:ln>
           <a:effectLst/>
         </p:spPr>
@@ -4675,33 +4707,67 @@
           </a:fontRef>
         </p:style>
         <p:txBody>
-          <a:bodyPr rtlCol="0" anchor="ctr"/>
-          <a:lstStyle/>
-          <a:p/>
-        </p:txBody>
-      </p:sp>
-      <p:sp>
-        <p:nvSpPr>
-          <p:cNvPr id="16" name="Rounded Rectangle 15"/>
+          <a:bodyPr rtlCol="0" anchor="ctr" wrap="square"/>
+          <a:lstStyle/>
+          <a:p>
+            <a:pPr algn="ctr"/>
+          </a:p>
+        </p:txBody>
+      </p:sp>
+      <p:sp>
+        <p:nvSpPr>
+          <p:cNvPr id="23" name="TextBox 22"/>
+          <p:cNvSpPr txBox="1"/>
+          <p:nvPr/>
+        </p:nvSpPr>
+        <p:spPr>
+          <a:xfrm>
+            <a:off x="685800" y="2084832"/>
+            <a:ext cx="10881360" cy="685800"/>
+          </a:xfrm>
+          <a:prstGeom prst="rect">
+            <a:avLst/>
+          </a:prstGeom>
+          <a:noFill/>
+        </p:spPr>
+        <p:txBody>
+          <a:bodyPr wrap="square">
+            <a:spAutoFit/>
+          </a:bodyPr>
+          <a:lstStyle/>
+          <a:p>
+            <a:r>
+              <a:rPr sz="1050" b="0">
+                <a:solidFill>
+                  <a:srgbClr val="2B2F36"/>
+                </a:solidFill>
+                <a:latin typeface="微软雅黑"/>
+              </a:rPr>
+              <a:t>主题：能加载预训练ResNet并替换分类头——应用：见</a:t>
+            </a:r>
+          </a:p>
+        </p:txBody>
+      </p:sp>
+      <p:sp>
+        <p:nvSpPr>
+          <p:cNvPr id="24" name="Rectangle 23"/>
           <p:cNvSpPr/>
           <p:nvPr/>
         </p:nvSpPr>
         <p:spPr>
           <a:xfrm>
-            <a:off x="758952" y="5321808"/>
-            <a:ext cx="10899648" cy="1005840"/>
-          </a:xfrm>
-          <a:prstGeom prst="roundRect">
-            <a:avLst>
-              <a:gd name="adj" fmla="val 6000"/>
-            </a:avLst>
+            <a:off x="457200" y="3026664"/>
+            <a:ext cx="11274552" cy="960120"/>
+          </a:xfrm>
+          <a:prstGeom prst="rect">
+            <a:avLst/>
           </a:prstGeom>
           <a:solidFill>
-            <a:srgbClr val="FFFFFF"/>
+            <a:srgbClr val="F7F9FC"/>
           </a:solidFill>
-          <a:ln w="9525">
+          <a:ln>
             <a:solidFill>
-              <a:srgbClr val="C9D4EE"/>
+              <a:srgbClr val="D6DCE4"/>
             </a:solidFill>
           </a:ln>
           <a:effectLst/>
@@ -4721,21 +4787,67 @@
           </a:fontRef>
         </p:style>
         <p:txBody>
-          <a:bodyPr rtlCol="0" anchor="ctr"/>
-          <a:lstStyle/>
-          <a:p/>
-        </p:txBody>
-      </p:sp>
-      <p:sp>
-        <p:nvSpPr>
-          <p:cNvPr id="17" name="TextBox 16"/>
+          <a:bodyPr rtlCol="0" anchor="ctr" wrap="square"/>
+          <a:lstStyle/>
+          <a:p>
+            <a:pPr algn="ctr"/>
+          </a:p>
+        </p:txBody>
+      </p:sp>
+      <p:sp>
+        <p:nvSpPr>
+          <p:cNvPr id="25" name="Rectangle 24"/>
+          <p:cNvSpPr/>
+          <p:nvPr/>
+        </p:nvSpPr>
+        <p:spPr>
+          <a:xfrm>
+            <a:off x="457200" y="3026664"/>
+            <a:ext cx="82296" cy="960120"/>
+          </a:xfrm>
+          <a:prstGeom prst="rect">
+            <a:avLst/>
+          </a:prstGeom>
+          <a:solidFill>
+            <a:srgbClr val="2F5D8C"/>
+          </a:solidFill>
+          <a:ln>
+            <a:noFill/>
+          </a:ln>
+          <a:effectLst/>
+        </p:spPr>
+        <p:style>
+          <a:lnRef idx="1">
+            <a:schemeClr val="accent1"/>
+          </a:lnRef>
+          <a:fillRef idx="3">
+            <a:schemeClr val="accent1"/>
+          </a:fillRef>
+          <a:effectRef idx="2">
+            <a:schemeClr val="accent1"/>
+          </a:effectRef>
+          <a:fontRef idx="minor">
+            <a:schemeClr val="lt1"/>
+          </a:fontRef>
+        </p:style>
+        <p:txBody>
+          <a:bodyPr rtlCol="0" anchor="ctr" wrap="square"/>
+          <a:lstStyle/>
+          <a:p>
+            <a:pPr algn="ctr"/>
+          </a:p>
+        </p:txBody>
+      </p:sp>
+      <p:sp>
+        <p:nvSpPr>
+          <p:cNvPr id="26" name="TextBox 25"/>
           <p:cNvSpPr txBox="1"/>
           <p:nvPr/>
         </p:nvSpPr>
         <p:spPr>
           <a:xfrm>
-            <a:off x="960120" y="1929384"/>
-            <a:ext cx="10469880" cy="2048256"/>
+            <a:off x="685800" y="3191256"/>
+            <a:ext cx="10881360" cy="685800"/>
           </a:xfrm>
           <a:prstGeom prst="rect">
             <a:avLst/>
@@ -4743,83 +4855,123 @@
           <a:noFill/>
         </p:spPr>
         <p:txBody>
-          <a:bodyPr wrap="square" anchor="t" lIns="0" rIns="0" tIns="0" bIns="0">
+          <a:bodyPr wrap="square">
             <a:spAutoFit/>
           </a:bodyPr>
           <a:lstStyle/>
           <a:p>
-            <a:pPr algn="l"/>
-            <a:r>
-              <a:rPr sz="1150" b="1">
-                <a:solidFill>
-                  <a:srgbClr val="0545E8"/>
-                </a:solidFill>
-              </a:rPr>
-              <a:t>① 本次真跑实测输出（逐字取自 output/report.txt）</a:t>
-            </a:r>
-          </a:p>
-          <a:p>
-            <a:r>
-              <a:rPr sz="1150" b="1">
-                <a:solidFill>
-                  <a:srgbClr val="0545E8"/>
-                </a:solidFill>
-              </a:rPr>
-              <a:t>实测达成档位: 优(A) ｜ 代码规范率 95.11%（工单把≥70%钉在 D 档）｜ 复现比对 一致 ｜ CNN(torch) acc 1.0000 ｜ LSTM 误差 0.2593 ｜ 决策矩阵 6 行</a:t>
-            </a:r>
-          </a:p>
-          <a:p>
-            <a:r>
-              <a:rPr sz="1150" b="1">
-                <a:solidFill>
-                  <a:srgbClr val="0545E8"/>
-                </a:solidFill>
-              </a:rPr>
-              <a:t>及格(D)    规范率门槛≥70% [达标] ｜ 功能OK ｜ 指标可复现；代码规范率≥70% ｜ 实测 同种子两次 RF 拟合留出 acc 一致（0.8175 vs 0.8175）；规范率 95.11%</a:t>
-            </a:r>
-          </a:p>
-          <a:p>
-            <a:r>
-              <a:rPr sz="1150" b="1">
-                <a:solidFill>
-                  <a:srgbClr val="0545E8"/>
-                </a:solidFill>
-              </a:rPr>
-              <a:t>良好(C)    规范率不另设线（工单仅 D 档设线，实测 95.11%） [达标] ｜ 功能OK ｜ CNN≥75% 或 LSTM 误差≤25%（仅认真卷积/真 LSTM 臂的实测数字） ｜ 实测 CNN(torch) acc=1.0000（线≥0.75）｜LSTM(torch) 窗口错误率=0.2593（线≤0.25）——兜底臂数字不认（require_real_engine=True）</a:t>
-            </a:r>
-          </a:p>
-          <a:p>
-            <a:r>
-              <a:rPr sz="1150" b="1">
-                <a:solidFill>
-                  <a:srgbClr val="0545E8"/>
-                </a:solidFill>
-              </a:rPr>
-              <a:t>优秀(B)    规范率不另设线（工单仅 D 档设线，实测 95.11%） [达标] ｜ 功能OK ｜ CNN vs LSTM 两轮实测对比齐备；决策记录完整（竞标胜负/评委加分另人工） ｜ 实测 两轮对比：两臂真引擎同口径实测（acc 差 +0.2593、秒差 -0.248s）；决策记录 445 字（线 120）</a:t>
-            </a:r>
-          </a:p>
-          <a:p>
-            <a:r>
-              <a:rPr sz="1150" b="1">
-                <a:solidFill>
-                  <a:srgbClr val="0545E8"/>
-                </a:solidFill>
-              </a:rPr>
-              <a:t>……（后续 2 行全文逐字见 工程化项目/output/report.txt）</a:t>
-            </a:r>
-          </a:p>
-        </p:txBody>
-      </p:sp>
-      <p:sp>
-        <p:nvSpPr>
-          <p:cNvPr id="18" name="TextBox 17"/>
+            <a:r>
+              <a:rPr sz="1050" b="0">
+                <a:solidFill>
+                  <a:srgbClr val="2B2F36"/>
+                </a:solidFill>
+                <a:latin typeface="微软雅黑"/>
+              </a:rPr>
+              <a:t>预习快问：课前测①：本课工单M2-3b的及格线是什么？（答：指标达标+竞标书完整）</a:t>
+            </a:r>
+          </a:p>
+        </p:txBody>
+      </p:sp>
+      <p:sp>
+        <p:nvSpPr>
+          <p:cNvPr id="27" name="Rectangle 26"/>
+          <p:cNvSpPr/>
+          <p:nvPr/>
+        </p:nvSpPr>
+        <p:spPr>
+          <a:xfrm>
+            <a:off x="457200" y="4133087"/>
+            <a:ext cx="11274552" cy="960120"/>
+          </a:xfrm>
+          <a:prstGeom prst="rect">
+            <a:avLst/>
+          </a:prstGeom>
+          <a:solidFill>
+            <a:srgbClr val="F7F9FC"/>
+          </a:solidFill>
+          <a:ln>
+            <a:solidFill>
+              <a:srgbClr val="D6DCE4"/>
+            </a:solidFill>
+          </a:ln>
+          <a:effectLst/>
+        </p:spPr>
+        <p:style>
+          <a:lnRef idx="1">
+            <a:schemeClr val="accent1"/>
+          </a:lnRef>
+          <a:fillRef idx="3">
+            <a:schemeClr val="accent1"/>
+          </a:fillRef>
+          <a:effectRef idx="2">
+            <a:schemeClr val="accent1"/>
+          </a:effectRef>
+          <a:fontRef idx="minor">
+            <a:schemeClr val="lt1"/>
+          </a:fontRef>
+        </p:style>
+        <p:txBody>
+          <a:bodyPr rtlCol="0" anchor="ctr" wrap="square"/>
+          <a:lstStyle/>
+          <a:p>
+            <a:pPr algn="ctr"/>
+          </a:p>
+        </p:txBody>
+      </p:sp>
+      <p:sp>
+        <p:nvSpPr>
+          <p:cNvPr id="28" name="Rectangle 27"/>
+          <p:cNvSpPr/>
+          <p:nvPr/>
+        </p:nvSpPr>
+        <p:spPr>
+          <a:xfrm>
+            <a:off x="457200" y="4133087"/>
+            <a:ext cx="82296" cy="960120"/>
+          </a:xfrm>
+          <a:prstGeom prst="rect">
+            <a:avLst/>
+          </a:prstGeom>
+          <a:solidFill>
+            <a:srgbClr val="2F5D8C"/>
+          </a:solidFill>
+          <a:ln>
+            <a:noFill/>
+          </a:ln>
+          <a:effectLst/>
+        </p:spPr>
+        <p:style>
+          <a:lnRef idx="1">
+            <a:schemeClr val="accent1"/>
+          </a:lnRef>
+          <a:fillRef idx="3">
+            <a:schemeClr val="accent1"/>
+          </a:fillRef>
+          <a:effectRef idx="2">
+            <a:schemeClr val="accent1"/>
+          </a:effectRef>
+          <a:fontRef idx="minor">
+            <a:schemeClr val="lt1"/>
+          </a:fontRef>
+        </p:style>
+        <p:txBody>
+          <a:bodyPr rtlCol="0" anchor="ctr" wrap="square"/>
+          <a:lstStyle/>
+          <a:p>
+            <a:pPr algn="ctr"/>
+          </a:p>
+        </p:txBody>
+      </p:sp>
+      <p:sp>
+        <p:nvSpPr>
+          <p:cNvPr id="29" name="TextBox 28"/>
           <p:cNvSpPr txBox="1"/>
           <p:nvPr/>
         </p:nvSpPr>
         <p:spPr>
           <a:xfrm>
-            <a:off x="960120" y="4297680"/>
-            <a:ext cx="10469880" cy="868680"/>
+            <a:off x="685800" y="4297679"/>
+            <a:ext cx="10881360" cy="685800"/>
           </a:xfrm>
           <a:prstGeom prst="rect">
             <a:avLst/>
@@ -4827,48 +4979,123 @@
           <a:noFill/>
         </p:spPr>
         <p:txBody>
-          <a:bodyPr wrap="square" anchor="t" lIns="0" rIns="0" tIns="0" bIns="0">
+          <a:bodyPr wrap="square">
             <a:spAutoFit/>
           </a:bodyPr>
           <a:lstStyle/>
           <a:p>
-            <a:pPr algn="l"/>
-            <a:r>
-              <a:rPr sz="1300" b="1">
-                <a:solidFill>
-                  <a:srgbClr val="0545E8"/>
-                </a:solidFill>
-              </a:rPr>
-              <a:t>② 关键自检点（对照工单逐项核对）</a:t>
-            </a:r>
-          </a:p>
-          <a:p>
-            <a:pPr algn="l">
-              <a:spcBef>
-                <a:spcPts val="200"/>
-              </a:spcBef>
-            </a:pPr>
-            <a:r>
-              <a:rPr sz="1150" b="0">
-                <a:solidFill>
-                  <a:srgbClr val="010328"/>
-                </a:solidFill>
-              </a:rPr>
-              <a:t>□ 代码从头跑到尾不报错　□ 指标与工单及格线逐项对齐　□ 随机种子已固定（可复现）</a:t>
-            </a:r>
-          </a:p>
-        </p:txBody>
-      </p:sp>
-      <p:sp>
-        <p:nvSpPr>
-          <p:cNvPr id="19" name="TextBox 18"/>
+            <a:r>
+              <a:rPr sz="1050" b="0">
+                <a:solidFill>
+                  <a:srgbClr val="2B2F36"/>
+                </a:solidFill>
+                <a:latin typeface="微软雅黑"/>
+              </a:rPr>
+              <a:t>课前完成：导学单 + 预习自测 + starter环境自检</a:t>
+            </a:r>
+          </a:p>
+        </p:txBody>
+      </p:sp>
+      <p:sp>
+        <p:nvSpPr>
+          <p:cNvPr id="30" name="Rectangle 29"/>
+          <p:cNvSpPr/>
+          <p:nvPr/>
+        </p:nvSpPr>
+        <p:spPr>
+          <a:xfrm>
+            <a:off x="457200" y="5239512"/>
+            <a:ext cx="11274552" cy="960120"/>
+          </a:xfrm>
+          <a:prstGeom prst="rect">
+            <a:avLst/>
+          </a:prstGeom>
+          <a:solidFill>
+            <a:srgbClr val="F7F9FC"/>
+          </a:solidFill>
+          <a:ln>
+            <a:solidFill>
+              <a:srgbClr val="D6DCE4"/>
+            </a:solidFill>
+          </a:ln>
+          <a:effectLst/>
+        </p:spPr>
+        <p:style>
+          <a:lnRef idx="1">
+            <a:schemeClr val="accent1"/>
+          </a:lnRef>
+          <a:fillRef idx="3">
+            <a:schemeClr val="accent1"/>
+          </a:fillRef>
+          <a:effectRef idx="2">
+            <a:schemeClr val="accent1"/>
+          </a:effectRef>
+          <a:fontRef idx="minor">
+            <a:schemeClr val="lt1"/>
+          </a:fontRef>
+        </p:style>
+        <p:txBody>
+          <a:bodyPr rtlCol="0" anchor="ctr" wrap="square"/>
+          <a:lstStyle/>
+          <a:p>
+            <a:pPr algn="ctr"/>
+          </a:p>
+        </p:txBody>
+      </p:sp>
+      <p:sp>
+        <p:nvSpPr>
+          <p:cNvPr id="31" name="Rectangle 30"/>
+          <p:cNvSpPr/>
+          <p:nvPr/>
+        </p:nvSpPr>
+        <p:spPr>
+          <a:xfrm>
+            <a:off x="457200" y="5239512"/>
+            <a:ext cx="82296" cy="960120"/>
+          </a:xfrm>
+          <a:prstGeom prst="rect">
+            <a:avLst/>
+          </a:prstGeom>
+          <a:solidFill>
+            <a:srgbClr val="2F5D8C"/>
+          </a:solidFill>
+          <a:ln>
+            <a:noFill/>
+          </a:ln>
+          <a:effectLst/>
+        </p:spPr>
+        <p:style>
+          <a:lnRef idx="1">
+            <a:schemeClr val="accent1"/>
+          </a:lnRef>
+          <a:fillRef idx="3">
+            <a:schemeClr val="accent1"/>
+          </a:fillRef>
+          <a:effectRef idx="2">
+            <a:schemeClr val="accent1"/>
+          </a:effectRef>
+          <a:fontRef idx="minor">
+            <a:schemeClr val="lt1"/>
+          </a:fontRef>
+        </p:style>
+        <p:txBody>
+          <a:bodyPr rtlCol="0" anchor="ctr" wrap="square"/>
+          <a:lstStyle/>
+          <a:p>
+            <a:pPr algn="ctr"/>
+          </a:p>
+        </p:txBody>
+      </p:sp>
+      <p:sp>
+        <p:nvSpPr>
+          <p:cNvPr id="32" name="TextBox 31"/>
           <p:cNvSpPr txBox="1"/>
           <p:nvPr/>
         </p:nvSpPr>
         <p:spPr>
           <a:xfrm>
-            <a:off x="960120" y="5431536"/>
-            <a:ext cx="10469880" cy="841248"/>
+            <a:off x="685800" y="5404103"/>
+            <a:ext cx="10881360" cy="685800"/>
           </a:xfrm>
           <a:prstGeom prst="rect">
             <a:avLst/>
@@ -4876,34 +5103,19 @@
           <a:noFill/>
         </p:spPr>
         <p:txBody>
-          <a:bodyPr wrap="square" anchor="t" lIns="0" rIns="0" tIns="0" bIns="0">
+          <a:bodyPr wrap="square">
             <a:spAutoFit/>
           </a:bodyPr>
           <a:lstStyle/>
           <a:p>
-            <a:pPr algn="l"/>
-            <a:r>
-              <a:rPr sz="1300" b="1">
-                <a:solidFill>
-                  <a:srgbClr val="F5670F"/>
-                </a:solidFill>
-              </a:rPr>
-              <a:t>③ 提交与达标（过程性证据）</a:t>
-            </a:r>
-          </a:p>
-          <a:p>
-            <a:pPr algn="l">
-              <a:spcBef>
-                <a:spcPts val="200"/>
-              </a:spcBef>
-            </a:pPr>
-            <a:r>
-              <a:rPr sz="1100" b="0">
-                <a:solidFill>
-                  <a:srgbClr val="010328"/>
-                </a:solidFill>
-              </a:rPr>
-              <a:t>达标线 D≥60 / C≥70 / B≥80 / A≥90　｜　提交 学号_姓名_工单号 + 运行截图 + 决策记录 + Git≥1次commit</a:t>
+            <a:r>
+              <a:rPr sz="1050" b="0">
+                <a:solidFill>
+                  <a:srgbClr val="2B2F36"/>
+                </a:solidFill>
+                <a:latin typeface="微软雅黑"/>
+              </a:rPr>
+              <a:t>带着问题：来上课——Predict先于Run</a:t>
             </a:r>
           </a:p>
         </p:txBody>
@@ -5051,27 +5263,27 @@
                 </a:solidFill>
                 <a:latin typeface="微软雅黑"/>
               </a:rPr>
-              <a:t>本工单的工程化项目 · 第三种代码形态</a:t>
-            </a:r>
-          </a:p>
-        </p:txBody>
-      </p:sp>
-      <p:sp>
-        <p:nvSpPr>
-          <p:cNvPr id="11" name="Rectangle 10"/>
+              <a:t>实施任务：工单M2-3b《CNN或LSTM二选一（竞标）（下）：优化与评价》</a:t>
+            </a:r>
+          </a:p>
+        </p:txBody>
+      </p:sp>
+      <p:sp>
+        <p:nvSpPr>
+          <p:cNvPr id="5" name="Rectangle 4"/>
           <p:cNvSpPr/>
           <p:nvPr/>
         </p:nvSpPr>
         <p:spPr>
           <a:xfrm>
-            <a:off x="500000" y="6500000"/>
-            <a:ext cx="11100000" cy="20000"/>
+            <a:off x="800000" y="1950000"/>
+            <a:ext cx="6300000" cy="3900000"/>
           </a:xfrm>
           <a:prstGeom prst="rect">
             <a:avLst/>
           </a:prstGeom>
           <a:solidFill>
-            <a:srgbClr val="C9D4EE"/>
+            <a:srgbClr val="F3F6FD"/>
           </a:solidFill>
           <a:ln>
             <a:noFill/>
@@ -5102,14 +5314,197 @@
       </p:sp>
       <p:sp>
         <p:nvSpPr>
-          <p:cNvPr id="12" name="TextBox 11"/>
+          <p:cNvPr id="6" name="TextBox 5"/>
           <p:cNvSpPr txBox="1"/>
           <p:nvPr/>
         </p:nvSpPr>
         <p:spPr>
           <a:xfrm>
-            <a:off x="500000" y="6540000"/>
-            <a:ext cx="7000000" cy="300000"/>
+            <a:off x="1000000" y="2100000"/>
+            <a:ext cx="5900000" cy="3600000"/>
+          </a:xfrm>
+          <a:prstGeom prst="rect">
+            <a:avLst/>
+          </a:prstGeom>
+          <a:noFill/>
+        </p:spPr>
+        <p:txBody>
+          <a:bodyPr wrap="square" anchor="t">
+            <a:spAutoFit/>
+          </a:bodyPr>
+          <a:lstStyle/>
+          <a:p>
+            <a:pPr algn="l">
+              <a:lnSpc>
+                <a:spcPct val="130000"/>
+              </a:lnSpc>
+              <a:spcAft>
+                <a:spcPts val="600"/>
+              </a:spcAft>
+            </a:pPr>
+            <a:r>
+              <a:rPr sz="1500" b="1">
+                <a:solidFill>
+                  <a:srgbClr val="0545E8"/>
+                </a:solidFill>
+                <a:latin typeface="微软雅黑"/>
+              </a:rPr>
+              <a:t>实施步骤</a:t>
+            </a:r>
+          </a:p>
+          <a:p>
+            <a:pPr algn="l">
+              <a:lnSpc>
+                <a:spcPct val="130000"/>
+              </a:lnSpc>
+              <a:spcAft>
+                <a:spcPts val="600"/>
+              </a:spcAft>
+            </a:pPr>
+            <a:r>
+              <a:rPr sz="1400" b="0">
+                <a:solidFill>
+                  <a:srgbClr val="010328"/>
+                </a:solidFill>
+                <a:latin typeface="微软雅黑"/>
+              </a:rPr>
+              <a:t>1. 错误速查复盘</a:t>
+            </a:r>
+          </a:p>
+          <a:p>
+            <a:pPr algn="l">
+              <a:lnSpc>
+                <a:spcPct val="130000"/>
+              </a:lnSpc>
+              <a:spcAft>
+                <a:spcPts val="600"/>
+              </a:spcAft>
+            </a:pPr>
+            <a:r>
+              <a:rPr sz="1400" b="0">
+                <a:solidFill>
+                  <a:srgbClr val="010328"/>
+                </a:solidFill>
+                <a:latin typeface="微软雅黑"/>
+              </a:rPr>
+              <a:t>2. 优化冲刺（B/A层）</a:t>
+            </a:r>
+          </a:p>
+          <a:p>
+            <a:pPr algn="l">
+              <a:lnSpc>
+                <a:spcPct val="130000"/>
+              </a:lnSpc>
+              <a:spcAft>
+                <a:spcPts val="600"/>
+              </a:spcAft>
+            </a:pPr>
+            <a:r>
+              <a:rPr sz="1400" b="0">
+                <a:solidFill>
+                  <a:srgbClr val="010328"/>
+                </a:solidFill>
+                <a:latin typeface="微软雅黑"/>
+              </a:rPr>
+              <a:t>3. 三层质检互查</a:t>
+            </a:r>
+          </a:p>
+          <a:p>
+            <a:pPr algn="l">
+              <a:lnSpc>
+                <a:spcPct val="130000"/>
+              </a:lnSpc>
+              <a:spcAft>
+                <a:spcPts val="600"/>
+              </a:spcAft>
+            </a:pPr>
+            <a:r>
+              <a:rPr sz="1400" b="0">
+                <a:solidFill>
+                  <a:srgbClr val="010328"/>
+                </a:solidFill>
+                <a:latin typeface="微软雅黑"/>
+              </a:rPr>
+              <a:t>4. 当堂评分与反馈</a:t>
+            </a:r>
+          </a:p>
+          <a:p>
+            <a:pPr algn="l">
+              <a:lnSpc>
+                <a:spcPct val="130000"/>
+              </a:lnSpc>
+              <a:spcAft>
+                <a:spcPts val="600"/>
+              </a:spcAft>
+            </a:pPr>
+            <a:r>
+              <a:rPr sz="1400" b="0">
+                <a:solidFill>
+                  <a:srgbClr val="010328"/>
+                </a:solidFill>
+                <a:latin typeface="微软雅黑"/>
+              </a:rPr>
+              <a:t>5. 下次课预告+微课</a:t>
+            </a:r>
+          </a:p>
+        </p:txBody>
+      </p:sp>
+      <p:sp>
+        <p:nvSpPr>
+          <p:cNvPr id="7" name="Rectangle 6"/>
+          <p:cNvSpPr/>
+          <p:nvPr/>
+        </p:nvSpPr>
+        <p:spPr>
+          <a:xfrm>
+            <a:off x="7400000" y="1950000"/>
+            <a:ext cx="4000000" cy="1850000"/>
+          </a:xfrm>
+          <a:prstGeom prst="rect">
+            <a:avLst/>
+          </a:prstGeom>
+          <a:solidFill>
+            <a:srgbClr val="E8F1E8"/>
+          </a:solidFill>
+          <a:ln>
+            <a:solidFill>
+              <a:srgbClr val="0475B6"/>
+            </a:solidFill>
+          </a:ln>
+          <a:effectLst/>
+        </p:spPr>
+        <p:style>
+          <a:lnRef idx="1">
+            <a:schemeClr val="accent1"/>
+          </a:lnRef>
+          <a:fillRef idx="3">
+            <a:schemeClr val="accent1"/>
+          </a:fillRef>
+          <a:effectRef idx="2">
+            <a:schemeClr val="accent1"/>
+          </a:effectRef>
+          <a:fontRef idx="minor">
+            <a:schemeClr val="lt1"/>
+          </a:fontRef>
+        </p:style>
+        <p:txBody>
+          <a:bodyPr rtlCol="0" anchor="ctr"/>
+          <a:lstStyle/>
+          <a:p>
+            <a:pPr algn="ctr"/>
+          </a:p>
+        </p:txBody>
+      </p:sp>
+      <p:sp>
+        <p:nvSpPr>
+          <p:cNvPr id="8" name="TextBox 7"/>
+          <p:cNvSpPr txBox="1"/>
+          <p:nvPr/>
+        </p:nvSpPr>
+        <p:spPr>
+          <a:xfrm>
+            <a:off x="7550000" y="2080000"/>
+            <a:ext cx="3750000" cy="1650000"/>
           </a:xfrm>
           <a:prstGeom prst="rect">
             <a:avLst/>
@@ -5131,6 +5526,218 @@
               </a:spcAft>
             </a:pPr>
             <a:r>
+              <a:rPr sz="1400" b="1">
+                <a:solidFill>
+                  <a:srgbClr val="0475B6"/>
+                </a:solidFill>
+                <a:latin typeface="微软雅黑"/>
+              </a:rPr>
+              <a:t>及格标准（D）</a:t>
+            </a:r>
+          </a:p>
+          <a:p>
+            <a:pPr algn="l">
+              <a:lnSpc>
+                <a:spcPct val="110000"/>
+              </a:lnSpc>
+              <a:spcAft>
+                <a:spcPts val="600"/>
+              </a:spcAft>
+            </a:pPr>
+            <a:r>
+              <a:rPr sz="1300" b="0">
+                <a:solidFill>
+                  <a:srgbClr val="010328"/>
+                </a:solidFill>
+                <a:latin typeface="微软雅黑"/>
+              </a:rPr>
+              <a:t>指标达标+竞标书完整</a:t>
+            </a:r>
+          </a:p>
+        </p:txBody>
+      </p:sp>
+      <p:sp>
+        <p:nvSpPr>
+          <p:cNvPr id="9" name="Rectangle 8"/>
+          <p:cNvSpPr/>
+          <p:nvPr/>
+        </p:nvSpPr>
+        <p:spPr>
+          <a:xfrm>
+            <a:off x="7400000" y="3950000"/>
+            <a:ext cx="4000000" cy="1850000"/>
+          </a:xfrm>
+          <a:prstGeom prst="rect">
+            <a:avLst/>
+          </a:prstGeom>
+          <a:solidFill>
+            <a:srgbClr val="FDF0E6"/>
+          </a:solidFill>
+          <a:ln>
+            <a:solidFill>
+              <a:srgbClr val="F5670F"/>
+            </a:solidFill>
+          </a:ln>
+          <a:effectLst/>
+        </p:spPr>
+        <p:style>
+          <a:lnRef idx="1">
+            <a:schemeClr val="accent1"/>
+          </a:lnRef>
+          <a:fillRef idx="3">
+            <a:schemeClr val="accent1"/>
+          </a:fillRef>
+          <a:effectRef idx="2">
+            <a:schemeClr val="accent1"/>
+          </a:effectRef>
+          <a:fontRef idx="minor">
+            <a:schemeClr val="lt1"/>
+          </a:fontRef>
+        </p:style>
+        <p:txBody>
+          <a:bodyPr rtlCol="0" anchor="ctr"/>
+          <a:lstStyle/>
+          <a:p>
+            <a:pPr algn="ctr"/>
+          </a:p>
+        </p:txBody>
+      </p:sp>
+      <p:sp>
+        <p:nvSpPr>
+          <p:cNvPr id="10" name="TextBox 9"/>
+          <p:cNvSpPr txBox="1"/>
+          <p:nvPr/>
+        </p:nvSpPr>
+        <p:spPr>
+          <a:xfrm>
+            <a:off x="7550000" y="4080000"/>
+            <a:ext cx="3750000" cy="1650000"/>
+          </a:xfrm>
+          <a:prstGeom prst="rect">
+            <a:avLst/>
+          </a:prstGeom>
+          <a:noFill/>
+        </p:spPr>
+        <p:txBody>
+          <a:bodyPr wrap="square" anchor="t">
+            <a:spAutoFit/>
+          </a:bodyPr>
+          <a:lstStyle/>
+          <a:p>
+            <a:pPr algn="l">
+              <a:lnSpc>
+                <a:spcPct val="110000"/>
+              </a:lnSpc>
+              <a:spcAft>
+                <a:spcPts val="600"/>
+              </a:spcAft>
+            </a:pPr>
+            <a:r>
+              <a:rPr sz="1400" b="1">
+                <a:solidFill>
+                  <a:srgbClr val="F5670F"/>
+                </a:solidFill>
+                <a:latin typeface="微软雅黑"/>
+              </a:rPr>
+              <a:t>优秀标准（B+）</a:t>
+            </a:r>
+          </a:p>
+          <a:p>
+            <a:pPr algn="l">
+              <a:lnSpc>
+                <a:spcPct val="110000"/>
+              </a:lnSpc>
+              <a:spcAft>
+                <a:spcPts val="600"/>
+              </a:spcAft>
+            </a:pPr>
+            <a:r>
+              <a:rPr sz="1300" b="0">
+                <a:solidFill>
+                  <a:srgbClr val="010328"/>
+                </a:solidFill>
+                <a:latin typeface="微软雅黑"/>
+              </a:rPr>
+              <a:t>赢得竞标且指标优秀</a:t>
+            </a:r>
+          </a:p>
+        </p:txBody>
+      </p:sp>
+      <p:sp>
+        <p:nvSpPr>
+          <p:cNvPr id="11" name="Rectangle 10"/>
+          <p:cNvSpPr/>
+          <p:nvPr/>
+        </p:nvSpPr>
+        <p:spPr>
+          <a:xfrm>
+            <a:off x="500000" y="6500000"/>
+            <a:ext cx="11100000" cy="20000"/>
+          </a:xfrm>
+          <a:prstGeom prst="rect">
+            <a:avLst/>
+          </a:prstGeom>
+          <a:solidFill>
+            <a:srgbClr val="C9D4EE"/>
+          </a:solidFill>
+          <a:ln>
+            <a:noFill/>
+          </a:ln>
+          <a:effectLst/>
+        </p:spPr>
+        <p:style>
+          <a:lnRef idx="1">
+            <a:schemeClr val="accent1"/>
+          </a:lnRef>
+          <a:fillRef idx="3">
+            <a:schemeClr val="accent1"/>
+          </a:fillRef>
+          <a:effectRef idx="2">
+            <a:schemeClr val="accent1"/>
+          </a:effectRef>
+          <a:fontRef idx="minor">
+            <a:schemeClr val="lt1"/>
+          </a:fontRef>
+        </p:style>
+        <p:txBody>
+          <a:bodyPr rtlCol="0" anchor="ctr"/>
+          <a:lstStyle/>
+          <a:p>
+            <a:pPr algn="ctr"/>
+          </a:p>
+        </p:txBody>
+      </p:sp>
+      <p:sp>
+        <p:nvSpPr>
+          <p:cNvPr id="12" name="TextBox 11"/>
+          <p:cNvSpPr txBox="1"/>
+          <p:nvPr/>
+        </p:nvSpPr>
+        <p:spPr>
+          <a:xfrm>
+            <a:off x="500000" y="6540000"/>
+            <a:ext cx="7000000" cy="300000"/>
+          </a:xfrm>
+          <a:prstGeom prst="rect">
+            <a:avLst/>
+          </a:prstGeom>
+          <a:noFill/>
+        </p:spPr>
+        <p:txBody>
+          <a:bodyPr wrap="square" anchor="t">
+            <a:spAutoFit/>
+          </a:bodyPr>
+          <a:lstStyle/>
+          <a:p>
+            <a:pPr algn="l">
+              <a:lnSpc>
+                <a:spcPct val="110000"/>
+              </a:lnSpc>
+              <a:spcAft>
+                <a:spcPts val="600"/>
+              </a:spcAft>
+            </a:pPr>
+            <a:r>
               <a:rPr sz="1000" b="0">
                 <a:solidFill>
                   <a:srgbClr val="8A97B5"/>
@@ -5179,346 +5786,7 @@
                 </a:solidFill>
                 <a:latin typeface="微软雅黑"/>
               </a:rPr>
-              <a:t>11 / 18</a:t>
-            </a:r>
-          </a:p>
-        </p:txBody>
-      </p:sp>
-      <p:sp>
-        <p:nvSpPr>
-          <p:cNvPr id="14" name="Rounded Rectangle 13"/>
-          <p:cNvSpPr/>
-          <p:nvPr/>
-        </p:nvSpPr>
-        <p:spPr>
-          <a:xfrm>
-            <a:off x="758952" y="1801368"/>
-            <a:ext cx="10899648" cy="2286000"/>
-          </a:xfrm>
-          <a:prstGeom prst="roundRect">
-            <a:avLst>
-              <a:gd name="adj" fmla="val 6000"/>
-            </a:avLst>
-          </a:prstGeom>
-          <a:solidFill>
-            <a:srgbClr val="F3F6FD"/>
-          </a:solidFill>
-          <a:ln w="9525">
-            <a:solidFill>
-              <a:srgbClr val="C9D4EE"/>
-            </a:solidFill>
-          </a:ln>
-          <a:effectLst/>
-        </p:spPr>
-        <p:style>
-          <a:lnRef idx="1">
-            <a:schemeClr val="accent1"/>
-          </a:lnRef>
-          <a:fillRef idx="3">
-            <a:schemeClr val="accent1"/>
-          </a:fillRef>
-          <a:effectRef idx="2">
-            <a:schemeClr val="accent1"/>
-          </a:effectRef>
-          <a:fontRef idx="minor">
-            <a:schemeClr val="lt1"/>
-          </a:fontRef>
-        </p:style>
-        <p:txBody>
-          <a:bodyPr rtlCol="0" anchor="ctr"/>
-          <a:lstStyle/>
-          <a:p/>
-        </p:txBody>
-      </p:sp>
-      <p:sp>
-        <p:nvSpPr>
-          <p:cNvPr id="15" name="Rounded Rectangle 14"/>
-          <p:cNvSpPr/>
-          <p:nvPr/>
-        </p:nvSpPr>
-        <p:spPr>
-          <a:xfrm>
-            <a:off x="758952" y="4178808"/>
-            <a:ext cx="10899648" cy="1051560"/>
-          </a:xfrm>
-          <a:prstGeom prst="roundRect">
-            <a:avLst>
-              <a:gd name="adj" fmla="val 6000"/>
-            </a:avLst>
-          </a:prstGeom>
-          <a:solidFill>
-            <a:srgbClr val="FFFFFF"/>
-          </a:solidFill>
-          <a:ln w="9525">
-            <a:solidFill>
-              <a:srgbClr val="C9D4EE"/>
-            </a:solidFill>
-          </a:ln>
-          <a:effectLst/>
-        </p:spPr>
-        <p:style>
-          <a:lnRef idx="1">
-            <a:schemeClr val="accent1"/>
-          </a:lnRef>
-          <a:fillRef idx="3">
-            <a:schemeClr val="accent1"/>
-          </a:fillRef>
-          <a:effectRef idx="2">
-            <a:schemeClr val="accent1"/>
-          </a:effectRef>
-          <a:fontRef idx="minor">
-            <a:schemeClr val="lt1"/>
-          </a:fontRef>
-        </p:style>
-        <p:txBody>
-          <a:bodyPr rtlCol="0" anchor="ctr"/>
-          <a:lstStyle/>
-          <a:p/>
-        </p:txBody>
-      </p:sp>
-      <p:sp>
-        <p:nvSpPr>
-          <p:cNvPr id="16" name="Rounded Rectangle 15"/>
-          <p:cNvSpPr/>
-          <p:nvPr/>
-        </p:nvSpPr>
-        <p:spPr>
-          <a:xfrm>
-            <a:off x="758952" y="5321808"/>
-            <a:ext cx="10899648" cy="1005840"/>
-          </a:xfrm>
-          <a:prstGeom prst="roundRect">
-            <a:avLst>
-              <a:gd name="adj" fmla="val 6000"/>
-            </a:avLst>
-          </a:prstGeom>
-          <a:solidFill>
-            <a:srgbClr val="FFFFFF"/>
-          </a:solidFill>
-          <a:ln w="9525">
-            <a:solidFill>
-              <a:srgbClr val="C9D4EE"/>
-            </a:solidFill>
-          </a:ln>
-          <a:effectLst/>
-        </p:spPr>
-        <p:style>
-          <a:lnRef idx="1">
-            <a:schemeClr val="accent1"/>
-          </a:lnRef>
-          <a:fillRef idx="3">
-            <a:schemeClr val="accent1"/>
-          </a:fillRef>
-          <a:effectRef idx="2">
-            <a:schemeClr val="accent1"/>
-          </a:effectRef>
-          <a:fontRef idx="minor">
-            <a:schemeClr val="lt1"/>
-          </a:fontRef>
-        </p:style>
-        <p:txBody>
-          <a:bodyPr rtlCol="0" anchor="ctr"/>
-          <a:lstStyle/>
-          <a:p/>
-        </p:txBody>
-      </p:sp>
-      <p:sp>
-        <p:nvSpPr>
-          <p:cNvPr id="17" name="TextBox 16"/>
-          <p:cNvSpPr txBox="1"/>
-          <p:nvPr/>
-        </p:nvSpPr>
-        <p:spPr>
-          <a:xfrm>
-            <a:off x="960120" y="1929384"/>
-            <a:ext cx="10469880" cy="2048256"/>
-          </a:xfrm>
-          <a:prstGeom prst="rect">
-            <a:avLst/>
-          </a:prstGeom>
-          <a:noFill/>
-        </p:spPr>
-        <p:txBody>
-          <a:bodyPr wrap="square" anchor="t" lIns="0" rIns="0" tIns="0" bIns="0">
-            <a:spAutoFit/>
-          </a:bodyPr>
-          <a:lstStyle/>
-          <a:p>
-            <a:pPr algn="l"/>
-            <a:r>
-              <a:rPr sz="1400" b="1">
-                <a:solidFill>
-                  <a:srgbClr val="0545E8"/>
-                </a:solidFill>
-              </a:rPr>
-              <a:t>① 项目位置与一键运行</a:t>
-            </a:r>
-          </a:p>
-          <a:p>
-            <a:pPr algn="l"/>
-            <a:r>
-              <a:rPr sz="1400" b="1">
-                <a:solidFill>
-                  <a:srgbClr val="0545E8"/>
-                </a:solidFill>
-              </a:rPr>
-              <a:t>工程化项目/m23b_bidding/</a:t>
-            </a:r>
-          </a:p>
-          <a:p>
-            <a:pPr algn="l"/>
-            <a:r>
-              <a:rPr sz="1400" b="1">
-                <a:solidFill>
-                  <a:srgbClr val="0545E8"/>
-                </a:solidFill>
-              </a:rPr>
-              <a:t>python run.py          # 输出 output/report.txt + result.json</a:t>
-            </a:r>
-          </a:p>
-          <a:p>
-            <a:pPr algn="l"/>
-            <a:r>
-              <a:rPr sz="1400" b="1">
-                <a:solidFill>
-                  <a:srgbClr val="0545E8"/>
-                </a:solidFill>
-              </a:rPr>
-              <a:t>python -m pytest -q    # 全量测试应全绿</a:t>
-            </a:r>
-          </a:p>
-        </p:txBody>
-      </p:sp>
-      <p:sp>
-        <p:nvSpPr>
-          <p:cNvPr id="18" name="TextBox 17"/>
-          <p:cNvSpPr txBox="1"/>
-          <p:nvPr/>
-        </p:nvSpPr>
-        <p:spPr>
-          <a:xfrm>
-            <a:off x="960120" y="4297680"/>
-            <a:ext cx="10469880" cy="868680"/>
-          </a:xfrm>
-          <a:prstGeom prst="rect">
-            <a:avLst/>
-          </a:prstGeom>
-          <a:noFill/>
-        </p:spPr>
-        <p:txBody>
-          <a:bodyPr wrap="square" anchor="t" lIns="0" rIns="0" tIns="0" bIns="0">
-            <a:spAutoFit/>
-          </a:bodyPr>
-          <a:lstStyle/>
-          <a:p>
-            <a:pPr algn="l"/>
-            <a:r>
-              <a:rPr sz="1300" b="1">
-                <a:solidFill>
-                  <a:srgbClr val="0545E8"/>
-                </a:solidFill>
-              </a:rPr>
-              <a:t>② 目录结构（23 个文件）</a:t>
-            </a:r>
-          </a:p>
-          <a:p>
-            <a:pPr algn="l"/>
-            <a:r>
-              <a:rPr sz="1300" b="1">
-                <a:solidFill>
-                  <a:srgbClr val="0545E8"/>
-                </a:solidFill>
-              </a:rPr>
-              <a:t>config/rules.yaml      规则外置：改配置不改代码</a:t>
-            </a:r>
-          </a:p>
-          <a:p>
-            <a:pPr algn="l"/>
-            <a:r>
-              <a:rPr sz="1300" b="1">
-                <a:solidFill>
-                  <a:srgbClr val="0545E8"/>
-                </a:solidFill>
-              </a:rPr>
-              <a:t>src/bidding_lines/  config · core · io_utils · report · pipeline</a:t>
-            </a:r>
-          </a:p>
-          <a:p>
-            <a:pPr algn="l"/>
-            <a:r>
-              <a:rPr sz="1300" b="1">
-                <a:solidFill>
-                  <a:srgbClr val="0545E8"/>
-                </a:solidFill>
-              </a:rPr>
-              <a:t>tests/      正常 / 边界 / 异常三档</a:t>
-            </a:r>
-          </a:p>
-        </p:txBody>
-      </p:sp>
-      <p:sp>
-        <p:nvSpPr>
-          <p:cNvPr id="19" name="TextBox 18"/>
-          <p:cNvSpPr txBox="1"/>
-          <p:nvPr/>
-        </p:nvSpPr>
-        <p:spPr>
-          <a:xfrm>
-            <a:off x="960120" y="5431536"/>
-            <a:ext cx="10469880" cy="841248"/>
-          </a:xfrm>
-          <a:prstGeom prst="rect">
-            <a:avLst/>
-          </a:prstGeom>
-          <a:noFill/>
-        </p:spPr>
-        <p:txBody>
-          <a:bodyPr wrap="square" anchor="t" lIns="0" rIns="0" tIns="0" bIns="0">
-            <a:spAutoFit/>
-          </a:bodyPr>
-          <a:lstStyle/>
-          <a:p>
-            <a:pPr algn="l"/>
-            <a:r>
-              <a:rPr sz="1300" b="1">
-                <a:solidFill>
-                  <a:srgbClr val="F5670F"/>
-                </a:solidFill>
-              </a:rPr>
-              <a:t>③ 国标与 TOGAF 落地</a:t>
-            </a:r>
-          </a:p>
-          <a:p>
-            <a:pPr algn="l"/>
-            <a:r>
-              <a:rPr sz="1300" b="1">
-                <a:solidFill>
-                  <a:srgbClr val="F5670F"/>
-                </a:solidFill>
-              </a:rPr>
-              <a:t>GB/T 9385 需求规格 / 15532 测试 / 8567 文档 / 8566 过程组</a:t>
-            </a:r>
-          </a:p>
-          <a:p>
-            <a:pPr algn="l"/>
-            <a:r>
-              <a:rPr sz="1300" b="1">
-                <a:solidFill>
-                  <a:srgbClr val="F5670F"/>
-                </a:solidFill>
-              </a:rPr>
-              <a:t>TOGAF 四域：业务 · 数据 · 应用 · 技术架构</a:t>
-            </a:r>
-          </a:p>
-          <a:p>
-            <a:pPr algn="l"/>
-            <a:r>
-              <a:rPr sz="1300" b="1">
-                <a:solidFill>
-                  <a:srgbClr val="F5670F"/>
-                </a:solidFill>
-              </a:rPr>
-              <a:t>docs/07 ADR-001 架构决策记录</a:t>
+              <a:t>11 / 20</a:t>
             </a:r>
           </a:p>
         </p:txBody>
@@ -5666,7 +5934,7 @@
                 </a:solidFill>
                 <a:latin typeface="微软雅黑"/>
               </a:rPr>
-              <a:t>实测验收 · m23b_bidding</a:t>
+              <a:t>工单完成效果图 · 先看终点（本课目标预览）</a:t>
             </a:r>
           </a:p>
         </p:txBody>
@@ -5794,7 +6062,1218 @@
                 </a:solidFill>
                 <a:latin typeface="微软雅黑"/>
               </a:rPr>
-              <a:t>12 / 18</a:t>
+              <a:t>12 / 20</a:t>
+            </a:r>
+          </a:p>
+        </p:txBody>
+      </p:sp>
+      <p:sp>
+        <p:nvSpPr>
+          <p:cNvPr id="14" name="Rounded Rectangle 13"/>
+          <p:cNvSpPr/>
+          <p:nvPr/>
+        </p:nvSpPr>
+        <p:spPr>
+          <a:xfrm>
+            <a:off x="758952" y="1801368"/>
+            <a:ext cx="10899648" cy="2286000"/>
+          </a:xfrm>
+          <a:prstGeom prst="roundRect">
+            <a:avLst>
+              <a:gd name="adj" fmla="val 6000"/>
+            </a:avLst>
+          </a:prstGeom>
+          <a:solidFill>
+            <a:srgbClr val="F3F6FD"/>
+          </a:solidFill>
+          <a:ln w="9525">
+            <a:solidFill>
+              <a:srgbClr val="C9D4EE"/>
+            </a:solidFill>
+          </a:ln>
+          <a:effectLst/>
+        </p:spPr>
+        <p:style>
+          <a:lnRef idx="1">
+            <a:schemeClr val="accent1"/>
+          </a:lnRef>
+          <a:fillRef idx="3">
+            <a:schemeClr val="accent1"/>
+          </a:fillRef>
+          <a:effectRef idx="2">
+            <a:schemeClr val="accent1"/>
+          </a:effectRef>
+          <a:fontRef idx="minor">
+            <a:schemeClr val="lt1"/>
+          </a:fontRef>
+        </p:style>
+        <p:txBody>
+          <a:bodyPr rtlCol="0" anchor="ctr"/>
+          <a:lstStyle/>
+          <a:p/>
+        </p:txBody>
+      </p:sp>
+      <p:sp>
+        <p:nvSpPr>
+          <p:cNvPr id="15" name="Rounded Rectangle 14"/>
+          <p:cNvSpPr/>
+          <p:nvPr/>
+        </p:nvSpPr>
+        <p:spPr>
+          <a:xfrm>
+            <a:off x="758952" y="4178808"/>
+            <a:ext cx="10899648" cy="1051560"/>
+          </a:xfrm>
+          <a:prstGeom prst="roundRect">
+            <a:avLst>
+              <a:gd name="adj" fmla="val 6000"/>
+            </a:avLst>
+          </a:prstGeom>
+          <a:solidFill>
+            <a:srgbClr val="FFFFFF"/>
+          </a:solidFill>
+          <a:ln w="9525">
+            <a:solidFill>
+              <a:srgbClr val="C9D4EE"/>
+            </a:solidFill>
+          </a:ln>
+          <a:effectLst/>
+        </p:spPr>
+        <p:style>
+          <a:lnRef idx="1">
+            <a:schemeClr val="accent1"/>
+          </a:lnRef>
+          <a:fillRef idx="3">
+            <a:schemeClr val="accent1"/>
+          </a:fillRef>
+          <a:effectRef idx="2">
+            <a:schemeClr val="accent1"/>
+          </a:effectRef>
+          <a:fontRef idx="minor">
+            <a:schemeClr val="lt1"/>
+          </a:fontRef>
+        </p:style>
+        <p:txBody>
+          <a:bodyPr rtlCol="0" anchor="ctr"/>
+          <a:lstStyle/>
+          <a:p/>
+        </p:txBody>
+      </p:sp>
+      <p:sp>
+        <p:nvSpPr>
+          <p:cNvPr id="16" name="Rounded Rectangle 15"/>
+          <p:cNvSpPr/>
+          <p:nvPr/>
+        </p:nvSpPr>
+        <p:spPr>
+          <a:xfrm>
+            <a:off x="758952" y="5321808"/>
+            <a:ext cx="10899648" cy="1005840"/>
+          </a:xfrm>
+          <a:prstGeom prst="roundRect">
+            <a:avLst>
+              <a:gd name="adj" fmla="val 6000"/>
+            </a:avLst>
+          </a:prstGeom>
+          <a:solidFill>
+            <a:srgbClr val="FFFFFF"/>
+          </a:solidFill>
+          <a:ln w="9525">
+            <a:solidFill>
+              <a:srgbClr val="C9D4EE"/>
+            </a:solidFill>
+          </a:ln>
+          <a:effectLst/>
+        </p:spPr>
+        <p:style>
+          <a:lnRef idx="1">
+            <a:schemeClr val="accent1"/>
+          </a:lnRef>
+          <a:fillRef idx="3">
+            <a:schemeClr val="accent1"/>
+          </a:fillRef>
+          <a:effectRef idx="2">
+            <a:schemeClr val="accent1"/>
+          </a:effectRef>
+          <a:fontRef idx="minor">
+            <a:schemeClr val="lt1"/>
+          </a:fontRef>
+        </p:style>
+        <p:txBody>
+          <a:bodyPr rtlCol="0" anchor="ctr"/>
+          <a:lstStyle/>
+          <a:p/>
+        </p:txBody>
+      </p:sp>
+      <p:sp>
+        <p:nvSpPr>
+          <p:cNvPr id="17" name="TextBox 16"/>
+          <p:cNvSpPr txBox="1"/>
+          <p:nvPr/>
+        </p:nvSpPr>
+        <p:spPr>
+          <a:xfrm>
+            <a:off x="960120" y="1929384"/>
+            <a:ext cx="10469880" cy="2048256"/>
+          </a:xfrm>
+          <a:prstGeom prst="rect">
+            <a:avLst/>
+          </a:prstGeom>
+          <a:noFill/>
+        </p:spPr>
+        <p:txBody>
+          <a:bodyPr wrap="square" anchor="t" lIns="0" rIns="0" tIns="0" bIns="0">
+            <a:spAutoFit/>
+          </a:bodyPr>
+          <a:lstStyle/>
+          <a:p>
+            <a:pPr algn="l"/>
+            <a:r>
+              <a:rPr sz="1150" b="1">
+                <a:solidFill>
+                  <a:srgbClr val="0545E8"/>
+                </a:solidFill>
+              </a:rPr>
+              <a:t>① 本次真跑实测输出（逐字取自 output/report.txt）</a:t>
+            </a:r>
+          </a:p>
+          <a:p>
+            <a:r>
+              <a:rPr sz="1150" b="1">
+                <a:solidFill>
+                  <a:srgbClr val="0545E8"/>
+                </a:solidFill>
+              </a:rPr>
+              <a:t>实测达成档位: 优(A) ｜ 代码规范率 95.11%（工单把≥70%钉在 D 档）｜ 复现比对 一致 ｜ CNN(torch) acc 1.0000 ｜ LSTM 误差 0.2593 ｜ 决策矩阵 6 行</a:t>
+            </a:r>
+          </a:p>
+          <a:p>
+            <a:r>
+              <a:rPr sz="1150" b="1">
+                <a:solidFill>
+                  <a:srgbClr val="0545E8"/>
+                </a:solidFill>
+              </a:rPr>
+              <a:t>及格(D)    规范率门槛≥70% [达标] ｜ 功能OK ｜ 指标可复现；代码规范率≥70% ｜ 实测 同种子两次 RF 拟合留出 acc 一致（0.8175 vs 0.8175）；规范率 95.11%</a:t>
+            </a:r>
+          </a:p>
+          <a:p>
+            <a:r>
+              <a:rPr sz="1150" b="1">
+                <a:solidFill>
+                  <a:srgbClr val="0545E8"/>
+                </a:solidFill>
+              </a:rPr>
+              <a:t>良好(C)    规范率不另设线（工单仅 D 档设线，实测 95.11%） [达标] ｜ 功能OK ｜ CNN≥75% 或 LSTM 误差≤25%（仅认真卷积/真 LSTM 臂的实测数字） ｜ 实测 CNN(torch) acc=1.0000（线≥0.75）｜LSTM(torch) 窗口错误率=0.2593（线≤0.25）——兜底臂数字不认（require_real_engine=True）</a:t>
+            </a:r>
+          </a:p>
+          <a:p>
+            <a:r>
+              <a:rPr sz="1150" b="1">
+                <a:solidFill>
+                  <a:srgbClr val="0545E8"/>
+                </a:solidFill>
+              </a:rPr>
+              <a:t>优秀(B)    规范率不另设线（工单仅 D 档设线，实测 95.11%） [达标] ｜ 功能OK ｜ CNN vs LSTM 两轮实测对比齐备；决策记录完整（竞标胜负/评委加分另人工） ｜ 实测 两轮对比：两臂真引擎同口径实测（acc 差 +0.2593、秒差 -0.248s）；决策记录 445 字（线 120）</a:t>
+            </a:r>
+          </a:p>
+          <a:p>
+            <a:r>
+              <a:rPr sz="1150" b="1">
+                <a:solidFill>
+                  <a:srgbClr val="0545E8"/>
+                </a:solidFill>
+              </a:rPr>
+              <a:t>……（后续 2 行全文逐字见 工程化项目/output/report.txt）</a:t>
+            </a:r>
+          </a:p>
+        </p:txBody>
+      </p:sp>
+      <p:sp>
+        <p:nvSpPr>
+          <p:cNvPr id="18" name="TextBox 17"/>
+          <p:cNvSpPr txBox="1"/>
+          <p:nvPr/>
+        </p:nvSpPr>
+        <p:spPr>
+          <a:xfrm>
+            <a:off x="960120" y="4297680"/>
+            <a:ext cx="10469880" cy="868680"/>
+          </a:xfrm>
+          <a:prstGeom prst="rect">
+            <a:avLst/>
+          </a:prstGeom>
+          <a:noFill/>
+        </p:spPr>
+        <p:txBody>
+          <a:bodyPr wrap="square" anchor="t" lIns="0" rIns="0" tIns="0" bIns="0">
+            <a:spAutoFit/>
+          </a:bodyPr>
+          <a:lstStyle/>
+          <a:p>
+            <a:pPr algn="l"/>
+            <a:r>
+              <a:rPr sz="1300" b="1">
+                <a:solidFill>
+                  <a:srgbClr val="0545E8"/>
+                </a:solidFill>
+              </a:rPr>
+              <a:t>② 关键自检点（对照工单逐项核对）</a:t>
+            </a:r>
+          </a:p>
+          <a:p>
+            <a:pPr algn="l">
+              <a:spcBef>
+                <a:spcPts val="200"/>
+              </a:spcBef>
+            </a:pPr>
+            <a:r>
+              <a:rPr sz="1150" b="0">
+                <a:solidFill>
+                  <a:srgbClr val="010328"/>
+                </a:solidFill>
+              </a:rPr>
+              <a:t>□ 代码从头跑到尾不报错　□ 指标与工单及格线逐项对齐　□ 随机种子已固定（可复现）</a:t>
+            </a:r>
+          </a:p>
+        </p:txBody>
+      </p:sp>
+      <p:sp>
+        <p:nvSpPr>
+          <p:cNvPr id="19" name="TextBox 18"/>
+          <p:cNvSpPr txBox="1"/>
+          <p:nvPr/>
+        </p:nvSpPr>
+        <p:spPr>
+          <a:xfrm>
+            <a:off x="960120" y="5431536"/>
+            <a:ext cx="10469880" cy="841248"/>
+          </a:xfrm>
+          <a:prstGeom prst="rect">
+            <a:avLst/>
+          </a:prstGeom>
+          <a:noFill/>
+        </p:spPr>
+        <p:txBody>
+          <a:bodyPr wrap="square" anchor="t" lIns="0" rIns="0" tIns="0" bIns="0">
+            <a:spAutoFit/>
+          </a:bodyPr>
+          <a:lstStyle/>
+          <a:p>
+            <a:pPr algn="l"/>
+            <a:r>
+              <a:rPr sz="1300" b="1">
+                <a:solidFill>
+                  <a:srgbClr val="F5670F"/>
+                </a:solidFill>
+              </a:rPr>
+              <a:t>③ 提交与达标（过程性证据）</a:t>
+            </a:r>
+          </a:p>
+          <a:p>
+            <a:pPr algn="l">
+              <a:spcBef>
+                <a:spcPts val="200"/>
+              </a:spcBef>
+            </a:pPr>
+            <a:r>
+              <a:rPr sz="1100" b="0">
+                <a:solidFill>
+                  <a:srgbClr val="010328"/>
+                </a:solidFill>
+              </a:rPr>
+              <a:t>达标线 D≥60 / C≥70 / B≥80 / A≥90　｜　提交 学号_姓名_工单号 + 运行截图 + 决策记录 + Git≥1次commit</a:t>
+            </a:r>
+          </a:p>
+        </p:txBody>
+      </p:sp>
+    </p:spTree>
+  </p:cSld>
+  <p:clrMapOvr>
+    <a:masterClrMapping/>
+  </p:clrMapOvr>
+</p:sld>
+</file>
+
+<file path=ppt/slides/slide13.xml><?xml version="1.0" encoding="utf-8"?>
+<p:sld xmlns:a="http://schemas.openxmlformats.org/drawingml/2006/main" xmlns:p="http://schemas.openxmlformats.org/presentationml/2006/main" xmlns:r="http://schemas.openxmlformats.org/officeDocument/2006/relationships">
+  <p:cSld>
+    <p:spTree>
+      <p:nvGrpSpPr>
+        <p:cNvPr id="1" name=""/>
+        <p:cNvGrpSpPr/>
+        <p:nvPr/>
+      </p:nvGrpSpPr>
+      <p:grpSpPr/>
+      <p:sp>
+        <p:nvSpPr>
+          <p:cNvPr id="2" name="Rectangle 1"/>
+          <p:cNvSpPr/>
+          <p:nvPr/>
+        </p:nvSpPr>
+        <p:spPr>
+          <a:xfrm>
+            <a:off x="0" y="0"/>
+            <a:ext cx="12192000" cy="1150000"/>
+          </a:xfrm>
+          <a:prstGeom prst="rect">
+            <a:avLst/>
+          </a:prstGeom>
+          <a:solidFill>
+            <a:srgbClr val="010328"/>
+          </a:solidFill>
+          <a:ln>
+            <a:noFill/>
+          </a:ln>
+          <a:effectLst/>
+        </p:spPr>
+        <p:style>
+          <a:lnRef idx="1">
+            <a:schemeClr val="accent1"/>
+          </a:lnRef>
+          <a:fillRef idx="3">
+            <a:schemeClr val="accent1"/>
+          </a:fillRef>
+          <a:effectRef idx="2">
+            <a:schemeClr val="accent1"/>
+          </a:effectRef>
+          <a:fontRef idx="minor">
+            <a:schemeClr val="lt1"/>
+          </a:fontRef>
+        </p:style>
+        <p:txBody>
+          <a:bodyPr rtlCol="0" anchor="ctr"/>
+          <a:lstStyle/>
+          <a:p>
+            <a:pPr algn="ctr"/>
+          </a:p>
+        </p:txBody>
+      </p:sp>
+      <p:sp>
+        <p:nvSpPr>
+          <p:cNvPr id="3" name="Rectangle 2"/>
+          <p:cNvSpPr/>
+          <p:nvPr/>
+        </p:nvSpPr>
+        <p:spPr>
+          <a:xfrm>
+            <a:off x="0" y="1150000"/>
+            <a:ext cx="2600000" cy="70000"/>
+          </a:xfrm>
+          <a:prstGeom prst="rect">
+            <a:avLst/>
+          </a:prstGeom>
+          <a:solidFill>
+            <a:srgbClr val="F5670F"/>
+          </a:solidFill>
+          <a:ln>
+            <a:noFill/>
+          </a:ln>
+          <a:effectLst/>
+        </p:spPr>
+        <p:style>
+          <a:lnRef idx="1">
+            <a:schemeClr val="accent1"/>
+          </a:lnRef>
+          <a:fillRef idx="3">
+            <a:schemeClr val="accent1"/>
+          </a:fillRef>
+          <a:effectRef idx="2">
+            <a:schemeClr val="accent1"/>
+          </a:effectRef>
+          <a:fontRef idx="minor">
+            <a:schemeClr val="lt1"/>
+          </a:fontRef>
+        </p:style>
+        <p:txBody>
+          <a:bodyPr rtlCol="0" anchor="ctr"/>
+          <a:lstStyle/>
+          <a:p>
+            <a:pPr algn="ctr"/>
+          </a:p>
+        </p:txBody>
+      </p:sp>
+      <p:sp>
+        <p:nvSpPr>
+          <p:cNvPr id="4" name="TextBox 3"/>
+          <p:cNvSpPr txBox="1"/>
+          <p:nvPr/>
+        </p:nvSpPr>
+        <p:spPr>
+          <a:xfrm>
+            <a:off x="700000" y="300000"/>
+            <a:ext cx="10792000" cy="700000"/>
+          </a:xfrm>
+          <a:prstGeom prst="rect">
+            <a:avLst/>
+          </a:prstGeom>
+          <a:noFill/>
+        </p:spPr>
+        <p:txBody>
+          <a:bodyPr wrap="square" anchor="t">
+            <a:spAutoFit/>
+          </a:bodyPr>
+          <a:lstStyle/>
+          <a:p>
+            <a:pPr algn="l">
+              <a:lnSpc>
+                <a:spcPct val="110000"/>
+              </a:lnSpc>
+              <a:spcAft>
+                <a:spcPts val="600"/>
+              </a:spcAft>
+            </a:pPr>
+            <a:r>
+              <a:rPr sz="2400" b="1">
+                <a:solidFill>
+                  <a:srgbClr val="FFFFFF"/>
+                </a:solidFill>
+                <a:latin typeface="微软雅黑"/>
+              </a:rPr>
+              <a:t>本工单的工程化项目 · 第三种代码形态</a:t>
+            </a:r>
+          </a:p>
+        </p:txBody>
+      </p:sp>
+      <p:sp>
+        <p:nvSpPr>
+          <p:cNvPr id="11" name="Rectangle 10"/>
+          <p:cNvSpPr/>
+          <p:nvPr/>
+        </p:nvSpPr>
+        <p:spPr>
+          <a:xfrm>
+            <a:off x="500000" y="6500000"/>
+            <a:ext cx="11100000" cy="20000"/>
+          </a:xfrm>
+          <a:prstGeom prst="rect">
+            <a:avLst/>
+          </a:prstGeom>
+          <a:solidFill>
+            <a:srgbClr val="C9D4EE"/>
+          </a:solidFill>
+          <a:ln>
+            <a:noFill/>
+          </a:ln>
+          <a:effectLst/>
+        </p:spPr>
+        <p:style>
+          <a:lnRef idx="1">
+            <a:schemeClr val="accent1"/>
+          </a:lnRef>
+          <a:fillRef idx="3">
+            <a:schemeClr val="accent1"/>
+          </a:fillRef>
+          <a:effectRef idx="2">
+            <a:schemeClr val="accent1"/>
+          </a:effectRef>
+          <a:fontRef idx="minor">
+            <a:schemeClr val="lt1"/>
+          </a:fontRef>
+        </p:style>
+        <p:txBody>
+          <a:bodyPr rtlCol="0" anchor="ctr"/>
+          <a:lstStyle/>
+          <a:p>
+            <a:pPr algn="ctr"/>
+          </a:p>
+        </p:txBody>
+      </p:sp>
+      <p:sp>
+        <p:nvSpPr>
+          <p:cNvPr id="12" name="TextBox 11"/>
+          <p:cNvSpPr txBox="1"/>
+          <p:nvPr/>
+        </p:nvSpPr>
+        <p:spPr>
+          <a:xfrm>
+            <a:off x="500000" y="6540000"/>
+            <a:ext cx="7000000" cy="300000"/>
+          </a:xfrm>
+          <a:prstGeom prst="rect">
+            <a:avLst/>
+          </a:prstGeom>
+          <a:noFill/>
+        </p:spPr>
+        <p:txBody>
+          <a:bodyPr wrap="square" anchor="t">
+            <a:spAutoFit/>
+          </a:bodyPr>
+          <a:lstStyle/>
+          <a:p>
+            <a:pPr algn="l">
+              <a:lnSpc>
+                <a:spcPct val="110000"/>
+              </a:lnSpc>
+              <a:spcAft>
+                <a:spcPts val="600"/>
+              </a:spcAft>
+            </a:pPr>
+            <a:r>
+              <a:rPr sz="1000" b="0">
+                <a:solidFill>
+                  <a:srgbClr val="8A97B5"/>
+                </a:solidFill>
+                <a:latin typeface="微软雅黑"/>
+              </a:rPr>
+              <a:t>两江智造集团 · AI应用基础48课时版</a:t>
+            </a:r>
+          </a:p>
+        </p:txBody>
+      </p:sp>
+      <p:sp>
+        <p:nvSpPr>
+          <p:cNvPr id="13" name="TextBox 12"/>
+          <p:cNvSpPr txBox="1"/>
+          <p:nvPr/>
+        </p:nvSpPr>
+        <p:spPr>
+          <a:xfrm>
+            <a:off x="10600000" y="6540000"/>
+            <a:ext cx="1000000" cy="300000"/>
+          </a:xfrm>
+          <a:prstGeom prst="rect">
+            <a:avLst/>
+          </a:prstGeom>
+          <a:noFill/>
+        </p:spPr>
+        <p:txBody>
+          <a:bodyPr wrap="square" anchor="t">
+            <a:spAutoFit/>
+          </a:bodyPr>
+          <a:lstStyle/>
+          <a:p>
+            <a:pPr algn="r">
+              <a:lnSpc>
+                <a:spcPct val="110000"/>
+              </a:lnSpc>
+              <a:spcAft>
+                <a:spcPts val="600"/>
+              </a:spcAft>
+            </a:pPr>
+            <a:r>
+              <a:rPr sz="1000" b="0">
+                <a:solidFill>
+                  <a:srgbClr val="8A97B5"/>
+                </a:solidFill>
+                <a:latin typeface="微软雅黑"/>
+              </a:rPr>
+              <a:t>13 / 20</a:t>
+            </a:r>
+          </a:p>
+        </p:txBody>
+      </p:sp>
+      <p:sp>
+        <p:nvSpPr>
+          <p:cNvPr id="14" name="Rounded Rectangle 13"/>
+          <p:cNvSpPr/>
+          <p:nvPr/>
+        </p:nvSpPr>
+        <p:spPr>
+          <a:xfrm>
+            <a:off x="758952" y="1801368"/>
+            <a:ext cx="10899648" cy="2286000"/>
+          </a:xfrm>
+          <a:prstGeom prst="roundRect">
+            <a:avLst>
+              <a:gd name="adj" fmla="val 6000"/>
+            </a:avLst>
+          </a:prstGeom>
+          <a:solidFill>
+            <a:srgbClr val="F3F6FD"/>
+          </a:solidFill>
+          <a:ln w="9525">
+            <a:solidFill>
+              <a:srgbClr val="C9D4EE"/>
+            </a:solidFill>
+          </a:ln>
+          <a:effectLst/>
+        </p:spPr>
+        <p:style>
+          <a:lnRef idx="1">
+            <a:schemeClr val="accent1"/>
+          </a:lnRef>
+          <a:fillRef idx="3">
+            <a:schemeClr val="accent1"/>
+          </a:fillRef>
+          <a:effectRef idx="2">
+            <a:schemeClr val="accent1"/>
+          </a:effectRef>
+          <a:fontRef idx="minor">
+            <a:schemeClr val="lt1"/>
+          </a:fontRef>
+        </p:style>
+        <p:txBody>
+          <a:bodyPr rtlCol="0" anchor="ctr"/>
+          <a:lstStyle/>
+          <a:p/>
+        </p:txBody>
+      </p:sp>
+      <p:sp>
+        <p:nvSpPr>
+          <p:cNvPr id="15" name="Rounded Rectangle 14"/>
+          <p:cNvSpPr/>
+          <p:nvPr/>
+        </p:nvSpPr>
+        <p:spPr>
+          <a:xfrm>
+            <a:off x="758952" y="4178808"/>
+            <a:ext cx="10899648" cy="1051560"/>
+          </a:xfrm>
+          <a:prstGeom prst="roundRect">
+            <a:avLst>
+              <a:gd name="adj" fmla="val 6000"/>
+            </a:avLst>
+          </a:prstGeom>
+          <a:solidFill>
+            <a:srgbClr val="FFFFFF"/>
+          </a:solidFill>
+          <a:ln w="9525">
+            <a:solidFill>
+              <a:srgbClr val="C9D4EE"/>
+            </a:solidFill>
+          </a:ln>
+          <a:effectLst/>
+        </p:spPr>
+        <p:style>
+          <a:lnRef idx="1">
+            <a:schemeClr val="accent1"/>
+          </a:lnRef>
+          <a:fillRef idx="3">
+            <a:schemeClr val="accent1"/>
+          </a:fillRef>
+          <a:effectRef idx="2">
+            <a:schemeClr val="accent1"/>
+          </a:effectRef>
+          <a:fontRef idx="minor">
+            <a:schemeClr val="lt1"/>
+          </a:fontRef>
+        </p:style>
+        <p:txBody>
+          <a:bodyPr rtlCol="0" anchor="ctr"/>
+          <a:lstStyle/>
+          <a:p/>
+        </p:txBody>
+      </p:sp>
+      <p:sp>
+        <p:nvSpPr>
+          <p:cNvPr id="16" name="Rounded Rectangle 15"/>
+          <p:cNvSpPr/>
+          <p:nvPr/>
+        </p:nvSpPr>
+        <p:spPr>
+          <a:xfrm>
+            <a:off x="758952" y="5321808"/>
+            <a:ext cx="10899648" cy="1005840"/>
+          </a:xfrm>
+          <a:prstGeom prst="roundRect">
+            <a:avLst>
+              <a:gd name="adj" fmla="val 6000"/>
+            </a:avLst>
+          </a:prstGeom>
+          <a:solidFill>
+            <a:srgbClr val="FFFFFF"/>
+          </a:solidFill>
+          <a:ln w="9525">
+            <a:solidFill>
+              <a:srgbClr val="C9D4EE"/>
+            </a:solidFill>
+          </a:ln>
+          <a:effectLst/>
+        </p:spPr>
+        <p:style>
+          <a:lnRef idx="1">
+            <a:schemeClr val="accent1"/>
+          </a:lnRef>
+          <a:fillRef idx="3">
+            <a:schemeClr val="accent1"/>
+          </a:fillRef>
+          <a:effectRef idx="2">
+            <a:schemeClr val="accent1"/>
+          </a:effectRef>
+          <a:fontRef idx="minor">
+            <a:schemeClr val="lt1"/>
+          </a:fontRef>
+        </p:style>
+        <p:txBody>
+          <a:bodyPr rtlCol="0" anchor="ctr"/>
+          <a:lstStyle/>
+          <a:p/>
+        </p:txBody>
+      </p:sp>
+      <p:sp>
+        <p:nvSpPr>
+          <p:cNvPr id="17" name="TextBox 16"/>
+          <p:cNvSpPr txBox="1"/>
+          <p:nvPr/>
+        </p:nvSpPr>
+        <p:spPr>
+          <a:xfrm>
+            <a:off x="960120" y="1929384"/>
+            <a:ext cx="10469880" cy="2048256"/>
+          </a:xfrm>
+          <a:prstGeom prst="rect">
+            <a:avLst/>
+          </a:prstGeom>
+          <a:noFill/>
+        </p:spPr>
+        <p:txBody>
+          <a:bodyPr wrap="square" anchor="t" lIns="0" rIns="0" tIns="0" bIns="0">
+            <a:spAutoFit/>
+          </a:bodyPr>
+          <a:lstStyle/>
+          <a:p>
+            <a:pPr algn="l"/>
+            <a:r>
+              <a:rPr sz="1400" b="1">
+                <a:solidFill>
+                  <a:srgbClr val="0545E8"/>
+                </a:solidFill>
+              </a:rPr>
+              <a:t>① 项目位置与一键运行</a:t>
+            </a:r>
+          </a:p>
+          <a:p>
+            <a:pPr algn="l"/>
+            <a:r>
+              <a:rPr sz="1400" b="1">
+                <a:solidFill>
+                  <a:srgbClr val="0545E8"/>
+                </a:solidFill>
+              </a:rPr>
+              <a:t>工程化项目/m23b_bidding/</a:t>
+            </a:r>
+          </a:p>
+          <a:p>
+            <a:pPr algn="l"/>
+            <a:r>
+              <a:rPr sz="1400" b="1">
+                <a:solidFill>
+                  <a:srgbClr val="0545E8"/>
+                </a:solidFill>
+              </a:rPr>
+              <a:t>python run.py          # 输出 output/report.txt + result.json</a:t>
+            </a:r>
+          </a:p>
+          <a:p>
+            <a:pPr algn="l"/>
+            <a:r>
+              <a:rPr sz="1400" b="1">
+                <a:solidFill>
+                  <a:srgbClr val="0545E8"/>
+                </a:solidFill>
+              </a:rPr>
+              <a:t>python -m pytest -q    # 全量测试应全绿</a:t>
+            </a:r>
+          </a:p>
+        </p:txBody>
+      </p:sp>
+      <p:sp>
+        <p:nvSpPr>
+          <p:cNvPr id="18" name="TextBox 17"/>
+          <p:cNvSpPr txBox="1"/>
+          <p:nvPr/>
+        </p:nvSpPr>
+        <p:spPr>
+          <a:xfrm>
+            <a:off x="960120" y="4297680"/>
+            <a:ext cx="10469880" cy="868680"/>
+          </a:xfrm>
+          <a:prstGeom prst="rect">
+            <a:avLst/>
+          </a:prstGeom>
+          <a:noFill/>
+        </p:spPr>
+        <p:txBody>
+          <a:bodyPr wrap="square" anchor="t" lIns="0" rIns="0" tIns="0" bIns="0">
+            <a:spAutoFit/>
+          </a:bodyPr>
+          <a:lstStyle/>
+          <a:p>
+            <a:pPr algn="l"/>
+            <a:r>
+              <a:rPr sz="1300" b="1">
+                <a:solidFill>
+                  <a:srgbClr val="0545E8"/>
+                </a:solidFill>
+              </a:rPr>
+              <a:t>② 目录结构（23 个文件）</a:t>
+            </a:r>
+          </a:p>
+          <a:p>
+            <a:pPr algn="l"/>
+            <a:r>
+              <a:rPr sz="1300" b="1">
+                <a:solidFill>
+                  <a:srgbClr val="0545E8"/>
+                </a:solidFill>
+              </a:rPr>
+              <a:t>config/rules.yaml      规则外置：改配置不改代码</a:t>
+            </a:r>
+          </a:p>
+          <a:p>
+            <a:pPr algn="l"/>
+            <a:r>
+              <a:rPr sz="1300" b="1">
+                <a:solidFill>
+                  <a:srgbClr val="0545E8"/>
+                </a:solidFill>
+              </a:rPr>
+              <a:t>src/bidding_lines/  config · core · io_utils · report · pipeline</a:t>
+            </a:r>
+          </a:p>
+          <a:p>
+            <a:pPr algn="l"/>
+            <a:r>
+              <a:rPr sz="1300" b="1">
+                <a:solidFill>
+                  <a:srgbClr val="0545E8"/>
+                </a:solidFill>
+              </a:rPr>
+              <a:t>tests/      正常 / 边界 / 异常三档</a:t>
+            </a:r>
+          </a:p>
+        </p:txBody>
+      </p:sp>
+      <p:sp>
+        <p:nvSpPr>
+          <p:cNvPr id="19" name="TextBox 18"/>
+          <p:cNvSpPr txBox="1"/>
+          <p:nvPr/>
+        </p:nvSpPr>
+        <p:spPr>
+          <a:xfrm>
+            <a:off x="960120" y="5431536"/>
+            <a:ext cx="10469880" cy="841248"/>
+          </a:xfrm>
+          <a:prstGeom prst="rect">
+            <a:avLst/>
+          </a:prstGeom>
+          <a:noFill/>
+        </p:spPr>
+        <p:txBody>
+          <a:bodyPr wrap="square" anchor="t" lIns="0" rIns="0" tIns="0" bIns="0">
+            <a:spAutoFit/>
+          </a:bodyPr>
+          <a:lstStyle/>
+          <a:p>
+            <a:pPr algn="l"/>
+            <a:r>
+              <a:rPr sz="1300" b="1">
+                <a:solidFill>
+                  <a:srgbClr val="F5670F"/>
+                </a:solidFill>
+              </a:rPr>
+              <a:t>③ 国标与 TOGAF 落地</a:t>
+            </a:r>
+          </a:p>
+          <a:p>
+            <a:pPr algn="l"/>
+            <a:r>
+              <a:rPr sz="1300" b="1">
+                <a:solidFill>
+                  <a:srgbClr val="F5670F"/>
+                </a:solidFill>
+              </a:rPr>
+              <a:t>GB/T 9385 需求规格 / 15532 测试 / 8567 文档 / 8566 过程组</a:t>
+            </a:r>
+          </a:p>
+          <a:p>
+            <a:pPr algn="l"/>
+            <a:r>
+              <a:rPr sz="1300" b="1">
+                <a:solidFill>
+                  <a:srgbClr val="F5670F"/>
+                </a:solidFill>
+              </a:rPr>
+              <a:t>TOGAF 四域：业务 · 数据 · 应用 · 技术架构</a:t>
+            </a:r>
+          </a:p>
+          <a:p>
+            <a:pPr algn="l"/>
+            <a:r>
+              <a:rPr sz="1300" b="1">
+                <a:solidFill>
+                  <a:srgbClr val="F5670F"/>
+                </a:solidFill>
+              </a:rPr>
+              <a:t>docs/07 ADR-001 架构决策记录</a:t>
+            </a:r>
+          </a:p>
+        </p:txBody>
+      </p:sp>
+    </p:spTree>
+  </p:cSld>
+  <p:clrMapOvr>
+    <a:masterClrMapping/>
+  </p:clrMapOvr>
+</p:sld>
+</file>
+
+<file path=ppt/slides/slide14.xml><?xml version="1.0" encoding="utf-8"?>
+<p:sld xmlns:a="http://schemas.openxmlformats.org/drawingml/2006/main" xmlns:p="http://schemas.openxmlformats.org/presentationml/2006/main" xmlns:r="http://schemas.openxmlformats.org/officeDocument/2006/relationships">
+  <p:cSld>
+    <p:spTree>
+      <p:nvGrpSpPr>
+        <p:cNvPr id="1" name=""/>
+        <p:cNvGrpSpPr/>
+        <p:nvPr/>
+      </p:nvGrpSpPr>
+      <p:grpSpPr/>
+      <p:sp>
+        <p:nvSpPr>
+          <p:cNvPr id="2" name="Rectangle 1"/>
+          <p:cNvSpPr/>
+          <p:nvPr/>
+        </p:nvSpPr>
+        <p:spPr>
+          <a:xfrm>
+            <a:off x="0" y="0"/>
+            <a:ext cx="12192000" cy="1150000"/>
+          </a:xfrm>
+          <a:prstGeom prst="rect">
+            <a:avLst/>
+          </a:prstGeom>
+          <a:solidFill>
+            <a:srgbClr val="010328"/>
+          </a:solidFill>
+          <a:ln>
+            <a:noFill/>
+          </a:ln>
+          <a:effectLst/>
+        </p:spPr>
+        <p:style>
+          <a:lnRef idx="1">
+            <a:schemeClr val="accent1"/>
+          </a:lnRef>
+          <a:fillRef idx="3">
+            <a:schemeClr val="accent1"/>
+          </a:fillRef>
+          <a:effectRef idx="2">
+            <a:schemeClr val="accent1"/>
+          </a:effectRef>
+          <a:fontRef idx="minor">
+            <a:schemeClr val="lt1"/>
+          </a:fontRef>
+        </p:style>
+        <p:txBody>
+          <a:bodyPr rtlCol="0" anchor="ctr"/>
+          <a:lstStyle/>
+          <a:p>
+            <a:pPr algn="ctr"/>
+          </a:p>
+        </p:txBody>
+      </p:sp>
+      <p:sp>
+        <p:nvSpPr>
+          <p:cNvPr id="3" name="Rectangle 2"/>
+          <p:cNvSpPr/>
+          <p:nvPr/>
+        </p:nvSpPr>
+        <p:spPr>
+          <a:xfrm>
+            <a:off x="0" y="1150000"/>
+            <a:ext cx="2600000" cy="70000"/>
+          </a:xfrm>
+          <a:prstGeom prst="rect">
+            <a:avLst/>
+          </a:prstGeom>
+          <a:solidFill>
+            <a:srgbClr val="F5670F"/>
+          </a:solidFill>
+          <a:ln>
+            <a:noFill/>
+          </a:ln>
+          <a:effectLst/>
+        </p:spPr>
+        <p:style>
+          <a:lnRef idx="1">
+            <a:schemeClr val="accent1"/>
+          </a:lnRef>
+          <a:fillRef idx="3">
+            <a:schemeClr val="accent1"/>
+          </a:fillRef>
+          <a:effectRef idx="2">
+            <a:schemeClr val="accent1"/>
+          </a:effectRef>
+          <a:fontRef idx="minor">
+            <a:schemeClr val="lt1"/>
+          </a:fontRef>
+        </p:style>
+        <p:txBody>
+          <a:bodyPr rtlCol="0" anchor="ctr"/>
+          <a:lstStyle/>
+          <a:p>
+            <a:pPr algn="ctr"/>
+          </a:p>
+        </p:txBody>
+      </p:sp>
+      <p:sp>
+        <p:nvSpPr>
+          <p:cNvPr id="4" name="TextBox 3"/>
+          <p:cNvSpPr txBox="1"/>
+          <p:nvPr/>
+        </p:nvSpPr>
+        <p:spPr>
+          <a:xfrm>
+            <a:off x="700000" y="300000"/>
+            <a:ext cx="10792000" cy="700000"/>
+          </a:xfrm>
+          <a:prstGeom prst="rect">
+            <a:avLst/>
+          </a:prstGeom>
+          <a:noFill/>
+        </p:spPr>
+        <p:txBody>
+          <a:bodyPr wrap="square" anchor="t">
+            <a:spAutoFit/>
+          </a:bodyPr>
+          <a:lstStyle/>
+          <a:p>
+            <a:pPr algn="l">
+              <a:lnSpc>
+                <a:spcPct val="110000"/>
+              </a:lnSpc>
+              <a:spcAft>
+                <a:spcPts val="600"/>
+              </a:spcAft>
+            </a:pPr>
+            <a:r>
+              <a:rPr sz="2400" b="1">
+                <a:solidFill>
+                  <a:srgbClr val="FFFFFF"/>
+                </a:solidFill>
+                <a:latin typeface="微软雅黑"/>
+              </a:rPr>
+              <a:t>实测验收 · m23b_bidding</a:t>
+            </a:r>
+          </a:p>
+        </p:txBody>
+      </p:sp>
+      <p:sp>
+        <p:nvSpPr>
+          <p:cNvPr id="11" name="Rectangle 10"/>
+          <p:cNvSpPr/>
+          <p:nvPr/>
+        </p:nvSpPr>
+        <p:spPr>
+          <a:xfrm>
+            <a:off x="500000" y="6500000"/>
+            <a:ext cx="11100000" cy="20000"/>
+          </a:xfrm>
+          <a:prstGeom prst="rect">
+            <a:avLst/>
+          </a:prstGeom>
+          <a:solidFill>
+            <a:srgbClr val="C9D4EE"/>
+          </a:solidFill>
+          <a:ln>
+            <a:noFill/>
+          </a:ln>
+          <a:effectLst/>
+        </p:spPr>
+        <p:style>
+          <a:lnRef idx="1">
+            <a:schemeClr val="accent1"/>
+          </a:lnRef>
+          <a:fillRef idx="3">
+            <a:schemeClr val="accent1"/>
+          </a:fillRef>
+          <a:effectRef idx="2">
+            <a:schemeClr val="accent1"/>
+          </a:effectRef>
+          <a:fontRef idx="minor">
+            <a:schemeClr val="lt1"/>
+          </a:fontRef>
+        </p:style>
+        <p:txBody>
+          <a:bodyPr rtlCol="0" anchor="ctr"/>
+          <a:lstStyle/>
+          <a:p>
+            <a:pPr algn="ctr"/>
+          </a:p>
+        </p:txBody>
+      </p:sp>
+      <p:sp>
+        <p:nvSpPr>
+          <p:cNvPr id="12" name="TextBox 11"/>
+          <p:cNvSpPr txBox="1"/>
+          <p:nvPr/>
+        </p:nvSpPr>
+        <p:spPr>
+          <a:xfrm>
+            <a:off x="500000" y="6540000"/>
+            <a:ext cx="7000000" cy="300000"/>
+          </a:xfrm>
+          <a:prstGeom prst="rect">
+            <a:avLst/>
+          </a:prstGeom>
+          <a:noFill/>
+        </p:spPr>
+        <p:txBody>
+          <a:bodyPr wrap="square" anchor="t">
+            <a:spAutoFit/>
+          </a:bodyPr>
+          <a:lstStyle/>
+          <a:p>
+            <a:pPr algn="l">
+              <a:lnSpc>
+                <a:spcPct val="110000"/>
+              </a:lnSpc>
+              <a:spcAft>
+                <a:spcPts val="600"/>
+              </a:spcAft>
+            </a:pPr>
+            <a:r>
+              <a:rPr sz="1000" b="0">
+                <a:solidFill>
+                  <a:srgbClr val="8A97B5"/>
+                </a:solidFill>
+                <a:latin typeface="微软雅黑"/>
+              </a:rPr>
+              <a:t>两江智造集团 · AI应用基础48课时版</a:t>
+            </a:r>
+          </a:p>
+        </p:txBody>
+      </p:sp>
+      <p:sp>
+        <p:nvSpPr>
+          <p:cNvPr id="13" name="TextBox 12"/>
+          <p:cNvSpPr txBox="1"/>
+          <p:nvPr/>
+        </p:nvSpPr>
+        <p:spPr>
+          <a:xfrm>
+            <a:off x="10600000" y="6540000"/>
+            <a:ext cx="1000000" cy="300000"/>
+          </a:xfrm>
+          <a:prstGeom prst="rect">
+            <a:avLst/>
+          </a:prstGeom>
+          <a:noFill/>
+        </p:spPr>
+        <p:txBody>
+          <a:bodyPr wrap="square" anchor="t">
+            <a:spAutoFit/>
+          </a:bodyPr>
+          <a:lstStyle/>
+          <a:p>
+            <a:pPr algn="r">
+              <a:lnSpc>
+                <a:spcPct val="110000"/>
+              </a:lnSpc>
+              <a:spcAft>
+                <a:spcPts val="600"/>
+              </a:spcAft>
+            </a:pPr>
+            <a:r>
+              <a:rPr sz="1000" b="0">
+                <a:solidFill>
+                  <a:srgbClr val="8A97B5"/>
+                </a:solidFill>
+                <a:latin typeface="微软雅黑"/>
+              </a:rPr>
+              <a:t>14 / 20</a:t>
             </a:r>
           </a:p>
         </p:txBody>
@@ -6865,1418 +8344,6 @@
 </p:sld>
 </file>
 
-<file path=ppt/slides/slide13.xml><?xml version="1.0" encoding="utf-8"?>
-<p:sld xmlns:a="http://schemas.openxmlformats.org/drawingml/2006/main" xmlns:p="http://schemas.openxmlformats.org/presentationml/2006/main" xmlns:r="http://schemas.openxmlformats.org/officeDocument/2006/relationships">
-  <p:cSld>
-    <p:spTree>
-      <p:nvGrpSpPr>
-        <p:cNvPr id="1" name=""/>
-        <p:cNvGrpSpPr/>
-        <p:nvPr/>
-      </p:nvGrpSpPr>
-      <p:grpSpPr/>
-      <p:sp>
-        <p:nvSpPr>
-          <p:cNvPr id="2" name="Rectangle 1"/>
-          <p:cNvSpPr/>
-          <p:nvPr/>
-        </p:nvSpPr>
-        <p:spPr>
-          <a:xfrm>
-            <a:off x="0" y="0"/>
-            <a:ext cx="12192000" cy="1150000"/>
-          </a:xfrm>
-          <a:prstGeom prst="rect">
-            <a:avLst/>
-          </a:prstGeom>
-          <a:solidFill>
-            <a:srgbClr val="010328"/>
-          </a:solidFill>
-          <a:ln>
-            <a:noFill/>
-          </a:ln>
-          <a:effectLst/>
-        </p:spPr>
-        <p:style>
-          <a:lnRef idx="1">
-            <a:schemeClr val="accent1"/>
-          </a:lnRef>
-          <a:fillRef idx="3">
-            <a:schemeClr val="accent1"/>
-          </a:fillRef>
-          <a:effectRef idx="2">
-            <a:schemeClr val="accent1"/>
-          </a:effectRef>
-          <a:fontRef idx="minor">
-            <a:schemeClr val="lt1"/>
-          </a:fontRef>
-        </p:style>
-        <p:txBody>
-          <a:bodyPr rtlCol="0" anchor="ctr"/>
-          <a:lstStyle/>
-          <a:p>
-            <a:pPr algn="ctr"/>
-          </a:p>
-        </p:txBody>
-      </p:sp>
-      <p:sp>
-        <p:nvSpPr>
-          <p:cNvPr id="3" name="Rectangle 2"/>
-          <p:cNvSpPr/>
-          <p:nvPr/>
-        </p:nvSpPr>
-        <p:spPr>
-          <a:xfrm>
-            <a:off x="0" y="1150000"/>
-            <a:ext cx="2600000" cy="70000"/>
-          </a:xfrm>
-          <a:prstGeom prst="rect">
-            <a:avLst/>
-          </a:prstGeom>
-          <a:solidFill>
-            <a:srgbClr val="F5670F"/>
-          </a:solidFill>
-          <a:ln>
-            <a:noFill/>
-          </a:ln>
-          <a:effectLst/>
-        </p:spPr>
-        <p:style>
-          <a:lnRef idx="1">
-            <a:schemeClr val="accent1"/>
-          </a:lnRef>
-          <a:fillRef idx="3">
-            <a:schemeClr val="accent1"/>
-          </a:fillRef>
-          <a:effectRef idx="2">
-            <a:schemeClr val="accent1"/>
-          </a:effectRef>
-          <a:fontRef idx="minor">
-            <a:schemeClr val="lt1"/>
-          </a:fontRef>
-        </p:style>
-        <p:txBody>
-          <a:bodyPr rtlCol="0" anchor="ctr"/>
-          <a:lstStyle/>
-          <a:p>
-            <a:pPr algn="ctr"/>
-          </a:p>
-        </p:txBody>
-      </p:sp>
-      <p:sp>
-        <p:nvSpPr>
-          <p:cNvPr id="4" name="TextBox 3"/>
-          <p:cNvSpPr txBox="1"/>
-          <p:nvPr/>
-        </p:nvSpPr>
-        <p:spPr>
-          <a:xfrm>
-            <a:off x="700000" y="300000"/>
-            <a:ext cx="10792000" cy="700000"/>
-          </a:xfrm>
-          <a:prstGeom prst="rect">
-            <a:avLst/>
-          </a:prstGeom>
-          <a:noFill/>
-        </p:spPr>
-        <p:txBody>
-          <a:bodyPr wrap="square" anchor="t">
-            <a:spAutoFit/>
-          </a:bodyPr>
-          <a:lstStyle/>
-          <a:p>
-            <a:pPr algn="l">
-              <a:lnSpc>
-                <a:spcPct val="110000"/>
-              </a:lnSpc>
-              <a:spcAft>
-                <a:spcPts val="600"/>
-              </a:spcAft>
-            </a:pPr>
-            <a:r>
-              <a:rPr sz="2400" b="1">
-                <a:solidFill>
-                  <a:srgbClr val="FFFFFF"/>
-                </a:solidFill>
-                <a:latin typeface="微软雅黑"/>
-              </a:rPr>
-              <a:t>实跑截图证据 · m23b_bidding</a:t>
-            </a:r>
-          </a:p>
-        </p:txBody>
-      </p:sp>
-      <p:sp>
-        <p:nvSpPr>
-          <p:cNvPr id="11" name="Rectangle 10"/>
-          <p:cNvSpPr/>
-          <p:nvPr/>
-        </p:nvSpPr>
-        <p:spPr>
-          <a:xfrm>
-            <a:off x="500000" y="6500000"/>
-            <a:ext cx="11100000" cy="20000"/>
-          </a:xfrm>
-          <a:prstGeom prst="rect">
-            <a:avLst/>
-          </a:prstGeom>
-          <a:solidFill>
-            <a:srgbClr val="C9D4EE"/>
-          </a:solidFill>
-          <a:ln>
-            <a:noFill/>
-          </a:ln>
-          <a:effectLst/>
-        </p:spPr>
-        <p:style>
-          <a:lnRef idx="1">
-            <a:schemeClr val="accent1"/>
-          </a:lnRef>
-          <a:fillRef idx="3">
-            <a:schemeClr val="accent1"/>
-          </a:fillRef>
-          <a:effectRef idx="2">
-            <a:schemeClr val="accent1"/>
-          </a:effectRef>
-          <a:fontRef idx="minor">
-            <a:schemeClr val="lt1"/>
-          </a:fontRef>
-        </p:style>
-        <p:txBody>
-          <a:bodyPr rtlCol="0" anchor="ctr"/>
-          <a:lstStyle/>
-          <a:p>
-            <a:pPr algn="ctr"/>
-          </a:p>
-        </p:txBody>
-      </p:sp>
-      <p:sp>
-        <p:nvSpPr>
-          <p:cNvPr id="12" name="TextBox 11"/>
-          <p:cNvSpPr txBox="1"/>
-          <p:nvPr/>
-        </p:nvSpPr>
-        <p:spPr>
-          <a:xfrm>
-            <a:off x="500000" y="6540000"/>
-            <a:ext cx="7000000" cy="300000"/>
-          </a:xfrm>
-          <a:prstGeom prst="rect">
-            <a:avLst/>
-          </a:prstGeom>
-          <a:noFill/>
-        </p:spPr>
-        <p:txBody>
-          <a:bodyPr wrap="square" anchor="t">
-            <a:spAutoFit/>
-          </a:bodyPr>
-          <a:lstStyle/>
-          <a:p>
-            <a:pPr algn="l">
-              <a:lnSpc>
-                <a:spcPct val="110000"/>
-              </a:lnSpc>
-              <a:spcAft>
-                <a:spcPts val="600"/>
-              </a:spcAft>
-            </a:pPr>
-            <a:r>
-              <a:rPr sz="1000" b="0">
-                <a:solidFill>
-                  <a:srgbClr val="8A97B5"/>
-                </a:solidFill>
-                <a:latin typeface="微软雅黑"/>
-              </a:rPr>
-              <a:t>两江智造集团 · AI应用基础48课时版</a:t>
-            </a:r>
-          </a:p>
-        </p:txBody>
-      </p:sp>
-      <p:sp>
-        <p:nvSpPr>
-          <p:cNvPr id="13" name="TextBox 12"/>
-          <p:cNvSpPr txBox="1"/>
-          <p:nvPr/>
-        </p:nvSpPr>
-        <p:spPr>
-          <a:xfrm>
-            <a:off x="10600000" y="6540000"/>
-            <a:ext cx="1000000" cy="300000"/>
-          </a:xfrm>
-          <a:prstGeom prst="rect">
-            <a:avLst/>
-          </a:prstGeom>
-          <a:noFill/>
-        </p:spPr>
-        <p:txBody>
-          <a:bodyPr wrap="square" anchor="t">
-            <a:spAutoFit/>
-          </a:bodyPr>
-          <a:lstStyle/>
-          <a:p>
-            <a:pPr algn="r">
-              <a:lnSpc>
-                <a:spcPct val="110000"/>
-              </a:lnSpc>
-              <a:spcAft>
-                <a:spcPts val="600"/>
-              </a:spcAft>
-            </a:pPr>
-            <a:r>
-              <a:rPr sz="1000" b="0">
-                <a:solidFill>
-                  <a:srgbClr val="8A97B5"/>
-                </a:solidFill>
-                <a:latin typeface="微软雅黑"/>
-              </a:rPr>
-              <a:t>13 / 18</a:t>
-            </a:r>
-          </a:p>
-        </p:txBody>
-      </p:sp>
-      <p:sp>
-        <p:nvSpPr>
-          <p:cNvPr id="14" name="Rectangle 13"/>
-          <p:cNvSpPr/>
-          <p:nvPr/>
-        </p:nvSpPr>
-        <p:spPr>
-          <a:xfrm>
-            <a:off x="457200" y="1481328"/>
-            <a:ext cx="5486400" cy="2304288"/>
-          </a:xfrm>
-          <a:prstGeom prst="rect">
-            <a:avLst/>
-          </a:prstGeom>
-          <a:solidFill>
-            <a:srgbClr val="FFFFFF"/>
-          </a:solidFill>
-          <a:ln>
-            <a:solidFill>
-              <a:srgbClr val="D6DCE4"/>
-            </a:solidFill>
-          </a:ln>
-          <a:effectLst/>
-        </p:spPr>
-        <p:style>
-          <a:lnRef idx="1">
-            <a:schemeClr val="accent1"/>
-          </a:lnRef>
-          <a:fillRef idx="3">
-            <a:schemeClr val="accent1"/>
-          </a:fillRef>
-          <a:effectRef idx="2">
-            <a:schemeClr val="accent1"/>
-          </a:effectRef>
-          <a:fontRef idx="minor">
-            <a:schemeClr val="lt1"/>
-          </a:fontRef>
-        </p:style>
-        <p:txBody>
-          <a:bodyPr rtlCol="0" anchor="ctr" wrap="square"/>
-          <a:lstStyle/>
-          <a:p>
-            <a:pPr algn="ctr"/>
-          </a:p>
-        </p:txBody>
-      </p:sp>
-      <p:sp>
-        <p:nvSpPr>
-          <p:cNvPr id="15" name="TextBox 14"/>
-          <p:cNvSpPr txBox="1"/>
-          <p:nvPr/>
-        </p:nvSpPr>
-        <p:spPr>
-          <a:xfrm>
-            <a:off x="530352" y="1517904"/>
-            <a:ext cx="5340096" cy="237744"/>
-          </a:xfrm>
-          <a:prstGeom prst="rect">
-            <a:avLst/>
-          </a:prstGeom>
-          <a:noFill/>
-        </p:spPr>
-        <p:txBody>
-          <a:bodyPr wrap="square">
-            <a:spAutoFit/>
-          </a:bodyPr>
-          <a:lstStyle/>
-          <a:p>
-            <a:r>
-              <a:rPr sz="950" b="1">
-                <a:solidFill>
-                  <a:srgbClr val="010328"/>
-                </a:solidFill>
-                <a:latin typeface="微软雅黑"/>
-              </a:rPr>
-              <a:t>① run.py 实跑终端输出（逐字捕获）</a:t>
-            </a:r>
-          </a:p>
-        </p:txBody>
-      </p:sp>
-      <p:pic>
-        <p:nvPicPr>
-          <p:cNvPr id="16" name="Picture 15" descr="shot_run.png"/>
-          <p:cNvPicPr>
-            <a:picLocks noChangeAspect="1"/>
-          </p:cNvPicPr>
-          <p:nvPr/>
-        </p:nvPicPr>
-        <p:blipFill>
-          <a:blip r:embed="rId2"/>
-          <a:stretch>
-            <a:fillRect/>
-          </a:stretch>
-        </p:blipFill>
-        <p:spPr>
-          <a:xfrm>
-            <a:off x="964038" y="1773936"/>
-            <a:ext cx="4472722" cy="1956816"/>
-          </a:xfrm>
-          <a:prstGeom prst="rect">
-            <a:avLst/>
-          </a:prstGeom>
-        </p:spPr>
-      </p:pic>
-      <p:sp>
-        <p:nvSpPr>
-          <p:cNvPr id="17" name="Rectangle 16"/>
-          <p:cNvSpPr/>
-          <p:nvPr/>
-        </p:nvSpPr>
-        <p:spPr>
-          <a:xfrm>
-            <a:off x="6327648" y="1481328"/>
-            <a:ext cx="5486400" cy="2304288"/>
-          </a:xfrm>
-          <a:prstGeom prst="rect">
-            <a:avLst/>
-          </a:prstGeom>
-          <a:solidFill>
-            <a:srgbClr val="FFFFFF"/>
-          </a:solidFill>
-          <a:ln>
-            <a:solidFill>
-              <a:srgbClr val="D6DCE4"/>
-            </a:solidFill>
-          </a:ln>
-          <a:effectLst/>
-        </p:spPr>
-        <p:style>
-          <a:lnRef idx="1">
-            <a:schemeClr val="accent1"/>
-          </a:lnRef>
-          <a:fillRef idx="3">
-            <a:schemeClr val="accent1"/>
-          </a:fillRef>
-          <a:effectRef idx="2">
-            <a:schemeClr val="accent1"/>
-          </a:effectRef>
-          <a:fontRef idx="minor">
-            <a:schemeClr val="lt1"/>
-          </a:fontRef>
-        </p:style>
-        <p:txBody>
-          <a:bodyPr rtlCol="0" anchor="ctr" wrap="square"/>
-          <a:lstStyle/>
-          <a:p>
-            <a:pPr algn="ctr"/>
-          </a:p>
-        </p:txBody>
-      </p:sp>
-      <p:sp>
-        <p:nvSpPr>
-          <p:cNvPr id="18" name="TextBox 17"/>
-          <p:cNvSpPr txBox="1"/>
-          <p:nvPr/>
-        </p:nvSpPr>
-        <p:spPr>
-          <a:xfrm>
-            <a:off x="6400800" y="1517904"/>
-            <a:ext cx="5340096" cy="237744"/>
-          </a:xfrm>
-          <a:prstGeom prst="rect">
-            <a:avLst/>
-          </a:prstGeom>
-          <a:noFill/>
-        </p:spPr>
-        <p:txBody>
-          <a:bodyPr wrap="square">
-            <a:spAutoFit/>
-          </a:bodyPr>
-          <a:lstStyle/>
-          <a:p>
-            <a:r>
-              <a:rPr sz="950" b="1">
-                <a:solidFill>
-                  <a:srgbClr val="010328"/>
-                </a:solidFill>
-                <a:latin typeface="微软雅黑"/>
-              </a:rPr>
-              <a:t>② pytest 全绿终端输出（逐字捕获）</a:t>
-            </a:r>
-          </a:p>
-        </p:txBody>
-      </p:sp>
-      <p:pic>
-        <p:nvPicPr>
-          <p:cNvPr id="19" name="Picture 18" descr="shot_test.png"/>
-          <p:cNvPicPr>
-            <a:picLocks noChangeAspect="1"/>
-          </p:cNvPicPr>
-          <p:nvPr/>
-        </p:nvPicPr>
-        <p:blipFill>
-          <a:blip r:embed="rId3"/>
-          <a:stretch>
-            <a:fillRect/>
-          </a:stretch>
-        </p:blipFill>
-        <p:spPr>
-          <a:xfrm>
-            <a:off x="6834486" y="1773936"/>
-            <a:ext cx="4472722" cy="1956816"/>
-          </a:xfrm>
-          <a:prstGeom prst="rect">
-            <a:avLst/>
-          </a:prstGeom>
-        </p:spPr>
-      </p:pic>
-      <p:sp>
-        <p:nvSpPr>
-          <p:cNvPr id="20" name="Rectangle 19"/>
-          <p:cNvSpPr/>
-          <p:nvPr/>
-        </p:nvSpPr>
-        <p:spPr>
-          <a:xfrm>
-            <a:off x="457200" y="3877056"/>
-            <a:ext cx="5486400" cy="2304288"/>
-          </a:xfrm>
-          <a:prstGeom prst="rect">
-            <a:avLst/>
-          </a:prstGeom>
-          <a:solidFill>
-            <a:srgbClr val="FFFFFF"/>
-          </a:solidFill>
-          <a:ln>
-            <a:solidFill>
-              <a:srgbClr val="D6DCE4"/>
-            </a:solidFill>
-          </a:ln>
-          <a:effectLst/>
-        </p:spPr>
-        <p:style>
-          <a:lnRef idx="1">
-            <a:schemeClr val="accent1"/>
-          </a:lnRef>
-          <a:fillRef idx="3">
-            <a:schemeClr val="accent1"/>
-          </a:fillRef>
-          <a:effectRef idx="2">
-            <a:schemeClr val="accent1"/>
-          </a:effectRef>
-          <a:fontRef idx="minor">
-            <a:schemeClr val="lt1"/>
-          </a:fontRef>
-        </p:style>
-        <p:txBody>
-          <a:bodyPr rtlCol="0" anchor="ctr" wrap="square"/>
-          <a:lstStyle/>
-          <a:p>
-            <a:pPr algn="ctr"/>
-          </a:p>
-        </p:txBody>
-      </p:sp>
-      <p:sp>
-        <p:nvSpPr>
-          <p:cNvPr id="21" name="TextBox 20"/>
-          <p:cNvSpPr txBox="1"/>
-          <p:nvPr/>
-        </p:nvSpPr>
-        <p:spPr>
-          <a:xfrm>
-            <a:off x="530352" y="3913632"/>
-            <a:ext cx="5340096" cy="237744"/>
-          </a:xfrm>
-          <a:prstGeom prst="rect">
-            <a:avLst/>
-          </a:prstGeom>
-          <a:noFill/>
-        </p:spPr>
-        <p:txBody>
-          <a:bodyPr wrap="square">
-            <a:spAutoFit/>
-          </a:bodyPr>
-          <a:lstStyle/>
-          <a:p>
-            <a:r>
-              <a:rPr sz="950" b="1">
-                <a:solidFill>
-                  <a:srgbClr val="010328"/>
-                </a:solidFill>
-                <a:latin typeface="微软雅黑"/>
-              </a:rPr>
-              <a:t>③ report.txt「验收档位判定（实测）」段</a:t>
-            </a:r>
-          </a:p>
-        </p:txBody>
-      </p:sp>
-      <p:pic>
-        <p:nvPicPr>
-          <p:cNvPr id="22" name="Picture 21" descr="shot_report.png"/>
-          <p:cNvPicPr>
-            <a:picLocks noChangeAspect="1"/>
-          </p:cNvPicPr>
-          <p:nvPr/>
-        </p:nvPicPr>
-        <p:blipFill>
-          <a:blip r:embed="rId4"/>
-          <a:stretch>
-            <a:fillRect/>
-          </a:stretch>
-        </p:blipFill>
-        <p:spPr>
-          <a:xfrm>
-            <a:off x="964038" y="4169664"/>
-            <a:ext cx="4472722" cy="1956816"/>
-          </a:xfrm>
-          <a:prstGeom prst="rect">
-            <a:avLst/>
-          </a:prstGeom>
-        </p:spPr>
-      </p:pic>
-      <p:sp>
-        <p:nvSpPr>
-          <p:cNvPr id="23" name="Rectangle 22"/>
-          <p:cNvSpPr/>
-          <p:nvPr/>
-        </p:nvSpPr>
-        <p:spPr>
-          <a:xfrm>
-            <a:off x="6327648" y="3877056"/>
-            <a:ext cx="5486400" cy="2304288"/>
-          </a:xfrm>
-          <a:prstGeom prst="rect">
-            <a:avLst/>
-          </a:prstGeom>
-          <a:solidFill>
-            <a:srgbClr val="F7F9FB"/>
-          </a:solidFill>
-          <a:ln>
-            <a:solidFill>
-              <a:srgbClr val="D6DCE4"/>
-            </a:solidFill>
-          </a:ln>
-          <a:effectLst/>
-        </p:spPr>
-        <p:style>
-          <a:lnRef idx="1">
-            <a:schemeClr val="accent1"/>
-          </a:lnRef>
-          <a:fillRef idx="3">
-            <a:schemeClr val="accent1"/>
-          </a:fillRef>
-          <a:effectRef idx="2">
-            <a:schemeClr val="accent1"/>
-          </a:effectRef>
-          <a:fontRef idx="minor">
-            <a:schemeClr val="lt1"/>
-          </a:fontRef>
-        </p:style>
-        <p:txBody>
-          <a:bodyPr rtlCol="0" anchor="ctr" wrap="square"/>
-          <a:lstStyle/>
-          <a:p>
-            <a:pPr algn="ctr"/>
-          </a:p>
-        </p:txBody>
-      </p:sp>
-      <p:sp>
-        <p:nvSpPr>
-          <p:cNvPr id="24" name="TextBox 23"/>
-          <p:cNvSpPr txBox="1"/>
-          <p:nvPr/>
-        </p:nvSpPr>
-        <p:spPr>
-          <a:xfrm>
-            <a:off x="6400800" y="3913632"/>
-            <a:ext cx="5340096" cy="237744"/>
-          </a:xfrm>
-          <a:prstGeom prst="rect">
-            <a:avLst/>
-          </a:prstGeom>
-          <a:noFill/>
-        </p:spPr>
-        <p:txBody>
-          <a:bodyPr wrap="square">
-            <a:spAutoFit/>
-          </a:bodyPr>
-          <a:lstStyle/>
-          <a:p>
-            <a:r>
-              <a:rPr sz="950" b="1">
-                <a:solidFill>
-                  <a:srgbClr val="010328"/>
-                </a:solidFill>
-                <a:latin typeface="微软雅黑"/>
-              </a:rPr>
-              <a:t>④ 采集口径（可复现）</a:t>
-            </a:r>
-          </a:p>
-        </p:txBody>
-      </p:sp>
-      <p:sp>
-        <p:nvSpPr>
-          <p:cNvPr id="25" name="TextBox 24"/>
-          <p:cNvSpPr txBox="1"/>
-          <p:nvPr/>
-        </p:nvSpPr>
-        <p:spPr>
-          <a:xfrm>
-            <a:off x="6437376" y="4187952"/>
-            <a:ext cx="5266944" cy="1920240"/>
-          </a:xfrm>
-          <a:prstGeom prst="rect">
-            <a:avLst/>
-          </a:prstGeom>
-          <a:noFill/>
-        </p:spPr>
-        <p:txBody>
-          <a:bodyPr wrap="square">
-            <a:spAutoFit/>
-          </a:bodyPr>
-          <a:lstStyle/>
-          <a:p>
-            <a:r>
-              <a:rPr sz="950" b="0">
-                <a:solidFill>
-                  <a:srgbClr val="2B2F36"/>
-                </a:solidFill>
-                <a:latin typeface="微软雅黑"/>
-              </a:rPr>
-              <a:t>项目：05-AI应用基础48课时版/工程化项目/m23b_bidding/</a:t>
-            </a:r>
-          </a:p>
-          <a:p>
-            <a:r>
-              <a:rPr sz="950" b="0">
-                <a:solidFill>
-                  <a:srgbClr val="2B2F36"/>
-                </a:solidFill>
-                <a:latin typeface="微软雅黑"/>
-              </a:rPr>
-              <a:t>命令：/opt/anaconda3/bin/python run.py ｜ /opt/anaconda3/bin/python -m pytest -q</a:t>
-            </a:r>
-          </a:p>
-          <a:p>
-            <a:r>
-              <a:rPr sz="950" b="0">
-                <a:solidFill>
-                  <a:srgbClr val="2B2F36"/>
-                </a:solidFill>
-                <a:latin typeface="微软雅黑"/>
-              </a:rPr>
-              <a:t>采集：工具/ppt97/capture97.py（2026-10-28 10:48 真跑逐字捕获输出）</a:t>
-            </a:r>
-          </a:p>
-          <a:p>
-            <a:r>
-              <a:rPr sz="950" b="0">
-                <a:solidFill>
-                  <a:srgbClr val="2B2F36"/>
-                </a:solidFill>
-                <a:latin typeface="微软雅黑"/>
-              </a:rPr>
-              <a:t>渲染：工具/ppt97/terminal_png.py（终端截图，不改写任何数字）</a:t>
-            </a:r>
-          </a:p>
-          <a:p>
-            <a:r>
-              <a:rPr sz="950" b="0">
-                <a:solidFill>
-                  <a:srgbClr val="2B2F36"/>
-                </a:solidFill>
-                <a:latin typeface="微软雅黑"/>
-              </a:rPr>
-              <a:t>退出码：run=0 ｜ pytest=0</a:t>
-            </a:r>
-          </a:p>
-          <a:p>
-            <a:r>
-              <a:rPr sz="950" b="0">
-                <a:solidFill>
-                  <a:srgbClr val="2B2F36"/>
-                </a:solidFill>
-                <a:latin typeface="微软雅黑"/>
-              </a:rPr>
-              <a:t>档位判定取自 output/report.txt「验收档位判定（实测）」段</a:t>
-            </a:r>
-          </a:p>
-        </p:txBody>
-      </p:sp>
-      <p:sp>
-        <p:nvSpPr>
-          <p:cNvPr id="26" name="TextBox 25"/>
-          <p:cNvSpPr txBox="1"/>
-          <p:nvPr/>
-        </p:nvSpPr>
-        <p:spPr>
-          <a:xfrm>
-            <a:off x="457200" y="6254496"/>
-            <a:ext cx="11247120" cy="201168"/>
-          </a:xfrm>
-          <a:prstGeom prst="rect">
-            <a:avLst/>
-          </a:prstGeom>
-          <a:noFill/>
-        </p:spPr>
-        <p:txBody>
-          <a:bodyPr wrap="square">
-            <a:spAutoFit/>
-          </a:bodyPr>
-          <a:lstStyle/>
-          <a:p>
-            <a:r>
-              <a:rPr sz="900" b="0">
-                <a:solidFill>
-                  <a:srgbClr val="7A8698"/>
-                </a:solidFill>
-                <a:latin typeface="微软雅黑"/>
-              </a:rPr>
-              <a:t>截图内容逐字取自 工具/ppt97/evidence/m23b_bidding/（capture97.py 真跑捕获，未改写数字）</a:t>
-            </a:r>
-          </a:p>
-        </p:txBody>
-      </p:sp>
-    </p:spTree>
-  </p:cSld>
-  <p:clrMapOvr>
-    <a:masterClrMapping/>
-  </p:clrMapOvr>
-</p:sld>
-</file>
-
-<file path=ppt/slides/slide14.xml><?xml version="1.0" encoding="utf-8"?>
-<p:sld xmlns:a="http://schemas.openxmlformats.org/drawingml/2006/main" xmlns:p="http://schemas.openxmlformats.org/presentationml/2006/main" xmlns:r="http://schemas.openxmlformats.org/officeDocument/2006/relationships">
-  <p:cSld>
-    <p:spTree>
-      <p:nvGrpSpPr>
-        <p:cNvPr id="1" name=""/>
-        <p:cNvGrpSpPr/>
-        <p:nvPr/>
-      </p:nvGrpSpPr>
-      <p:grpSpPr/>
-      <p:sp>
-        <p:nvSpPr>
-          <p:cNvPr id="2" name="Rectangle 1"/>
-          <p:cNvSpPr/>
-          <p:nvPr/>
-        </p:nvSpPr>
-        <p:spPr>
-          <a:xfrm>
-            <a:off x="0" y="0"/>
-            <a:ext cx="12192000" cy="1150000"/>
-          </a:xfrm>
-          <a:prstGeom prst="rect">
-            <a:avLst/>
-          </a:prstGeom>
-          <a:solidFill>
-            <a:srgbClr val="010328"/>
-          </a:solidFill>
-          <a:ln>
-            <a:noFill/>
-          </a:ln>
-          <a:effectLst/>
-        </p:spPr>
-        <p:style>
-          <a:lnRef idx="1">
-            <a:schemeClr val="accent1"/>
-          </a:lnRef>
-          <a:fillRef idx="3">
-            <a:schemeClr val="accent1"/>
-          </a:fillRef>
-          <a:effectRef idx="2">
-            <a:schemeClr val="accent1"/>
-          </a:effectRef>
-          <a:fontRef idx="minor">
-            <a:schemeClr val="lt1"/>
-          </a:fontRef>
-        </p:style>
-        <p:txBody>
-          <a:bodyPr rtlCol="0" anchor="ctr"/>
-          <a:lstStyle/>
-          <a:p>
-            <a:pPr algn="ctr"/>
-          </a:p>
-        </p:txBody>
-      </p:sp>
-      <p:sp>
-        <p:nvSpPr>
-          <p:cNvPr id="3" name="Rectangle 2"/>
-          <p:cNvSpPr/>
-          <p:nvPr/>
-        </p:nvSpPr>
-        <p:spPr>
-          <a:xfrm>
-            <a:off x="0" y="1150000"/>
-            <a:ext cx="2600000" cy="70000"/>
-          </a:xfrm>
-          <a:prstGeom prst="rect">
-            <a:avLst/>
-          </a:prstGeom>
-          <a:solidFill>
-            <a:srgbClr val="F5670F"/>
-          </a:solidFill>
-          <a:ln>
-            <a:noFill/>
-          </a:ln>
-          <a:effectLst/>
-        </p:spPr>
-        <p:style>
-          <a:lnRef idx="1">
-            <a:schemeClr val="accent1"/>
-          </a:lnRef>
-          <a:fillRef idx="3">
-            <a:schemeClr val="accent1"/>
-          </a:fillRef>
-          <a:effectRef idx="2">
-            <a:schemeClr val="accent1"/>
-          </a:effectRef>
-          <a:fontRef idx="minor">
-            <a:schemeClr val="lt1"/>
-          </a:fontRef>
-        </p:style>
-        <p:txBody>
-          <a:bodyPr rtlCol="0" anchor="ctr"/>
-          <a:lstStyle/>
-          <a:p>
-            <a:pPr algn="ctr"/>
-          </a:p>
-        </p:txBody>
-      </p:sp>
-      <p:sp>
-        <p:nvSpPr>
-          <p:cNvPr id="4" name="TextBox 3"/>
-          <p:cNvSpPr txBox="1"/>
-          <p:nvPr/>
-        </p:nvSpPr>
-        <p:spPr>
-          <a:xfrm>
-            <a:off x="700000" y="300000"/>
-            <a:ext cx="10792000" cy="700000"/>
-          </a:xfrm>
-          <a:prstGeom prst="rect">
-            <a:avLst/>
-          </a:prstGeom>
-          <a:noFill/>
-        </p:spPr>
-        <p:txBody>
-          <a:bodyPr wrap="square" anchor="t">
-            <a:spAutoFit/>
-          </a:bodyPr>
-          <a:lstStyle/>
-          <a:p>
-            <a:pPr algn="l">
-              <a:lnSpc>
-                <a:spcPct val="110000"/>
-              </a:lnSpc>
-              <a:spcAft>
-                <a:spcPts val="600"/>
-              </a:spcAft>
-            </a:pPr>
-            <a:r>
-              <a:rPr sz="2400" b="1">
-                <a:solidFill>
-                  <a:srgbClr val="FFFFFF"/>
-                </a:solidFill>
-                <a:latin typeface="微软雅黑"/>
-              </a:rPr>
-              <a:t>工单完成效果图 · 完成后长这样（真实运行 · 参考实现） · 课末对照</a:t>
-            </a:r>
-          </a:p>
-        </p:txBody>
-      </p:sp>
-      <p:sp>
-        <p:nvSpPr>
-          <p:cNvPr id="11" name="Rectangle 10"/>
-          <p:cNvSpPr/>
-          <p:nvPr/>
-        </p:nvSpPr>
-        <p:spPr>
-          <a:xfrm>
-            <a:off x="500000" y="6500000"/>
-            <a:ext cx="11100000" cy="20000"/>
-          </a:xfrm>
-          <a:prstGeom prst="rect">
-            <a:avLst/>
-          </a:prstGeom>
-          <a:solidFill>
-            <a:srgbClr val="C9D4EE"/>
-          </a:solidFill>
-          <a:ln>
-            <a:noFill/>
-          </a:ln>
-          <a:effectLst/>
-        </p:spPr>
-        <p:style>
-          <a:lnRef idx="1">
-            <a:schemeClr val="accent1"/>
-          </a:lnRef>
-          <a:fillRef idx="3">
-            <a:schemeClr val="accent1"/>
-          </a:fillRef>
-          <a:effectRef idx="2">
-            <a:schemeClr val="accent1"/>
-          </a:effectRef>
-          <a:fontRef idx="minor">
-            <a:schemeClr val="lt1"/>
-          </a:fontRef>
-        </p:style>
-        <p:txBody>
-          <a:bodyPr rtlCol="0" anchor="ctr"/>
-          <a:lstStyle/>
-          <a:p>
-            <a:pPr algn="ctr"/>
-          </a:p>
-        </p:txBody>
-      </p:sp>
-      <p:sp>
-        <p:nvSpPr>
-          <p:cNvPr id="12" name="TextBox 11"/>
-          <p:cNvSpPr txBox="1"/>
-          <p:nvPr/>
-        </p:nvSpPr>
-        <p:spPr>
-          <a:xfrm>
-            <a:off x="500000" y="6540000"/>
-            <a:ext cx="7000000" cy="300000"/>
-          </a:xfrm>
-          <a:prstGeom prst="rect">
-            <a:avLst/>
-          </a:prstGeom>
-          <a:noFill/>
-        </p:spPr>
-        <p:txBody>
-          <a:bodyPr wrap="square" anchor="t">
-            <a:spAutoFit/>
-          </a:bodyPr>
-          <a:lstStyle/>
-          <a:p>
-            <a:pPr algn="l">
-              <a:lnSpc>
-                <a:spcPct val="110000"/>
-              </a:lnSpc>
-              <a:spcAft>
-                <a:spcPts val="600"/>
-              </a:spcAft>
-            </a:pPr>
-            <a:r>
-              <a:rPr sz="1000" b="0">
-                <a:solidFill>
-                  <a:srgbClr val="8A97B5"/>
-                </a:solidFill>
-                <a:latin typeface="微软雅黑"/>
-              </a:rPr>
-              <a:t>两江智造集团 · AI应用基础48课时版</a:t>
-            </a:r>
-          </a:p>
-        </p:txBody>
-      </p:sp>
-      <p:sp>
-        <p:nvSpPr>
-          <p:cNvPr id="13" name="TextBox 12"/>
-          <p:cNvSpPr txBox="1"/>
-          <p:nvPr/>
-        </p:nvSpPr>
-        <p:spPr>
-          <a:xfrm>
-            <a:off x="10600000" y="6540000"/>
-            <a:ext cx="1000000" cy="300000"/>
-          </a:xfrm>
-          <a:prstGeom prst="rect">
-            <a:avLst/>
-          </a:prstGeom>
-          <a:noFill/>
-        </p:spPr>
-        <p:txBody>
-          <a:bodyPr wrap="square" anchor="t">
-            <a:spAutoFit/>
-          </a:bodyPr>
-          <a:lstStyle/>
-          <a:p>
-            <a:pPr algn="r">
-              <a:lnSpc>
-                <a:spcPct val="110000"/>
-              </a:lnSpc>
-              <a:spcAft>
-                <a:spcPts val="600"/>
-              </a:spcAft>
-            </a:pPr>
-            <a:r>
-              <a:rPr sz="1000" b="0">
-                <a:solidFill>
-                  <a:srgbClr val="8A97B5"/>
-                </a:solidFill>
-                <a:latin typeface="微软雅黑"/>
-              </a:rPr>
-              <a:t>14 / 18</a:t>
-            </a:r>
-          </a:p>
-        </p:txBody>
-      </p:sp>
-      <p:sp>
-        <p:nvSpPr>
-          <p:cNvPr id="14" name="Rounded Rectangle 13"/>
-          <p:cNvSpPr/>
-          <p:nvPr/>
-        </p:nvSpPr>
-        <p:spPr>
-          <a:xfrm>
-            <a:off x="758952" y="1801368"/>
-            <a:ext cx="10899648" cy="2286000"/>
-          </a:xfrm>
-          <a:prstGeom prst="roundRect">
-            <a:avLst>
-              <a:gd name="adj" fmla="val 6000"/>
-            </a:avLst>
-          </a:prstGeom>
-          <a:solidFill>
-            <a:srgbClr val="F3F6FD"/>
-          </a:solidFill>
-          <a:ln w="9525">
-            <a:solidFill>
-              <a:srgbClr val="C9D4EE"/>
-            </a:solidFill>
-          </a:ln>
-          <a:effectLst/>
-        </p:spPr>
-        <p:style>
-          <a:lnRef idx="1">
-            <a:schemeClr val="accent1"/>
-          </a:lnRef>
-          <a:fillRef idx="3">
-            <a:schemeClr val="accent1"/>
-          </a:fillRef>
-          <a:effectRef idx="2">
-            <a:schemeClr val="accent1"/>
-          </a:effectRef>
-          <a:fontRef idx="minor">
-            <a:schemeClr val="lt1"/>
-          </a:fontRef>
-        </p:style>
-        <p:txBody>
-          <a:bodyPr rtlCol="0" anchor="ctr"/>
-          <a:lstStyle/>
-          <a:p/>
-        </p:txBody>
-      </p:sp>
-      <p:sp>
-        <p:nvSpPr>
-          <p:cNvPr id="15" name="Rounded Rectangle 14"/>
-          <p:cNvSpPr/>
-          <p:nvPr/>
-        </p:nvSpPr>
-        <p:spPr>
-          <a:xfrm>
-            <a:off x="758952" y="4178808"/>
-            <a:ext cx="10899648" cy="1051560"/>
-          </a:xfrm>
-          <a:prstGeom prst="roundRect">
-            <a:avLst>
-              <a:gd name="adj" fmla="val 6000"/>
-            </a:avLst>
-          </a:prstGeom>
-          <a:solidFill>
-            <a:srgbClr val="FFFFFF"/>
-          </a:solidFill>
-          <a:ln w="9525">
-            <a:solidFill>
-              <a:srgbClr val="C9D4EE"/>
-            </a:solidFill>
-          </a:ln>
-          <a:effectLst/>
-        </p:spPr>
-        <p:style>
-          <a:lnRef idx="1">
-            <a:schemeClr val="accent1"/>
-          </a:lnRef>
-          <a:fillRef idx="3">
-            <a:schemeClr val="accent1"/>
-          </a:fillRef>
-          <a:effectRef idx="2">
-            <a:schemeClr val="accent1"/>
-          </a:effectRef>
-          <a:fontRef idx="minor">
-            <a:schemeClr val="lt1"/>
-          </a:fontRef>
-        </p:style>
-        <p:txBody>
-          <a:bodyPr rtlCol="0" anchor="ctr"/>
-          <a:lstStyle/>
-          <a:p/>
-        </p:txBody>
-      </p:sp>
-      <p:sp>
-        <p:nvSpPr>
-          <p:cNvPr id="16" name="Rounded Rectangle 15"/>
-          <p:cNvSpPr/>
-          <p:nvPr/>
-        </p:nvSpPr>
-        <p:spPr>
-          <a:xfrm>
-            <a:off x="758952" y="5321808"/>
-            <a:ext cx="10899648" cy="1005840"/>
-          </a:xfrm>
-          <a:prstGeom prst="roundRect">
-            <a:avLst>
-              <a:gd name="adj" fmla="val 6000"/>
-            </a:avLst>
-          </a:prstGeom>
-          <a:solidFill>
-            <a:srgbClr val="FFFFFF"/>
-          </a:solidFill>
-          <a:ln w="9525">
-            <a:solidFill>
-              <a:srgbClr val="C9D4EE"/>
-            </a:solidFill>
-          </a:ln>
-          <a:effectLst/>
-        </p:spPr>
-        <p:style>
-          <a:lnRef idx="1">
-            <a:schemeClr val="accent1"/>
-          </a:lnRef>
-          <a:fillRef idx="3">
-            <a:schemeClr val="accent1"/>
-          </a:fillRef>
-          <a:effectRef idx="2">
-            <a:schemeClr val="accent1"/>
-          </a:effectRef>
-          <a:fontRef idx="minor">
-            <a:schemeClr val="lt1"/>
-          </a:fontRef>
-        </p:style>
-        <p:txBody>
-          <a:bodyPr rtlCol="0" anchor="ctr"/>
-          <a:lstStyle/>
-          <a:p/>
-        </p:txBody>
-      </p:sp>
-      <p:sp>
-        <p:nvSpPr>
-          <p:cNvPr id="17" name="TextBox 16"/>
-          <p:cNvSpPr txBox="1"/>
-          <p:nvPr/>
-        </p:nvSpPr>
-        <p:spPr>
-          <a:xfrm>
-            <a:off x="960120" y="1929384"/>
-            <a:ext cx="10469880" cy="2048256"/>
-          </a:xfrm>
-          <a:prstGeom prst="rect">
-            <a:avLst/>
-          </a:prstGeom>
-          <a:noFill/>
-        </p:spPr>
-        <p:txBody>
-          <a:bodyPr wrap="square" anchor="t" lIns="0" rIns="0" tIns="0" bIns="0">
-            <a:spAutoFit/>
-          </a:bodyPr>
-          <a:lstStyle/>
-          <a:p>
-            <a:pPr algn="l"/>
-            <a:r>
-              <a:rPr sz="1400" b="1">
-                <a:solidFill>
-                  <a:srgbClr val="0545E8"/>
-                </a:solidFill>
-              </a:rPr>
-              <a:t>① 参考实现真实运行输出（本工单完成态）</a:t>
-            </a:r>
-          </a:p>
-          <a:p>
-            <a:pPr algn="l">
-              <a:spcBef>
-                <a:spcPts val="100"/>
-              </a:spcBef>
-            </a:pPr>
-            <a:r>
-              <a:rPr sz="1000" b="0">
-                <a:solidFill>
-                  <a:srgbClr val="010328"/>
-                </a:solidFill>
-              </a:rPr>
-              <a:t>=== 工单 M2-3b 竞标：CNN焊缝 vs LSTM风机（轻量基线）· 完成态 ===</a:t>
-            </a:r>
-          </a:p>
-          <a:p>
-            <a:pPr algn="l">
-              <a:spcBef>
-                <a:spcPts val="100"/>
-              </a:spcBef>
-            </a:pPr>
-            <a:r>
-              <a:rPr sz="1000" b="0">
-                <a:solidFill>
-                  <a:srgbClr val="010328"/>
-                </a:solidFill>
-              </a:rPr>
-              <a:t>图像线（CNN焊缝·块统计特征3维）: 3折交叉验证 cv = 1.000</a:t>
-            </a:r>
-          </a:p>
-          <a:p>
-            <a:pPr algn="l">
-              <a:spcBef>
-                <a:spcPts val="100"/>
-              </a:spcBef>
-            </a:pPr>
-            <a:r>
-              <a:rPr sz="1000" b="0">
-                <a:solidFill>
-                  <a:srgbClr val="010328"/>
-                </a:solidFill>
-              </a:rPr>
-              <a:t>时序线（LSTM风机·RMS比值1维）  : 3折交叉验证 cv = 0.995</a:t>
-            </a:r>
-          </a:p>
-          <a:p>
-            <a:pPr algn="l">
-              <a:spcBef>
-                <a:spcPts val="100"/>
-              </a:spcBef>
-            </a:pPr>
-            <a:r>
-              <a:rPr sz="1000" b="0">
-                <a:solidFill>
-                  <a:srgbClr val="010328"/>
-                </a:solidFill>
-              </a:rPr>
-              <a:t>竞标建议: 轻量基线支持选「CNN焊缝」（差 0.005）</a:t>
-            </a:r>
-          </a:p>
-          <a:p>
-            <a:pPr algn="l">
-              <a:spcBef>
-                <a:spcPts val="100"/>
-              </a:spcBef>
-            </a:pPr>
-            <a:r>
-              <a:rPr sz="1000" b="0">
-                <a:solidFill>
-                  <a:srgbClr val="010328"/>
-                </a:solidFill>
-              </a:rPr>
-              <a:t>答辩要点: 基线≠上限——本表只证明'哪条路线更容易起步'；真模型预期增益需说明数据量、算力与标注成本三项证据。</a:t>
-            </a:r>
-          </a:p>
-        </p:txBody>
-      </p:sp>
-      <p:sp>
-        <p:nvSpPr>
-          <p:cNvPr id="18" name="TextBox 17"/>
-          <p:cNvSpPr txBox="1"/>
-          <p:nvPr/>
-        </p:nvSpPr>
-        <p:spPr>
-          <a:xfrm>
-            <a:off x="960120" y="4297680"/>
-            <a:ext cx="10469880" cy="868680"/>
-          </a:xfrm>
-          <a:prstGeom prst="rect">
-            <a:avLst/>
-          </a:prstGeom>
-          <a:noFill/>
-        </p:spPr>
-        <p:txBody>
-          <a:bodyPr wrap="square" anchor="t" lIns="0" rIns="0" tIns="0" bIns="0">
-            <a:spAutoFit/>
-          </a:bodyPr>
-          <a:lstStyle/>
-          <a:p>
-            <a:pPr algn="l"/>
-            <a:r>
-              <a:rPr sz="1300" b="1">
-                <a:solidFill>
-                  <a:srgbClr val="0545E8"/>
-                </a:solidFill>
-              </a:rPr>
-              <a:t>② 关键自检点（对照工单逐项核对）</a:t>
-            </a:r>
-          </a:p>
-          <a:p>
-            <a:pPr algn="l">
-              <a:spcBef>
-                <a:spcPts val="200"/>
-              </a:spcBef>
-            </a:pPr>
-            <a:r>
-              <a:rPr sz="1150" b="0">
-                <a:solidFill>
-                  <a:srgbClr val="010328"/>
-                </a:solidFill>
-              </a:rPr>
-              <a:t>□ 代码从头跑到尾不报错　□ 指标与工单及格线逐项对齐　□ 随机种子已固定（可复现）</a:t>
-            </a:r>
-          </a:p>
-        </p:txBody>
-      </p:sp>
-      <p:sp>
-        <p:nvSpPr>
-          <p:cNvPr id="19" name="TextBox 18"/>
-          <p:cNvSpPr txBox="1"/>
-          <p:nvPr/>
-        </p:nvSpPr>
-        <p:spPr>
-          <a:xfrm>
-            <a:off x="960120" y="5431536"/>
-            <a:ext cx="10469880" cy="841248"/>
-          </a:xfrm>
-          <a:prstGeom prst="rect">
-            <a:avLst/>
-          </a:prstGeom>
-          <a:noFill/>
-        </p:spPr>
-        <p:txBody>
-          <a:bodyPr wrap="square" anchor="t" lIns="0" rIns="0" tIns="0" bIns="0">
-            <a:spAutoFit/>
-          </a:bodyPr>
-          <a:lstStyle/>
-          <a:p>
-            <a:pPr algn="l"/>
-            <a:r>
-              <a:rPr sz="1300" b="1">
-                <a:solidFill>
-                  <a:srgbClr val="F5670F"/>
-                </a:solidFill>
-              </a:rPr>
-              <a:t>③ 提交与达标（过程性证据）</a:t>
-            </a:r>
-          </a:p>
-          <a:p>
-            <a:pPr algn="l">
-              <a:spcBef>
-                <a:spcPts val="200"/>
-              </a:spcBef>
-            </a:pPr>
-            <a:r>
-              <a:rPr sz="1100" b="0">
-                <a:solidFill>
-                  <a:srgbClr val="010328"/>
-                </a:solidFill>
-              </a:rPr>
-              <a:t>达标线 D≥60 / C≥70 / B≥80 / A≥90　｜　提交 学号_姓名_工单号 + 运行截图 + 决策记录 + Git≥1次commit</a:t>
-            </a:r>
-          </a:p>
-        </p:txBody>
-      </p:sp>
-    </p:spTree>
-  </p:cSld>
-  <p:clrMapOvr>
-    <a:masterClrMapping/>
-  </p:clrMapOvr>
-</p:sld>
-</file>
-
 <file path=ppt/slides/slide15.xml><?xml version="1.0" encoding="utf-8"?>
 <p:sld xmlns:a="http://schemas.openxmlformats.org/drawingml/2006/main" xmlns:p="http://schemas.openxmlformats.org/presentationml/2006/main" xmlns:r="http://schemas.openxmlformats.org/officeDocument/2006/relationships">
   <p:cSld>
@@ -8296,7 +8363,7 @@
         <p:spPr>
           <a:xfrm>
             <a:off x="0" y="0"/>
-            <a:ext cx="12192000" cy="6858000"/>
+            <a:ext cx="12192000" cy="1150000"/>
           </a:xfrm>
           <a:prstGeom prst="rect">
             <a:avLst/>
@@ -8339,8 +8406,8 @@
         </p:nvSpPr>
         <p:spPr>
           <a:xfrm>
-            <a:off x="0" y="2880360"/>
-            <a:ext cx="12192000" cy="50000"/>
+            <a:off x="0" y="1150000"/>
+            <a:ext cx="2600000" cy="70000"/>
           </a:xfrm>
           <a:prstGeom prst="rect">
             <a:avLst/>
@@ -8383,178 +8450,8 @@
         </p:nvSpPr>
         <p:spPr>
           <a:xfrm>
-            <a:off x="0" y="1645920"/>
-            <a:ext cx="12192000" cy="1500000"/>
-          </a:xfrm>
-          <a:prstGeom prst="rect">
-            <a:avLst/>
-          </a:prstGeom>
-          <a:noFill/>
-        </p:spPr>
-        <p:txBody>
-          <a:bodyPr wrap="square" anchor="t">
-            <a:spAutoFit/>
-          </a:bodyPr>
-          <a:lstStyle/>
-          <a:p>
-            <a:pPr algn="ctr">
-              <a:lnSpc>
-                <a:spcPct val="110000"/>
-              </a:lnSpc>
-              <a:spcAft>
-                <a:spcPts val="600"/>
-              </a:spcAft>
-            </a:pPr>
-            <a:r>
-              <a:rPr sz="5400" b="1">
-                <a:solidFill>
-                  <a:srgbClr val="FFFFFF"/>
-                </a:solidFill>
-                <a:latin typeface="微软雅黑"/>
-              </a:rPr>
-              <a:t>THANKS</a:t>
-            </a:r>
-          </a:p>
-        </p:txBody>
-      </p:sp>
-      <p:sp>
-        <p:nvSpPr>
-          <p:cNvPr id="5" name="TextBox 4"/>
-          <p:cNvSpPr txBox="1"/>
-          <p:nvPr/>
-        </p:nvSpPr>
-        <p:spPr>
-          <a:xfrm>
-            <a:off x="0" y="3429000"/>
-            <a:ext cx="12192000" cy="800000"/>
-          </a:xfrm>
-          <a:prstGeom prst="rect">
-            <a:avLst/>
-          </a:prstGeom>
-          <a:noFill/>
-        </p:spPr>
-        <p:txBody>
-          <a:bodyPr wrap="square" anchor="t">
-            <a:spAutoFit/>
-          </a:bodyPr>
-          <a:lstStyle/>
-          <a:p>
-            <a:pPr algn="ctr">
-              <a:lnSpc>
-                <a:spcPct val="110000"/>
-              </a:lnSpc>
-              <a:spcAft>
-                <a:spcPts val="600"/>
-              </a:spcAft>
-            </a:pPr>
-            <a:r>
-              <a:rPr sz="2200" b="1">
-                <a:solidFill>
-                  <a:srgbClr val="F5670F"/>
-                </a:solidFill>
-                <a:latin typeface="微软雅黑"/>
-              </a:rPr>
-              <a:t>感谢聆听 · 动手实践出真知</a:t>
-            </a:r>
-          </a:p>
-        </p:txBody>
-      </p:sp>
-      <p:sp>
-        <p:nvSpPr>
-          <p:cNvPr id="6" name="TextBox 5"/>
-          <p:cNvSpPr txBox="1"/>
-          <p:nvPr/>
-        </p:nvSpPr>
-        <p:spPr>
-          <a:xfrm>
-            <a:off x="0" y="4526280"/>
-            <a:ext cx="12192000" cy="600000"/>
-          </a:xfrm>
-          <a:prstGeom prst="rect">
-            <a:avLst/>
-          </a:prstGeom>
-          <a:noFill/>
-        </p:spPr>
-        <p:txBody>
-          <a:bodyPr wrap="square" anchor="t">
-            <a:spAutoFit/>
-          </a:bodyPr>
-          <a:lstStyle/>
-          <a:p>
-            <a:pPr algn="ctr">
-              <a:lnSpc>
-                <a:spcPct val="110000"/>
-              </a:lnSpc>
-              <a:spcAft>
-                <a:spcPts val="600"/>
-              </a:spcAft>
-            </a:pPr>
-            <a:r>
-              <a:rPr sz="1400" b="0">
-                <a:solidFill>
-                  <a:srgbClr val="BBC6E6"/>
-                </a:solidFill>
-                <a:latin typeface="微软雅黑"/>
-              </a:rPr>
-              <a:t>以生为本   |   做中学 · 学中做</a:t>
-            </a:r>
-          </a:p>
-        </p:txBody>
-      </p:sp>
-      <p:sp>
-        <p:nvSpPr>
-          <p:cNvPr id="7" name="Rectangle 6"/>
-          <p:cNvSpPr/>
-          <p:nvPr/>
-        </p:nvSpPr>
-        <p:spPr>
-          <a:xfrm>
-            <a:off x="500000" y="6500000"/>
-            <a:ext cx="11100000" cy="20000"/>
-          </a:xfrm>
-          <a:prstGeom prst="rect">
-            <a:avLst/>
-          </a:prstGeom>
-          <a:solidFill>
-            <a:srgbClr val="C9D4EE"/>
-          </a:solidFill>
-          <a:ln>
-            <a:noFill/>
-          </a:ln>
-          <a:effectLst/>
-        </p:spPr>
-        <p:style>
-          <a:lnRef idx="1">
-            <a:schemeClr val="accent1"/>
-          </a:lnRef>
-          <a:fillRef idx="3">
-            <a:schemeClr val="accent1"/>
-          </a:fillRef>
-          <a:effectRef idx="2">
-            <a:schemeClr val="accent1"/>
-          </a:effectRef>
-          <a:fontRef idx="minor">
-            <a:schemeClr val="lt1"/>
-          </a:fontRef>
-        </p:style>
-        <p:txBody>
-          <a:bodyPr rtlCol="0" anchor="ctr"/>
-          <a:lstStyle/>
-          <a:p>
-            <a:pPr algn="ctr"/>
-          </a:p>
-        </p:txBody>
-      </p:sp>
-      <p:sp>
-        <p:nvSpPr>
-          <p:cNvPr id="8" name="TextBox 7"/>
-          <p:cNvSpPr txBox="1"/>
-          <p:nvPr/>
-        </p:nvSpPr>
-        <p:spPr>
-          <a:xfrm>
-            <a:off x="500000" y="6540000"/>
-            <a:ext cx="7000000" cy="300000"/>
+            <a:off x="700000" y="300000"/>
+            <a:ext cx="10792000" cy="700000"/>
           </a:xfrm>
           <a:prstGeom prst="rect">
             <a:avLst/>
@@ -8576,6 +8473,92 @@
               </a:spcAft>
             </a:pPr>
             <a:r>
+              <a:rPr sz="2400" b="1">
+                <a:solidFill>
+                  <a:srgbClr val="FFFFFF"/>
+                </a:solidFill>
+                <a:latin typeface="微软雅黑"/>
+              </a:rPr>
+              <a:t>实跑截图证据 · m23b_bidding</a:t>
+            </a:r>
+          </a:p>
+        </p:txBody>
+      </p:sp>
+      <p:sp>
+        <p:nvSpPr>
+          <p:cNvPr id="11" name="Rectangle 10"/>
+          <p:cNvSpPr/>
+          <p:nvPr/>
+        </p:nvSpPr>
+        <p:spPr>
+          <a:xfrm>
+            <a:off x="500000" y="6500000"/>
+            <a:ext cx="11100000" cy="20000"/>
+          </a:xfrm>
+          <a:prstGeom prst="rect">
+            <a:avLst/>
+          </a:prstGeom>
+          <a:solidFill>
+            <a:srgbClr val="C9D4EE"/>
+          </a:solidFill>
+          <a:ln>
+            <a:noFill/>
+          </a:ln>
+          <a:effectLst/>
+        </p:spPr>
+        <p:style>
+          <a:lnRef idx="1">
+            <a:schemeClr val="accent1"/>
+          </a:lnRef>
+          <a:fillRef idx="3">
+            <a:schemeClr val="accent1"/>
+          </a:fillRef>
+          <a:effectRef idx="2">
+            <a:schemeClr val="accent1"/>
+          </a:effectRef>
+          <a:fontRef idx="minor">
+            <a:schemeClr val="lt1"/>
+          </a:fontRef>
+        </p:style>
+        <p:txBody>
+          <a:bodyPr rtlCol="0" anchor="ctr"/>
+          <a:lstStyle/>
+          <a:p>
+            <a:pPr algn="ctr"/>
+          </a:p>
+        </p:txBody>
+      </p:sp>
+      <p:sp>
+        <p:nvSpPr>
+          <p:cNvPr id="12" name="TextBox 11"/>
+          <p:cNvSpPr txBox="1"/>
+          <p:nvPr/>
+        </p:nvSpPr>
+        <p:spPr>
+          <a:xfrm>
+            <a:off x="500000" y="6540000"/>
+            <a:ext cx="7000000" cy="300000"/>
+          </a:xfrm>
+          <a:prstGeom prst="rect">
+            <a:avLst/>
+          </a:prstGeom>
+          <a:noFill/>
+        </p:spPr>
+        <p:txBody>
+          <a:bodyPr wrap="square" anchor="t">
+            <a:spAutoFit/>
+          </a:bodyPr>
+          <a:lstStyle/>
+          <a:p>
+            <a:pPr algn="l">
+              <a:lnSpc>
+                <a:spcPct val="110000"/>
+              </a:lnSpc>
+              <a:spcAft>
+                <a:spcPts val="600"/>
+              </a:spcAft>
+            </a:pPr>
+            <a:r>
               <a:rPr sz="1000" b="0">
                 <a:solidFill>
                   <a:srgbClr val="8A97B5"/>
@@ -8589,7 +8572,7 @@
       </p:sp>
       <p:sp>
         <p:nvSpPr>
-          <p:cNvPr id="9" name="TextBox 8"/>
+          <p:cNvPr id="13" name="TextBox 12"/>
           <p:cNvSpPr txBox="1"/>
           <p:nvPr/>
         </p:nvSpPr>
@@ -8604,7 +8587,7 @@
           <a:noFill/>
         </p:spPr>
         <p:txBody>
-          <a:bodyPr wrap="square" anchor="ctr">
+          <a:bodyPr wrap="square" anchor="t">
             <a:spAutoFit/>
           </a:bodyPr>
           <a:lstStyle/>
@@ -8624,7 +8607,522 @@
                 </a:solidFill>
                 <a:latin typeface="微软雅黑"/>
               </a:rPr>
-              <a:t>15 / 18</a:t>
+              <a:t>15 / 20</a:t>
+            </a:r>
+          </a:p>
+        </p:txBody>
+      </p:sp>
+      <p:sp>
+        <p:nvSpPr>
+          <p:cNvPr id="14" name="Rectangle 13"/>
+          <p:cNvSpPr/>
+          <p:nvPr/>
+        </p:nvSpPr>
+        <p:spPr>
+          <a:xfrm>
+            <a:off x="457200" y="1481328"/>
+            <a:ext cx="5486400" cy="2304288"/>
+          </a:xfrm>
+          <a:prstGeom prst="rect">
+            <a:avLst/>
+          </a:prstGeom>
+          <a:solidFill>
+            <a:srgbClr val="FFFFFF"/>
+          </a:solidFill>
+          <a:ln>
+            <a:solidFill>
+              <a:srgbClr val="D6DCE4"/>
+            </a:solidFill>
+          </a:ln>
+          <a:effectLst/>
+        </p:spPr>
+        <p:style>
+          <a:lnRef idx="1">
+            <a:schemeClr val="accent1"/>
+          </a:lnRef>
+          <a:fillRef idx="3">
+            <a:schemeClr val="accent1"/>
+          </a:fillRef>
+          <a:effectRef idx="2">
+            <a:schemeClr val="accent1"/>
+          </a:effectRef>
+          <a:fontRef idx="minor">
+            <a:schemeClr val="lt1"/>
+          </a:fontRef>
+        </p:style>
+        <p:txBody>
+          <a:bodyPr rtlCol="0" anchor="ctr" wrap="square"/>
+          <a:lstStyle/>
+          <a:p>
+            <a:pPr algn="ctr"/>
+          </a:p>
+        </p:txBody>
+      </p:sp>
+      <p:sp>
+        <p:nvSpPr>
+          <p:cNvPr id="15" name="TextBox 14"/>
+          <p:cNvSpPr txBox="1"/>
+          <p:nvPr/>
+        </p:nvSpPr>
+        <p:spPr>
+          <a:xfrm>
+            <a:off x="530352" y="1517904"/>
+            <a:ext cx="5340096" cy="237744"/>
+          </a:xfrm>
+          <a:prstGeom prst="rect">
+            <a:avLst/>
+          </a:prstGeom>
+          <a:noFill/>
+        </p:spPr>
+        <p:txBody>
+          <a:bodyPr wrap="square">
+            <a:spAutoFit/>
+          </a:bodyPr>
+          <a:lstStyle/>
+          <a:p>
+            <a:r>
+              <a:rPr sz="950" b="1">
+                <a:solidFill>
+                  <a:srgbClr val="010328"/>
+                </a:solidFill>
+                <a:latin typeface="微软雅黑"/>
+              </a:rPr>
+              <a:t>① run.py 实跑终端输出（逐字捕获）</a:t>
+            </a:r>
+          </a:p>
+        </p:txBody>
+      </p:sp>
+      <p:pic>
+        <p:nvPicPr>
+          <p:cNvPr id="16" name="Picture 15" descr="shot_run.png"/>
+          <p:cNvPicPr>
+            <a:picLocks noChangeAspect="1"/>
+          </p:cNvPicPr>
+          <p:nvPr/>
+        </p:nvPicPr>
+        <p:blipFill>
+          <a:blip r:embed="rId2"/>
+          <a:stretch>
+            <a:fillRect/>
+          </a:stretch>
+        </p:blipFill>
+        <p:spPr>
+          <a:xfrm>
+            <a:off x="964038" y="1773936"/>
+            <a:ext cx="4472722" cy="1956816"/>
+          </a:xfrm>
+          <a:prstGeom prst="rect">
+            <a:avLst/>
+          </a:prstGeom>
+        </p:spPr>
+      </p:pic>
+      <p:sp>
+        <p:nvSpPr>
+          <p:cNvPr id="17" name="Rectangle 16"/>
+          <p:cNvSpPr/>
+          <p:nvPr/>
+        </p:nvSpPr>
+        <p:spPr>
+          <a:xfrm>
+            <a:off x="6327648" y="1481328"/>
+            <a:ext cx="5486400" cy="2304288"/>
+          </a:xfrm>
+          <a:prstGeom prst="rect">
+            <a:avLst/>
+          </a:prstGeom>
+          <a:solidFill>
+            <a:srgbClr val="FFFFFF"/>
+          </a:solidFill>
+          <a:ln>
+            <a:solidFill>
+              <a:srgbClr val="D6DCE4"/>
+            </a:solidFill>
+          </a:ln>
+          <a:effectLst/>
+        </p:spPr>
+        <p:style>
+          <a:lnRef idx="1">
+            <a:schemeClr val="accent1"/>
+          </a:lnRef>
+          <a:fillRef idx="3">
+            <a:schemeClr val="accent1"/>
+          </a:fillRef>
+          <a:effectRef idx="2">
+            <a:schemeClr val="accent1"/>
+          </a:effectRef>
+          <a:fontRef idx="minor">
+            <a:schemeClr val="lt1"/>
+          </a:fontRef>
+        </p:style>
+        <p:txBody>
+          <a:bodyPr rtlCol="0" anchor="ctr" wrap="square"/>
+          <a:lstStyle/>
+          <a:p>
+            <a:pPr algn="ctr"/>
+          </a:p>
+        </p:txBody>
+      </p:sp>
+      <p:sp>
+        <p:nvSpPr>
+          <p:cNvPr id="18" name="TextBox 17"/>
+          <p:cNvSpPr txBox="1"/>
+          <p:nvPr/>
+        </p:nvSpPr>
+        <p:spPr>
+          <a:xfrm>
+            <a:off x="6400800" y="1517904"/>
+            <a:ext cx="5340096" cy="237744"/>
+          </a:xfrm>
+          <a:prstGeom prst="rect">
+            <a:avLst/>
+          </a:prstGeom>
+          <a:noFill/>
+        </p:spPr>
+        <p:txBody>
+          <a:bodyPr wrap="square">
+            <a:spAutoFit/>
+          </a:bodyPr>
+          <a:lstStyle/>
+          <a:p>
+            <a:r>
+              <a:rPr sz="950" b="1">
+                <a:solidFill>
+                  <a:srgbClr val="010328"/>
+                </a:solidFill>
+                <a:latin typeface="微软雅黑"/>
+              </a:rPr>
+              <a:t>② pytest 全绿终端输出（逐字捕获）</a:t>
+            </a:r>
+          </a:p>
+        </p:txBody>
+      </p:sp>
+      <p:pic>
+        <p:nvPicPr>
+          <p:cNvPr id="19" name="Picture 18" descr="shot_test.png"/>
+          <p:cNvPicPr>
+            <a:picLocks noChangeAspect="1"/>
+          </p:cNvPicPr>
+          <p:nvPr/>
+        </p:nvPicPr>
+        <p:blipFill>
+          <a:blip r:embed="rId3"/>
+          <a:stretch>
+            <a:fillRect/>
+          </a:stretch>
+        </p:blipFill>
+        <p:spPr>
+          <a:xfrm>
+            <a:off x="6834486" y="1773936"/>
+            <a:ext cx="4472722" cy="1956816"/>
+          </a:xfrm>
+          <a:prstGeom prst="rect">
+            <a:avLst/>
+          </a:prstGeom>
+        </p:spPr>
+      </p:pic>
+      <p:sp>
+        <p:nvSpPr>
+          <p:cNvPr id="20" name="Rectangle 19"/>
+          <p:cNvSpPr/>
+          <p:nvPr/>
+        </p:nvSpPr>
+        <p:spPr>
+          <a:xfrm>
+            <a:off x="457200" y="3877056"/>
+            <a:ext cx="5486400" cy="2304288"/>
+          </a:xfrm>
+          <a:prstGeom prst="rect">
+            <a:avLst/>
+          </a:prstGeom>
+          <a:solidFill>
+            <a:srgbClr val="FFFFFF"/>
+          </a:solidFill>
+          <a:ln>
+            <a:solidFill>
+              <a:srgbClr val="D6DCE4"/>
+            </a:solidFill>
+          </a:ln>
+          <a:effectLst/>
+        </p:spPr>
+        <p:style>
+          <a:lnRef idx="1">
+            <a:schemeClr val="accent1"/>
+          </a:lnRef>
+          <a:fillRef idx="3">
+            <a:schemeClr val="accent1"/>
+          </a:fillRef>
+          <a:effectRef idx="2">
+            <a:schemeClr val="accent1"/>
+          </a:effectRef>
+          <a:fontRef idx="minor">
+            <a:schemeClr val="lt1"/>
+          </a:fontRef>
+        </p:style>
+        <p:txBody>
+          <a:bodyPr rtlCol="0" anchor="ctr" wrap="square"/>
+          <a:lstStyle/>
+          <a:p>
+            <a:pPr algn="ctr"/>
+          </a:p>
+        </p:txBody>
+      </p:sp>
+      <p:sp>
+        <p:nvSpPr>
+          <p:cNvPr id="21" name="TextBox 20"/>
+          <p:cNvSpPr txBox="1"/>
+          <p:nvPr/>
+        </p:nvSpPr>
+        <p:spPr>
+          <a:xfrm>
+            <a:off x="530352" y="3913632"/>
+            <a:ext cx="5340096" cy="237744"/>
+          </a:xfrm>
+          <a:prstGeom prst="rect">
+            <a:avLst/>
+          </a:prstGeom>
+          <a:noFill/>
+        </p:spPr>
+        <p:txBody>
+          <a:bodyPr wrap="square">
+            <a:spAutoFit/>
+          </a:bodyPr>
+          <a:lstStyle/>
+          <a:p>
+            <a:r>
+              <a:rPr sz="950" b="1">
+                <a:solidFill>
+                  <a:srgbClr val="010328"/>
+                </a:solidFill>
+                <a:latin typeface="微软雅黑"/>
+              </a:rPr>
+              <a:t>③ report.txt「验收档位判定（实测）」段</a:t>
+            </a:r>
+          </a:p>
+        </p:txBody>
+      </p:sp>
+      <p:pic>
+        <p:nvPicPr>
+          <p:cNvPr id="22" name="Picture 21" descr="shot_report.png"/>
+          <p:cNvPicPr>
+            <a:picLocks noChangeAspect="1"/>
+          </p:cNvPicPr>
+          <p:nvPr/>
+        </p:nvPicPr>
+        <p:blipFill>
+          <a:blip r:embed="rId4"/>
+          <a:stretch>
+            <a:fillRect/>
+          </a:stretch>
+        </p:blipFill>
+        <p:spPr>
+          <a:xfrm>
+            <a:off x="964038" y="4169664"/>
+            <a:ext cx="4472722" cy="1956816"/>
+          </a:xfrm>
+          <a:prstGeom prst="rect">
+            <a:avLst/>
+          </a:prstGeom>
+        </p:spPr>
+      </p:pic>
+      <p:sp>
+        <p:nvSpPr>
+          <p:cNvPr id="23" name="Rectangle 22"/>
+          <p:cNvSpPr/>
+          <p:nvPr/>
+        </p:nvSpPr>
+        <p:spPr>
+          <a:xfrm>
+            <a:off x="6327648" y="3877056"/>
+            <a:ext cx="5486400" cy="2304288"/>
+          </a:xfrm>
+          <a:prstGeom prst="rect">
+            <a:avLst/>
+          </a:prstGeom>
+          <a:solidFill>
+            <a:srgbClr val="F7F9FB"/>
+          </a:solidFill>
+          <a:ln>
+            <a:solidFill>
+              <a:srgbClr val="D6DCE4"/>
+            </a:solidFill>
+          </a:ln>
+          <a:effectLst/>
+        </p:spPr>
+        <p:style>
+          <a:lnRef idx="1">
+            <a:schemeClr val="accent1"/>
+          </a:lnRef>
+          <a:fillRef idx="3">
+            <a:schemeClr val="accent1"/>
+          </a:fillRef>
+          <a:effectRef idx="2">
+            <a:schemeClr val="accent1"/>
+          </a:effectRef>
+          <a:fontRef idx="minor">
+            <a:schemeClr val="lt1"/>
+          </a:fontRef>
+        </p:style>
+        <p:txBody>
+          <a:bodyPr rtlCol="0" anchor="ctr" wrap="square"/>
+          <a:lstStyle/>
+          <a:p>
+            <a:pPr algn="ctr"/>
+          </a:p>
+        </p:txBody>
+      </p:sp>
+      <p:sp>
+        <p:nvSpPr>
+          <p:cNvPr id="24" name="TextBox 23"/>
+          <p:cNvSpPr txBox="1"/>
+          <p:nvPr/>
+        </p:nvSpPr>
+        <p:spPr>
+          <a:xfrm>
+            <a:off x="6400800" y="3913632"/>
+            <a:ext cx="5340096" cy="237744"/>
+          </a:xfrm>
+          <a:prstGeom prst="rect">
+            <a:avLst/>
+          </a:prstGeom>
+          <a:noFill/>
+        </p:spPr>
+        <p:txBody>
+          <a:bodyPr wrap="square">
+            <a:spAutoFit/>
+          </a:bodyPr>
+          <a:lstStyle/>
+          <a:p>
+            <a:r>
+              <a:rPr sz="950" b="1">
+                <a:solidFill>
+                  <a:srgbClr val="010328"/>
+                </a:solidFill>
+                <a:latin typeface="微软雅黑"/>
+              </a:rPr>
+              <a:t>④ 采集口径（可复现）</a:t>
+            </a:r>
+          </a:p>
+        </p:txBody>
+      </p:sp>
+      <p:sp>
+        <p:nvSpPr>
+          <p:cNvPr id="25" name="TextBox 24"/>
+          <p:cNvSpPr txBox="1"/>
+          <p:nvPr/>
+        </p:nvSpPr>
+        <p:spPr>
+          <a:xfrm>
+            <a:off x="6437376" y="4187952"/>
+            <a:ext cx="5266944" cy="1920240"/>
+          </a:xfrm>
+          <a:prstGeom prst="rect">
+            <a:avLst/>
+          </a:prstGeom>
+          <a:noFill/>
+        </p:spPr>
+        <p:txBody>
+          <a:bodyPr wrap="square">
+            <a:spAutoFit/>
+          </a:bodyPr>
+          <a:lstStyle/>
+          <a:p>
+            <a:r>
+              <a:rPr sz="950" b="0">
+                <a:solidFill>
+                  <a:srgbClr val="2B2F36"/>
+                </a:solidFill>
+                <a:latin typeface="微软雅黑"/>
+              </a:rPr>
+              <a:t>项目：05-AI应用基础48课时版/工程化项目/m23b_bidding/</a:t>
+            </a:r>
+          </a:p>
+          <a:p>
+            <a:r>
+              <a:rPr sz="950" b="0">
+                <a:solidFill>
+                  <a:srgbClr val="2B2F36"/>
+                </a:solidFill>
+                <a:latin typeface="微软雅黑"/>
+              </a:rPr>
+              <a:t>命令：/opt/anaconda3/bin/python run.py ｜ /opt/anaconda3/bin/python -m pytest -q</a:t>
+            </a:r>
+          </a:p>
+          <a:p>
+            <a:r>
+              <a:rPr sz="950" b="0">
+                <a:solidFill>
+                  <a:srgbClr val="2B2F36"/>
+                </a:solidFill>
+                <a:latin typeface="微软雅黑"/>
+              </a:rPr>
+              <a:t>采集：工具/ppt97/capture97.py（2026-10-28 10:48 真跑逐字捕获输出）</a:t>
+            </a:r>
+          </a:p>
+          <a:p>
+            <a:r>
+              <a:rPr sz="950" b="0">
+                <a:solidFill>
+                  <a:srgbClr val="2B2F36"/>
+                </a:solidFill>
+                <a:latin typeface="微软雅黑"/>
+              </a:rPr>
+              <a:t>渲染：工具/ppt97/terminal_png.py（终端截图，不改写任何数字）</a:t>
+            </a:r>
+          </a:p>
+          <a:p>
+            <a:r>
+              <a:rPr sz="950" b="0">
+                <a:solidFill>
+                  <a:srgbClr val="2B2F36"/>
+                </a:solidFill>
+                <a:latin typeface="微软雅黑"/>
+              </a:rPr>
+              <a:t>退出码：run=0 ｜ pytest=0</a:t>
+            </a:r>
+          </a:p>
+          <a:p>
+            <a:r>
+              <a:rPr sz="950" b="0">
+                <a:solidFill>
+                  <a:srgbClr val="2B2F36"/>
+                </a:solidFill>
+                <a:latin typeface="微软雅黑"/>
+              </a:rPr>
+              <a:t>档位判定取自 output/report.txt「验收档位判定（实测）」段</a:t>
+            </a:r>
+          </a:p>
+        </p:txBody>
+      </p:sp>
+      <p:sp>
+        <p:nvSpPr>
+          <p:cNvPr id="26" name="TextBox 25"/>
+          <p:cNvSpPr txBox="1"/>
+          <p:nvPr/>
+        </p:nvSpPr>
+        <p:spPr>
+          <a:xfrm>
+            <a:off x="457200" y="6254496"/>
+            <a:ext cx="11247120" cy="201168"/>
+          </a:xfrm>
+          <a:prstGeom prst="rect">
+            <a:avLst/>
+          </a:prstGeom>
+          <a:noFill/>
+        </p:spPr>
+        <p:txBody>
+          <a:bodyPr wrap="square">
+            <a:spAutoFit/>
+          </a:bodyPr>
+          <a:lstStyle/>
+          <a:p>
+            <a:r>
+              <a:rPr sz="900" b="0">
+                <a:solidFill>
+                  <a:srgbClr val="7A8698"/>
+                </a:solidFill>
+                <a:latin typeface="微软雅黑"/>
+              </a:rPr>
+              <a:t>截图内容逐字取自 工具/ppt97/evidence/m23b_bidding/（capture97.py 真跑捕获，未改写数字）</a:t>
             </a:r>
           </a:p>
         </p:txBody>
@@ -8772,27 +9270,27 @@
                 </a:solidFill>
                 <a:latin typeface="微软雅黑"/>
               </a:rPr>
-              <a:t>下次课预告（第15周）</a:t>
-            </a:r>
-          </a:p>
-        </p:txBody>
-      </p:sp>
-      <p:sp>
-        <p:nvSpPr>
-          <p:cNvPr id="5" name="Rectangle 4"/>
+              <a:t>工单完成效果图 · 完成后长这样（真实运行 · 参考实现） · 课末对照</a:t>
+            </a:r>
+          </a:p>
+        </p:txBody>
+      </p:sp>
+      <p:sp>
+        <p:nvSpPr>
+          <p:cNvPr id="11" name="Rectangle 10"/>
           <p:cNvSpPr/>
           <p:nvPr/>
         </p:nvSpPr>
         <p:spPr>
           <a:xfrm>
-            <a:off x="760000" y="1900000"/>
-            <a:ext cx="10900000" cy="1600000"/>
+            <a:off x="500000" y="6500000"/>
+            <a:ext cx="11100000" cy="20000"/>
           </a:xfrm>
           <a:prstGeom prst="rect">
             <a:avLst/>
           </a:prstGeom>
           <a:solidFill>
-            <a:srgbClr val="F3F6FD"/>
+            <a:srgbClr val="C9D4EE"/>
           </a:solidFill>
           <a:ln>
             <a:noFill/>
@@ -8823,58 +9321,14 @@
       </p:sp>
       <p:sp>
         <p:nvSpPr>
-          <p:cNvPr id="6" name="Rectangle 5"/>
-          <p:cNvSpPr/>
-          <p:nvPr/>
-        </p:nvSpPr>
-        <p:spPr>
-          <a:xfrm>
-            <a:off x="760000" y="1900000"/>
-            <a:ext cx="150000" cy="1600000"/>
-          </a:xfrm>
-          <a:prstGeom prst="rect">
-            <a:avLst/>
-          </a:prstGeom>
-          <a:solidFill>
-            <a:srgbClr val="F5670F"/>
-          </a:solidFill>
-          <a:ln>
-            <a:noFill/>
-          </a:ln>
-          <a:effectLst/>
-        </p:spPr>
-        <p:style>
-          <a:lnRef idx="1">
-            <a:schemeClr val="accent1"/>
-          </a:lnRef>
-          <a:fillRef idx="3">
-            <a:schemeClr val="accent1"/>
-          </a:fillRef>
-          <a:effectRef idx="2">
-            <a:schemeClr val="accent1"/>
-          </a:effectRef>
-          <a:fontRef idx="minor">
-            <a:schemeClr val="lt1"/>
-          </a:fontRef>
-        </p:style>
-        <p:txBody>
-          <a:bodyPr rtlCol="0" anchor="ctr"/>
-          <a:lstStyle/>
-          <a:p>
-            <a:pPr algn="ctr"/>
-          </a:p>
-        </p:txBody>
-      </p:sp>
-      <p:sp>
-        <p:nvSpPr>
-          <p:cNvPr id="7" name="TextBox 6"/>
+          <p:cNvPr id="12" name="TextBox 11"/>
           <p:cNvSpPr txBox="1"/>
           <p:nvPr/>
         </p:nvSpPr>
         <p:spPr>
           <a:xfrm>
-            <a:off x="1020000" y="2050000"/>
-            <a:ext cx="10500000" cy="1400000"/>
+            <a:off x="500000" y="6540000"/>
+            <a:ext cx="7000000" cy="300000"/>
           </a:xfrm>
           <a:prstGeom prst="rect">
             <a:avLst/>
@@ -8896,17 +9350,40 @@
               </a:spcAft>
             </a:pPr>
             <a:r>
-              <a:rPr sz="1700" b="1">
-                <a:solidFill>
-                  <a:srgbClr val="010328"/>
-                </a:solidFill>
-                <a:latin typeface="微软雅黑"/>
-              </a:rPr>
-              <a:t>主题: 能加载预训练ResNet并替换分类头——应用：见</a:t>
-            </a:r>
-          </a:p>
-          <a:p>
-            <a:pPr algn="l">
+              <a:rPr sz="1000" b="0">
+                <a:solidFill>
+                  <a:srgbClr val="8A97B5"/>
+                </a:solidFill>
+                <a:latin typeface="微软雅黑"/>
+              </a:rPr>
+              <a:t>两江智造集团 · AI应用基础48课时版</a:t>
+            </a:r>
+          </a:p>
+        </p:txBody>
+      </p:sp>
+      <p:sp>
+        <p:nvSpPr>
+          <p:cNvPr id="13" name="TextBox 12"/>
+          <p:cNvSpPr txBox="1"/>
+          <p:nvPr/>
+        </p:nvSpPr>
+        <p:spPr>
+          <a:xfrm>
+            <a:off x="10600000" y="6540000"/>
+            <a:ext cx="1000000" cy="300000"/>
+          </a:xfrm>
+          <a:prstGeom prst="rect">
+            <a:avLst/>
+          </a:prstGeom>
+          <a:noFill/>
+        </p:spPr>
+        <p:txBody>
+          <a:bodyPr wrap="square" anchor="t">
+            <a:spAutoFit/>
+          </a:bodyPr>
+          <a:lstStyle/>
+          <a:p>
+            <a:pPr algn="r">
               <a:lnSpc>
                 <a:spcPct val="110000"/>
               </a:lnSpc>
@@ -8915,27 +9392,165 @@
               </a:spcAft>
             </a:pPr>
             <a:r>
-              <a:rPr sz="1300" b="0">
-                <a:solidFill>
-                  <a:srgbClr val="44546A"/>
-                </a:solidFill>
-                <a:latin typeface="微软雅黑"/>
-              </a:rPr>
-              <a:t>预习快问: 课中查①：'Conv输入报维度'这个报错怎么排查？</a:t>
-            </a:r>
-          </a:p>
-        </p:txBody>
-      </p:sp>
-      <p:sp>
-        <p:nvSpPr>
-          <p:cNvPr id="8" name="TextBox 7"/>
+              <a:rPr sz="1000" b="0">
+                <a:solidFill>
+                  <a:srgbClr val="8A97B5"/>
+                </a:solidFill>
+                <a:latin typeface="微软雅黑"/>
+              </a:rPr>
+              <a:t>16 / 20</a:t>
+            </a:r>
+          </a:p>
+        </p:txBody>
+      </p:sp>
+      <p:sp>
+        <p:nvSpPr>
+          <p:cNvPr id="14" name="Rounded Rectangle 13"/>
+          <p:cNvSpPr/>
+          <p:nvPr/>
+        </p:nvSpPr>
+        <p:spPr>
+          <a:xfrm>
+            <a:off x="758952" y="1801368"/>
+            <a:ext cx="10899648" cy="2286000"/>
+          </a:xfrm>
+          <a:prstGeom prst="roundRect">
+            <a:avLst>
+              <a:gd name="adj" fmla="val 6000"/>
+            </a:avLst>
+          </a:prstGeom>
+          <a:solidFill>
+            <a:srgbClr val="F3F6FD"/>
+          </a:solidFill>
+          <a:ln w="9525">
+            <a:solidFill>
+              <a:srgbClr val="C9D4EE"/>
+            </a:solidFill>
+          </a:ln>
+          <a:effectLst/>
+        </p:spPr>
+        <p:style>
+          <a:lnRef idx="1">
+            <a:schemeClr val="accent1"/>
+          </a:lnRef>
+          <a:fillRef idx="3">
+            <a:schemeClr val="accent1"/>
+          </a:fillRef>
+          <a:effectRef idx="2">
+            <a:schemeClr val="accent1"/>
+          </a:effectRef>
+          <a:fontRef idx="minor">
+            <a:schemeClr val="lt1"/>
+          </a:fontRef>
+        </p:style>
+        <p:txBody>
+          <a:bodyPr rtlCol="0" anchor="ctr"/>
+          <a:lstStyle/>
+          <a:p/>
+        </p:txBody>
+      </p:sp>
+      <p:sp>
+        <p:nvSpPr>
+          <p:cNvPr id="15" name="Rounded Rectangle 14"/>
+          <p:cNvSpPr/>
+          <p:nvPr/>
+        </p:nvSpPr>
+        <p:spPr>
+          <a:xfrm>
+            <a:off x="758952" y="4178808"/>
+            <a:ext cx="10899648" cy="1051560"/>
+          </a:xfrm>
+          <a:prstGeom prst="roundRect">
+            <a:avLst>
+              <a:gd name="adj" fmla="val 6000"/>
+            </a:avLst>
+          </a:prstGeom>
+          <a:solidFill>
+            <a:srgbClr val="FFFFFF"/>
+          </a:solidFill>
+          <a:ln w="9525">
+            <a:solidFill>
+              <a:srgbClr val="C9D4EE"/>
+            </a:solidFill>
+          </a:ln>
+          <a:effectLst/>
+        </p:spPr>
+        <p:style>
+          <a:lnRef idx="1">
+            <a:schemeClr val="accent1"/>
+          </a:lnRef>
+          <a:fillRef idx="3">
+            <a:schemeClr val="accent1"/>
+          </a:fillRef>
+          <a:effectRef idx="2">
+            <a:schemeClr val="accent1"/>
+          </a:effectRef>
+          <a:fontRef idx="minor">
+            <a:schemeClr val="lt1"/>
+          </a:fontRef>
+        </p:style>
+        <p:txBody>
+          <a:bodyPr rtlCol="0" anchor="ctr"/>
+          <a:lstStyle/>
+          <a:p/>
+        </p:txBody>
+      </p:sp>
+      <p:sp>
+        <p:nvSpPr>
+          <p:cNvPr id="16" name="Rounded Rectangle 15"/>
+          <p:cNvSpPr/>
+          <p:nvPr/>
+        </p:nvSpPr>
+        <p:spPr>
+          <a:xfrm>
+            <a:off x="758952" y="5321808"/>
+            <a:ext cx="10899648" cy="1005840"/>
+          </a:xfrm>
+          <a:prstGeom prst="roundRect">
+            <a:avLst>
+              <a:gd name="adj" fmla="val 6000"/>
+            </a:avLst>
+          </a:prstGeom>
+          <a:solidFill>
+            <a:srgbClr val="FFFFFF"/>
+          </a:solidFill>
+          <a:ln w="9525">
+            <a:solidFill>
+              <a:srgbClr val="C9D4EE"/>
+            </a:solidFill>
+          </a:ln>
+          <a:effectLst/>
+        </p:spPr>
+        <p:style>
+          <a:lnRef idx="1">
+            <a:schemeClr val="accent1"/>
+          </a:lnRef>
+          <a:fillRef idx="3">
+            <a:schemeClr val="accent1"/>
+          </a:fillRef>
+          <a:effectRef idx="2">
+            <a:schemeClr val="accent1"/>
+          </a:effectRef>
+          <a:fontRef idx="minor">
+            <a:schemeClr val="lt1"/>
+          </a:fontRef>
+        </p:style>
+        <p:txBody>
+          <a:bodyPr rtlCol="0" anchor="ctr"/>
+          <a:lstStyle/>
+          <a:p/>
+        </p:txBody>
+      </p:sp>
+      <p:sp>
+        <p:nvSpPr>
+          <p:cNvPr id="17" name="TextBox 16"/>
           <p:cNvSpPr txBox="1"/>
           <p:nvPr/>
         </p:nvSpPr>
         <p:spPr>
           <a:xfrm>
-            <a:off x="760000" y="3900000"/>
-            <a:ext cx="10900000" cy="900000"/>
+            <a:off x="960120" y="1929384"/>
+            <a:ext cx="10469880" cy="2048256"/>
           </a:xfrm>
           <a:prstGeom prst="rect">
             <a:avLst/>
@@ -8943,46 +9558,192 @@
           <a:noFill/>
         </p:spPr>
         <p:txBody>
-          <a:bodyPr wrap="square" anchor="t">
+          <a:bodyPr wrap="square" anchor="t" lIns="0" rIns="0" tIns="0" bIns="0">
             <a:spAutoFit/>
           </a:bodyPr>
           <a:lstStyle/>
           <a:p>
+            <a:pPr algn="l"/>
+            <a:r>
+              <a:rPr sz="1400" b="1">
+                <a:solidFill>
+                  <a:srgbClr val="0545E8"/>
+                </a:solidFill>
+              </a:rPr>
+              <a:t>① 参考实现真实运行输出（本工单完成态）</a:t>
+            </a:r>
+          </a:p>
+          <a:p>
             <a:pPr algn="l">
-              <a:lnSpc>
-                <a:spcPct val="110000"/>
-              </a:lnSpc>
-              <a:spcAft>
-                <a:spcPts val="600"/>
-              </a:spcAft>
+              <a:spcBef>
+                <a:spcPts val="100"/>
+              </a:spcBef>
             </a:pPr>
             <a:r>
-              <a:rPr sz="1400" b="1">
+              <a:rPr sz="1000" b="0">
+                <a:solidFill>
+                  <a:srgbClr val="010328"/>
+                </a:solidFill>
+              </a:rPr>
+              <a:t>=== 工单 M2-3b 竞标：CNN焊缝 vs LSTM风机（轻量基线）· 完成态 ===</a:t>
+            </a:r>
+          </a:p>
+          <a:p>
+            <a:pPr algn="l">
+              <a:spcBef>
+                <a:spcPts val="100"/>
+              </a:spcBef>
+            </a:pPr>
+            <a:r>
+              <a:rPr sz="1000" b="0">
+                <a:solidFill>
+                  <a:srgbClr val="010328"/>
+                </a:solidFill>
+              </a:rPr>
+              <a:t>图像线（CNN焊缝·块统计特征3维）: 3折交叉验证 cv = 1.000</a:t>
+            </a:r>
+          </a:p>
+          <a:p>
+            <a:pPr algn="l">
+              <a:spcBef>
+                <a:spcPts val="100"/>
+              </a:spcBef>
+            </a:pPr>
+            <a:r>
+              <a:rPr sz="1000" b="0">
+                <a:solidFill>
+                  <a:srgbClr val="010328"/>
+                </a:solidFill>
+              </a:rPr>
+              <a:t>时序线（LSTM风机·RMS比值1维）  : 3折交叉验证 cv = 0.995</a:t>
+            </a:r>
+          </a:p>
+          <a:p>
+            <a:pPr algn="l">
+              <a:spcBef>
+                <a:spcPts val="100"/>
+              </a:spcBef>
+            </a:pPr>
+            <a:r>
+              <a:rPr sz="1000" b="0">
+                <a:solidFill>
+                  <a:srgbClr val="010328"/>
+                </a:solidFill>
+              </a:rPr>
+              <a:t>竞标建议: 轻量基线支持选「CNN焊缝」（差 0.005）</a:t>
+            </a:r>
+          </a:p>
+          <a:p>
+            <a:pPr algn="l">
+              <a:spcBef>
+                <a:spcPts val="100"/>
+              </a:spcBef>
+            </a:pPr>
+            <a:r>
+              <a:rPr sz="1000" b="0">
+                <a:solidFill>
+                  <a:srgbClr val="010328"/>
+                </a:solidFill>
+              </a:rPr>
+              <a:t>答辩要点: 基线≠上限——本表只证明'哪条路线更容易起步'；真模型预期增益需说明数据量、算力与标注成本三项证据。</a:t>
+            </a:r>
+          </a:p>
+        </p:txBody>
+      </p:sp>
+      <p:sp>
+        <p:nvSpPr>
+          <p:cNvPr id="18" name="TextBox 17"/>
+          <p:cNvSpPr txBox="1"/>
+          <p:nvPr/>
+        </p:nvSpPr>
+        <p:spPr>
+          <a:xfrm>
+            <a:off x="960120" y="4297680"/>
+            <a:ext cx="10469880" cy="868680"/>
+          </a:xfrm>
+          <a:prstGeom prst="rect">
+            <a:avLst/>
+          </a:prstGeom>
+          <a:noFill/>
+        </p:spPr>
+        <p:txBody>
+          <a:bodyPr wrap="square" anchor="t" lIns="0" rIns="0" tIns="0" bIns="0">
+            <a:spAutoFit/>
+          </a:bodyPr>
+          <a:lstStyle/>
+          <a:p>
+            <a:pPr algn="l"/>
+            <a:r>
+              <a:rPr sz="1300" b="1">
                 <a:solidFill>
                   <a:srgbClr val="0545E8"/>
                 </a:solidFill>
-                <a:latin typeface="微软雅黑"/>
-              </a:rPr>
-              <a:t>课前完成：导学单 + 预习自测 + starter环境自检</a:t>
+              </a:rPr>
+              <a:t>② 关键自检点（对照工单逐项核对）</a:t>
             </a:r>
           </a:p>
           <a:p>
             <a:pPr algn="l">
-              <a:lnSpc>
-                <a:spcPct val="110000"/>
-              </a:lnSpc>
-              <a:spcAft>
-                <a:spcPts val="600"/>
-              </a:spcAft>
+              <a:spcBef>
+                <a:spcPts val="200"/>
+              </a:spcBef>
             </a:pPr>
             <a:r>
-              <a:rPr sz="1250" b="0">
-                <a:solidFill>
-                  <a:srgbClr val="44546A"/>
-                </a:solidFill>
-                <a:latin typeface="微软雅黑"/>
-              </a:rPr>
-              <a:t>带着问题来上课——Predict先于Run</a:t>
+              <a:rPr sz="1150" b="0">
+                <a:solidFill>
+                  <a:srgbClr val="010328"/>
+                </a:solidFill>
+              </a:rPr>
+              <a:t>□ 代码从头跑到尾不报错　□ 指标与工单及格线逐项对齐　□ 随机种子已固定（可复现）</a:t>
+            </a:r>
+          </a:p>
+        </p:txBody>
+      </p:sp>
+      <p:sp>
+        <p:nvSpPr>
+          <p:cNvPr id="19" name="TextBox 18"/>
+          <p:cNvSpPr txBox="1"/>
+          <p:nvPr/>
+        </p:nvSpPr>
+        <p:spPr>
+          <a:xfrm>
+            <a:off x="960120" y="5431536"/>
+            <a:ext cx="10469880" cy="841248"/>
+          </a:xfrm>
+          <a:prstGeom prst="rect">
+            <a:avLst/>
+          </a:prstGeom>
+          <a:noFill/>
+        </p:spPr>
+        <p:txBody>
+          <a:bodyPr wrap="square" anchor="t" lIns="0" rIns="0" tIns="0" bIns="0">
+            <a:spAutoFit/>
+          </a:bodyPr>
+          <a:lstStyle/>
+          <a:p>
+            <a:pPr algn="l"/>
+            <a:r>
+              <a:rPr sz="1300" b="1">
+                <a:solidFill>
+                  <a:srgbClr val="F5670F"/>
+                </a:solidFill>
+              </a:rPr>
+              <a:t>③ 提交与达标（过程性证据）</a:t>
+            </a:r>
+          </a:p>
+          <a:p>
+            <a:pPr algn="l">
+              <a:spcBef>
+                <a:spcPts val="200"/>
+              </a:spcBef>
+            </a:pPr>
+            <a:r>
+              <a:rPr sz="1100" b="0">
+                <a:solidFill>
+                  <a:srgbClr val="010328"/>
+                </a:solidFill>
+              </a:rPr>
+              <a:t>达标线 D≥60 / C≥70 / B≥80 / A≥90　｜　提交 学号_姓名_工单号 + 运行截图 + 决策记录 + Git≥1次commit</a:t>
             </a:r>
           </a:p>
         </p:txBody>
@@ -9007,14 +9768,102 @@
       <p:grpSpPr/>
       <p:sp>
         <p:nvSpPr>
-          <p:cNvPr id="2" name="TextBox 1"/>
+          <p:cNvPr id="2" name="Rectangle 1"/>
+          <p:cNvSpPr/>
+          <p:nvPr/>
+        </p:nvSpPr>
+        <p:spPr>
+          <a:xfrm>
+            <a:off x="0" y="0"/>
+            <a:ext cx="12192000" cy="6858000"/>
+          </a:xfrm>
+          <a:prstGeom prst="rect">
+            <a:avLst/>
+          </a:prstGeom>
+          <a:solidFill>
+            <a:srgbClr val="010328"/>
+          </a:solidFill>
+          <a:ln>
+            <a:noFill/>
+          </a:ln>
+          <a:effectLst/>
+        </p:spPr>
+        <p:style>
+          <a:lnRef idx="1">
+            <a:schemeClr val="accent1"/>
+          </a:lnRef>
+          <a:fillRef idx="3">
+            <a:schemeClr val="accent1"/>
+          </a:fillRef>
+          <a:effectRef idx="2">
+            <a:schemeClr val="accent1"/>
+          </a:effectRef>
+          <a:fontRef idx="minor">
+            <a:schemeClr val="lt1"/>
+          </a:fontRef>
+        </p:style>
+        <p:txBody>
+          <a:bodyPr rtlCol="0" anchor="ctr"/>
+          <a:lstStyle/>
+          <a:p>
+            <a:pPr algn="ctr"/>
+          </a:p>
+        </p:txBody>
+      </p:sp>
+      <p:sp>
+        <p:nvSpPr>
+          <p:cNvPr id="3" name="Rectangle 2"/>
+          <p:cNvSpPr/>
+          <p:nvPr/>
+        </p:nvSpPr>
+        <p:spPr>
+          <a:xfrm>
+            <a:off x="0" y="2880360"/>
+            <a:ext cx="12192000" cy="50000"/>
+          </a:xfrm>
+          <a:prstGeom prst="rect">
+            <a:avLst/>
+          </a:prstGeom>
+          <a:solidFill>
+            <a:srgbClr val="F5670F"/>
+          </a:solidFill>
+          <a:ln>
+            <a:noFill/>
+          </a:ln>
+          <a:effectLst/>
+        </p:spPr>
+        <p:style>
+          <a:lnRef idx="1">
+            <a:schemeClr val="accent1"/>
+          </a:lnRef>
+          <a:fillRef idx="3">
+            <a:schemeClr val="accent1"/>
+          </a:fillRef>
+          <a:effectRef idx="2">
+            <a:schemeClr val="accent1"/>
+          </a:effectRef>
+          <a:fontRef idx="minor">
+            <a:schemeClr val="lt1"/>
+          </a:fontRef>
+        </p:style>
+        <p:txBody>
+          <a:bodyPr rtlCol="0" anchor="ctr"/>
+          <a:lstStyle/>
+          <a:p>
+            <a:pPr algn="ctr"/>
+          </a:p>
+        </p:txBody>
+      </p:sp>
+      <p:sp>
+        <p:nvSpPr>
+          <p:cNvPr id="4" name="TextBox 3"/>
           <p:cNvSpPr txBox="1"/>
           <p:nvPr/>
         </p:nvSpPr>
         <p:spPr>
           <a:xfrm>
-            <a:off x="548640" y="320040"/>
-            <a:ext cx="11094720" cy="914400"/>
+            <a:off x="0" y="1645920"/>
+            <a:ext cx="12192000" cy="1500000"/>
           </a:xfrm>
           <a:prstGeom prst="rect">
             <a:avLst/>
@@ -9022,28 +9871,41 @@
           <a:noFill/>
         </p:spPr>
         <p:txBody>
-          <a:bodyPr wrap="none">
+          <a:bodyPr wrap="square" anchor="t">
             <a:spAutoFit/>
           </a:bodyPr>
           <a:lstStyle/>
           <a:p>
-            <a:r>
-              <a:rPr sz="3000" b="1"/>
-              <a:t>本任务六步法导航</a:t>
-            </a:r>
-          </a:p>
-        </p:txBody>
-      </p:sp>
-      <p:sp>
-        <p:nvSpPr>
-          <p:cNvPr id="3" name="TextBox 2"/>
+            <a:pPr algn="ctr">
+              <a:lnSpc>
+                <a:spcPct val="110000"/>
+              </a:lnSpc>
+              <a:spcAft>
+                <a:spcPts val="600"/>
+              </a:spcAft>
+            </a:pPr>
+            <a:r>
+              <a:rPr sz="5400" b="1">
+                <a:solidFill>
+                  <a:srgbClr val="FFFFFF"/>
+                </a:solidFill>
+                <a:latin typeface="微软雅黑"/>
+              </a:rPr>
+              <a:t>THANKS</a:t>
+            </a:r>
+          </a:p>
+        </p:txBody>
+      </p:sp>
+      <p:sp>
+        <p:nvSpPr>
+          <p:cNvPr id="5" name="TextBox 4"/>
           <p:cNvSpPr txBox="1"/>
           <p:nvPr/>
         </p:nvSpPr>
         <p:spPr>
           <a:xfrm>
-            <a:off x="731520" y="1371600"/>
-            <a:ext cx="10728960" cy="4663440"/>
+            <a:off x="0" y="3429000"/>
+            <a:ext cx="12192000" cy="800000"/>
           </a:xfrm>
           <a:prstGeom prst="rect">
             <a:avLst/>
@@ -9051,52 +9913,197 @@
           <a:noFill/>
         </p:spPr>
         <p:txBody>
-          <a:bodyPr wrap="square">
+          <a:bodyPr wrap="square" anchor="t">
             <a:spAutoFit/>
           </a:bodyPr>
           <a:lstStyle/>
           <a:p>
-            <a:pPr>
+            <a:pPr algn="ctr">
+              <a:lnSpc>
+                <a:spcPct val="110000"/>
+              </a:lnSpc>
               <a:spcAft>
-                <a:spcPts val="1000"/>
+                <a:spcPts val="600"/>
               </a:spcAft>
             </a:pPr>
             <a:r>
-              <a:rPr sz="1800"/>
-              <a:t>六步法：资讯 → 计划 → 决策 → 实施 → 检查 → 评估</a:t>
-            </a:r>
-          </a:p>
-          <a:p>
-            <a:pPr>
+              <a:rPr sz="2200" b="1">
+                <a:solidFill>
+                  <a:srgbClr val="F5670F"/>
+                </a:solidFill>
+                <a:latin typeface="微软雅黑"/>
+              </a:rPr>
+              <a:t>感谢聆听 · 动手实践出真知</a:t>
+            </a:r>
+          </a:p>
+        </p:txBody>
+      </p:sp>
+      <p:sp>
+        <p:nvSpPr>
+          <p:cNvPr id="6" name="TextBox 5"/>
+          <p:cNvSpPr txBox="1"/>
+          <p:nvPr/>
+        </p:nvSpPr>
+        <p:spPr>
+          <a:xfrm>
+            <a:off x="0" y="4526280"/>
+            <a:ext cx="12192000" cy="600000"/>
+          </a:xfrm>
+          <a:prstGeom prst="rect">
+            <a:avLst/>
+          </a:prstGeom>
+          <a:noFill/>
+        </p:spPr>
+        <p:txBody>
+          <a:bodyPr wrap="square" anchor="t">
+            <a:spAutoFit/>
+          </a:bodyPr>
+          <a:lstStyle/>
+          <a:p>
+            <a:pPr algn="ctr">
+              <a:lnSpc>
+                <a:spcPct val="110000"/>
+              </a:lnSpc>
               <a:spcAft>
-                <a:spcPts val="1000"/>
+                <a:spcPts val="600"/>
               </a:spcAft>
             </a:pPr>
             <a:r>
-              <a:rPr sz="1800"/>
-              <a:t>本讲对应工单：《AI应用基础48课时版》分层任务工单</a:t>
-            </a:r>
-          </a:p>
-          <a:p>
-            <a:pPr>
+              <a:rPr sz="1400" b="0">
+                <a:solidFill>
+                  <a:srgbClr val="BBC6E6"/>
+                </a:solidFill>
+                <a:latin typeface="微软雅黑"/>
+              </a:rPr>
+              <a:t>以生为本   |   做中学 · 学中做</a:t>
+            </a:r>
+          </a:p>
+        </p:txBody>
+      </p:sp>
+      <p:sp>
+        <p:nvSpPr>
+          <p:cNvPr id="7" name="Rectangle 6"/>
+          <p:cNvSpPr/>
+          <p:nvPr/>
+        </p:nvSpPr>
+        <p:spPr>
+          <a:xfrm>
+            <a:off x="500000" y="6500000"/>
+            <a:ext cx="11100000" cy="20000"/>
+          </a:xfrm>
+          <a:prstGeom prst="rect">
+            <a:avLst/>
+          </a:prstGeom>
+          <a:solidFill>
+            <a:srgbClr val="C9D4EE"/>
+          </a:solidFill>
+          <a:ln>
+            <a:noFill/>
+          </a:ln>
+          <a:effectLst/>
+        </p:spPr>
+        <p:style>
+          <a:lnRef idx="1">
+            <a:schemeClr val="accent1"/>
+          </a:lnRef>
+          <a:fillRef idx="3">
+            <a:schemeClr val="accent1"/>
+          </a:fillRef>
+          <a:effectRef idx="2">
+            <a:schemeClr val="accent1"/>
+          </a:effectRef>
+          <a:fontRef idx="minor">
+            <a:schemeClr val="lt1"/>
+          </a:fontRef>
+        </p:style>
+        <p:txBody>
+          <a:bodyPr rtlCol="0" anchor="ctr"/>
+          <a:lstStyle/>
+          <a:p>
+            <a:pPr algn="ctr"/>
+          </a:p>
+        </p:txBody>
+      </p:sp>
+      <p:sp>
+        <p:nvSpPr>
+          <p:cNvPr id="8" name="TextBox 7"/>
+          <p:cNvSpPr txBox="1"/>
+          <p:nvPr/>
+        </p:nvSpPr>
+        <p:spPr>
+          <a:xfrm>
+            <a:off x="500000" y="6540000"/>
+            <a:ext cx="7000000" cy="300000"/>
+          </a:xfrm>
+          <a:prstGeom prst="rect">
+            <a:avLst/>
+          </a:prstGeom>
+          <a:noFill/>
+        </p:spPr>
+        <p:txBody>
+          <a:bodyPr wrap="square" anchor="t">
+            <a:spAutoFit/>
+          </a:bodyPr>
+          <a:lstStyle/>
+          <a:p>
+            <a:pPr algn="l">
+              <a:lnSpc>
+                <a:spcPct val="110000"/>
+              </a:lnSpc>
               <a:spcAft>
-                <a:spcPts val="1000"/>
+                <a:spcPts val="600"/>
               </a:spcAft>
             </a:pPr>
             <a:r>
-              <a:rPr sz="1800"/>
-              <a:t>课堂产出：工单第六节实施记录须当堂填写，含操作前安全打勾与学生本人签字。</a:t>
-            </a:r>
-          </a:p>
-          <a:p>
-            <a:pPr>
+              <a:rPr sz="1000" b="0">
+                <a:solidFill>
+                  <a:srgbClr val="8A97B5"/>
+                </a:solidFill>
+                <a:latin typeface="微软雅黑"/>
+              </a:rPr>
+              <a:t>两江智造集团 · AI应用基础48课时版</a:t>
+            </a:r>
+          </a:p>
+        </p:txBody>
+      </p:sp>
+      <p:sp>
+        <p:nvSpPr>
+          <p:cNvPr id="9" name="TextBox 8"/>
+          <p:cNvSpPr txBox="1"/>
+          <p:nvPr/>
+        </p:nvSpPr>
+        <p:spPr>
+          <a:xfrm>
+            <a:off x="10600000" y="6540000"/>
+            <a:ext cx="1000000" cy="300000"/>
+          </a:xfrm>
+          <a:prstGeom prst="rect">
+            <a:avLst/>
+          </a:prstGeom>
+          <a:noFill/>
+        </p:spPr>
+        <p:txBody>
+          <a:bodyPr wrap="square" anchor="ctr">
+            <a:spAutoFit/>
+          </a:bodyPr>
+          <a:lstStyle/>
+          <a:p>
+            <a:pPr algn="r">
+              <a:lnSpc>
+                <a:spcPct val="110000"/>
+              </a:lnSpc>
               <a:spcAft>
-                <a:spcPts val="1000"/>
+                <a:spcPts val="600"/>
               </a:spcAft>
             </a:pPr>
             <a:r>
-              <a:rPr sz="1800"/>
-              <a:t>课后交付：班组长／操作员／教师三方联签后交回，缺签视为未交付。</a:t>
+              <a:rPr sz="1000" b="0">
+                <a:solidFill>
+                  <a:srgbClr val="8A97B5"/>
+                </a:solidFill>
+                <a:latin typeface="微软雅黑"/>
+              </a:rPr>
+              <a:t>17 / 20</a:t>
             </a:r>
           </a:p>
         </p:txBody>
@@ -9121,6 +10128,364 @@
       <p:grpSpPr/>
       <p:sp>
         <p:nvSpPr>
+          <p:cNvPr id="2" name="Rectangle 1"/>
+          <p:cNvSpPr/>
+          <p:nvPr/>
+        </p:nvSpPr>
+        <p:spPr>
+          <a:xfrm>
+            <a:off x="0" y="0"/>
+            <a:ext cx="12192000" cy="1150000"/>
+          </a:xfrm>
+          <a:prstGeom prst="rect">
+            <a:avLst/>
+          </a:prstGeom>
+          <a:solidFill>
+            <a:srgbClr val="010328"/>
+          </a:solidFill>
+          <a:ln>
+            <a:noFill/>
+          </a:ln>
+          <a:effectLst/>
+        </p:spPr>
+        <p:style>
+          <a:lnRef idx="1">
+            <a:schemeClr val="accent1"/>
+          </a:lnRef>
+          <a:fillRef idx="3">
+            <a:schemeClr val="accent1"/>
+          </a:fillRef>
+          <a:effectRef idx="2">
+            <a:schemeClr val="accent1"/>
+          </a:effectRef>
+          <a:fontRef idx="minor">
+            <a:schemeClr val="lt1"/>
+          </a:fontRef>
+        </p:style>
+        <p:txBody>
+          <a:bodyPr rtlCol="0" anchor="ctr"/>
+          <a:lstStyle/>
+          <a:p>
+            <a:pPr algn="ctr"/>
+          </a:p>
+        </p:txBody>
+      </p:sp>
+      <p:sp>
+        <p:nvSpPr>
+          <p:cNvPr id="3" name="Rectangle 2"/>
+          <p:cNvSpPr/>
+          <p:nvPr/>
+        </p:nvSpPr>
+        <p:spPr>
+          <a:xfrm>
+            <a:off x="0" y="1150000"/>
+            <a:ext cx="2600000" cy="70000"/>
+          </a:xfrm>
+          <a:prstGeom prst="rect">
+            <a:avLst/>
+          </a:prstGeom>
+          <a:solidFill>
+            <a:srgbClr val="F5670F"/>
+          </a:solidFill>
+          <a:ln>
+            <a:noFill/>
+          </a:ln>
+          <a:effectLst/>
+        </p:spPr>
+        <p:style>
+          <a:lnRef idx="1">
+            <a:schemeClr val="accent1"/>
+          </a:lnRef>
+          <a:fillRef idx="3">
+            <a:schemeClr val="accent1"/>
+          </a:fillRef>
+          <a:effectRef idx="2">
+            <a:schemeClr val="accent1"/>
+          </a:effectRef>
+          <a:fontRef idx="minor">
+            <a:schemeClr val="lt1"/>
+          </a:fontRef>
+        </p:style>
+        <p:txBody>
+          <a:bodyPr rtlCol="0" anchor="ctr"/>
+          <a:lstStyle/>
+          <a:p>
+            <a:pPr algn="ctr"/>
+          </a:p>
+        </p:txBody>
+      </p:sp>
+      <p:sp>
+        <p:nvSpPr>
+          <p:cNvPr id="4" name="TextBox 3"/>
+          <p:cNvSpPr txBox="1"/>
+          <p:nvPr/>
+        </p:nvSpPr>
+        <p:spPr>
+          <a:xfrm>
+            <a:off x="700000" y="300000"/>
+            <a:ext cx="10792000" cy="700000"/>
+          </a:xfrm>
+          <a:prstGeom prst="rect">
+            <a:avLst/>
+          </a:prstGeom>
+          <a:noFill/>
+        </p:spPr>
+        <p:txBody>
+          <a:bodyPr wrap="square" anchor="t">
+            <a:spAutoFit/>
+          </a:bodyPr>
+          <a:lstStyle/>
+          <a:p>
+            <a:pPr algn="l">
+              <a:lnSpc>
+                <a:spcPct val="110000"/>
+              </a:lnSpc>
+              <a:spcAft>
+                <a:spcPts val="600"/>
+              </a:spcAft>
+            </a:pPr>
+            <a:r>
+              <a:rPr sz="2400" b="1">
+                <a:solidFill>
+                  <a:srgbClr val="FFFFFF"/>
+                </a:solidFill>
+                <a:latin typeface="微软雅黑"/>
+              </a:rPr>
+              <a:t>下次课预告（第15周）</a:t>
+            </a:r>
+          </a:p>
+        </p:txBody>
+      </p:sp>
+      <p:sp>
+        <p:nvSpPr>
+          <p:cNvPr id="5" name="Rectangle 4"/>
+          <p:cNvSpPr/>
+          <p:nvPr/>
+        </p:nvSpPr>
+        <p:spPr>
+          <a:xfrm>
+            <a:off x="760000" y="1900000"/>
+            <a:ext cx="10900000" cy="1600000"/>
+          </a:xfrm>
+          <a:prstGeom prst="rect">
+            <a:avLst/>
+          </a:prstGeom>
+          <a:solidFill>
+            <a:srgbClr val="F3F6FD"/>
+          </a:solidFill>
+          <a:ln>
+            <a:noFill/>
+          </a:ln>
+          <a:effectLst/>
+        </p:spPr>
+        <p:style>
+          <a:lnRef idx="1">
+            <a:schemeClr val="accent1"/>
+          </a:lnRef>
+          <a:fillRef idx="3">
+            <a:schemeClr val="accent1"/>
+          </a:fillRef>
+          <a:effectRef idx="2">
+            <a:schemeClr val="accent1"/>
+          </a:effectRef>
+          <a:fontRef idx="minor">
+            <a:schemeClr val="lt1"/>
+          </a:fontRef>
+        </p:style>
+        <p:txBody>
+          <a:bodyPr rtlCol="0" anchor="ctr"/>
+          <a:lstStyle/>
+          <a:p>
+            <a:pPr algn="ctr"/>
+          </a:p>
+        </p:txBody>
+      </p:sp>
+      <p:sp>
+        <p:nvSpPr>
+          <p:cNvPr id="6" name="Rectangle 5"/>
+          <p:cNvSpPr/>
+          <p:nvPr/>
+        </p:nvSpPr>
+        <p:spPr>
+          <a:xfrm>
+            <a:off x="760000" y="1900000"/>
+            <a:ext cx="150000" cy="1600000"/>
+          </a:xfrm>
+          <a:prstGeom prst="rect">
+            <a:avLst/>
+          </a:prstGeom>
+          <a:solidFill>
+            <a:srgbClr val="F5670F"/>
+          </a:solidFill>
+          <a:ln>
+            <a:noFill/>
+          </a:ln>
+          <a:effectLst/>
+        </p:spPr>
+        <p:style>
+          <a:lnRef idx="1">
+            <a:schemeClr val="accent1"/>
+          </a:lnRef>
+          <a:fillRef idx="3">
+            <a:schemeClr val="accent1"/>
+          </a:fillRef>
+          <a:effectRef idx="2">
+            <a:schemeClr val="accent1"/>
+          </a:effectRef>
+          <a:fontRef idx="minor">
+            <a:schemeClr val="lt1"/>
+          </a:fontRef>
+        </p:style>
+        <p:txBody>
+          <a:bodyPr rtlCol="0" anchor="ctr"/>
+          <a:lstStyle/>
+          <a:p>
+            <a:pPr algn="ctr"/>
+          </a:p>
+        </p:txBody>
+      </p:sp>
+      <p:sp>
+        <p:nvSpPr>
+          <p:cNvPr id="7" name="TextBox 6"/>
+          <p:cNvSpPr txBox="1"/>
+          <p:nvPr/>
+        </p:nvSpPr>
+        <p:spPr>
+          <a:xfrm>
+            <a:off x="1020000" y="2050000"/>
+            <a:ext cx="10500000" cy="1400000"/>
+          </a:xfrm>
+          <a:prstGeom prst="rect">
+            <a:avLst/>
+          </a:prstGeom>
+          <a:noFill/>
+        </p:spPr>
+        <p:txBody>
+          <a:bodyPr wrap="square" anchor="t">
+            <a:spAutoFit/>
+          </a:bodyPr>
+          <a:lstStyle/>
+          <a:p>
+            <a:pPr algn="l">
+              <a:lnSpc>
+                <a:spcPct val="110000"/>
+              </a:lnSpc>
+              <a:spcAft>
+                <a:spcPts val="600"/>
+              </a:spcAft>
+            </a:pPr>
+            <a:r>
+              <a:rPr sz="1700" b="1">
+                <a:solidFill>
+                  <a:srgbClr val="010328"/>
+                </a:solidFill>
+                <a:latin typeface="微软雅黑"/>
+              </a:rPr>
+              <a:t>主题: 能加载预训练ResNet并替换分类头——应用：见</a:t>
+            </a:r>
+          </a:p>
+          <a:p>
+            <a:pPr algn="l">
+              <a:lnSpc>
+                <a:spcPct val="110000"/>
+              </a:lnSpc>
+              <a:spcAft>
+                <a:spcPts val="600"/>
+              </a:spcAft>
+            </a:pPr>
+            <a:r>
+              <a:rPr sz="1300" b="0">
+                <a:solidFill>
+                  <a:srgbClr val="44546A"/>
+                </a:solidFill>
+                <a:latin typeface="微软雅黑"/>
+              </a:rPr>
+              <a:t>预习快问: 课中查①：'Conv输入报维度'这个报错怎么排查？</a:t>
+            </a:r>
+          </a:p>
+        </p:txBody>
+      </p:sp>
+      <p:sp>
+        <p:nvSpPr>
+          <p:cNvPr id="8" name="TextBox 7"/>
+          <p:cNvSpPr txBox="1"/>
+          <p:nvPr/>
+        </p:nvSpPr>
+        <p:spPr>
+          <a:xfrm>
+            <a:off x="760000" y="3900000"/>
+            <a:ext cx="10900000" cy="900000"/>
+          </a:xfrm>
+          <a:prstGeom prst="rect">
+            <a:avLst/>
+          </a:prstGeom>
+          <a:noFill/>
+        </p:spPr>
+        <p:txBody>
+          <a:bodyPr wrap="square" anchor="t">
+            <a:spAutoFit/>
+          </a:bodyPr>
+          <a:lstStyle/>
+          <a:p>
+            <a:pPr algn="l">
+              <a:lnSpc>
+                <a:spcPct val="110000"/>
+              </a:lnSpc>
+              <a:spcAft>
+                <a:spcPts val="600"/>
+              </a:spcAft>
+            </a:pPr>
+            <a:r>
+              <a:rPr sz="1400" b="1">
+                <a:solidFill>
+                  <a:srgbClr val="0545E8"/>
+                </a:solidFill>
+                <a:latin typeface="微软雅黑"/>
+              </a:rPr>
+              <a:t>课前完成：导学单 + 预习自测 + starter环境自检</a:t>
+            </a:r>
+          </a:p>
+          <a:p>
+            <a:pPr algn="l">
+              <a:lnSpc>
+                <a:spcPct val="110000"/>
+              </a:lnSpc>
+              <a:spcAft>
+                <a:spcPts val="600"/>
+              </a:spcAft>
+            </a:pPr>
+            <a:r>
+              <a:rPr sz="1250" b="0">
+                <a:solidFill>
+                  <a:srgbClr val="44546A"/>
+                </a:solidFill>
+                <a:latin typeface="微软雅黑"/>
+              </a:rPr>
+              <a:t>带着问题来上课——Predict先于Run</a:t>
+            </a:r>
+          </a:p>
+        </p:txBody>
+      </p:sp>
+    </p:spTree>
+  </p:cSld>
+  <p:clrMapOvr>
+    <a:masterClrMapping/>
+  </p:clrMapOvr>
+</p:sld>
+</file>
+
+<file path=ppt/slides/slide19.xml><?xml version="1.0" encoding="utf-8"?>
+<p:sld xmlns:a="http://schemas.openxmlformats.org/drawingml/2006/main" xmlns:p="http://schemas.openxmlformats.org/presentationml/2006/main" xmlns:r="http://schemas.openxmlformats.org/officeDocument/2006/relationships">
+  <p:cSld>
+    <p:spTree>
+      <p:nvGrpSpPr>
+        <p:cNvPr id="1" name=""/>
+        <p:cNvGrpSpPr/>
+        <p:nvPr/>
+      </p:nvGrpSpPr>
+      <p:grpSpPr/>
+      <p:sp>
+        <p:nvSpPr>
           <p:cNvPr id="2" name="TextBox 1"/>
           <p:cNvSpPr txBox="1"/>
           <p:nvPr/>
@@ -9143,7 +10508,7 @@
           <a:p>
             <a:r>
               <a:rPr sz="3000" b="1"/>
-              <a:t>本讲与岗位任务单的衔接</a:t>
+              <a:t>本任务六步法导航</a:t>
             </a:r>
           </a:p>
         </p:txBody>
@@ -9177,7 +10542,7 @@
             </a:pPr>
             <a:r>
               <a:rPr sz="1800"/>
-              <a:t>本讲在工作过程系统化课程中承担的任务环节：任务实施</a:t>
+              <a:t>六步法：资讯 → 计划 → 决策 → 实施 → 检查 → 评估</a:t>
             </a:r>
           </a:p>
           <a:p>
@@ -9188,7 +10553,7 @@
             </a:pPr>
             <a:r>
               <a:rPr sz="1800"/>
-              <a:t>考核对齐：过程性成绩取自本讲工单第六节各模块得分合计（满分 100）。</a:t>
+              <a:t>本讲对应工单：《AI应用基础48课时版》分层任务工单</a:t>
             </a:r>
           </a:p>
           <a:p>
@@ -9199,7 +10564,7 @@
             </a:pPr>
             <a:r>
               <a:rPr sz="1800"/>
-              <a:t>达标线：综合成绩≥60 分，且无安全红线一票否决记录</a:t>
+              <a:t>课堂产出：工单第六节实施记录须当堂填写，含操作前安全打勾与学生本人签字。</a:t>
             </a:r>
           </a:p>
           <a:p>
@@ -9210,7 +10575,7 @@
             </a:pPr>
             <a:r>
               <a:rPr sz="1800"/>
-              <a:t>无效工单判定：未打安全勾、无本人签字、无三方联签。</a:t>
+              <a:t>课后交付：班组长／操作员／教师三方联签后交回，缺签视为未交付。</a:t>
             </a:r>
           </a:p>
         </p:txBody>
@@ -9354,6 +10719,120 @@
 </p:sld>
 </file>
 
+<file path=ppt/slides/slide20.xml><?xml version="1.0" encoding="utf-8"?>
+<p:sld xmlns:a="http://schemas.openxmlformats.org/drawingml/2006/main" xmlns:p="http://schemas.openxmlformats.org/presentationml/2006/main" xmlns:r="http://schemas.openxmlformats.org/officeDocument/2006/relationships">
+  <p:cSld>
+    <p:spTree>
+      <p:nvGrpSpPr>
+        <p:cNvPr id="1" name=""/>
+        <p:cNvGrpSpPr/>
+        <p:nvPr/>
+      </p:nvGrpSpPr>
+      <p:grpSpPr/>
+      <p:sp>
+        <p:nvSpPr>
+          <p:cNvPr id="2" name="TextBox 1"/>
+          <p:cNvSpPr txBox="1"/>
+          <p:nvPr/>
+        </p:nvSpPr>
+        <p:spPr>
+          <a:xfrm>
+            <a:off x="548640" y="320040"/>
+            <a:ext cx="11094720" cy="914400"/>
+          </a:xfrm>
+          <a:prstGeom prst="rect">
+            <a:avLst/>
+          </a:prstGeom>
+          <a:noFill/>
+        </p:spPr>
+        <p:txBody>
+          <a:bodyPr wrap="none">
+            <a:spAutoFit/>
+          </a:bodyPr>
+          <a:lstStyle/>
+          <a:p>
+            <a:r>
+              <a:rPr sz="3000" b="1"/>
+              <a:t>本讲与岗位任务单的衔接</a:t>
+            </a:r>
+          </a:p>
+        </p:txBody>
+      </p:sp>
+      <p:sp>
+        <p:nvSpPr>
+          <p:cNvPr id="3" name="TextBox 2"/>
+          <p:cNvSpPr txBox="1"/>
+          <p:nvPr/>
+        </p:nvSpPr>
+        <p:spPr>
+          <a:xfrm>
+            <a:off x="731520" y="1371600"/>
+            <a:ext cx="10728960" cy="4663440"/>
+          </a:xfrm>
+          <a:prstGeom prst="rect">
+            <a:avLst/>
+          </a:prstGeom>
+          <a:noFill/>
+        </p:spPr>
+        <p:txBody>
+          <a:bodyPr wrap="square">
+            <a:spAutoFit/>
+          </a:bodyPr>
+          <a:lstStyle/>
+          <a:p>
+            <a:pPr>
+              <a:spcAft>
+                <a:spcPts val="1000"/>
+              </a:spcAft>
+            </a:pPr>
+            <a:r>
+              <a:rPr sz="1800"/>
+              <a:t>本讲在工作过程系统化课程中承担的任务环节：任务实施</a:t>
+            </a:r>
+          </a:p>
+          <a:p>
+            <a:pPr>
+              <a:spcAft>
+                <a:spcPts val="1000"/>
+              </a:spcAft>
+            </a:pPr>
+            <a:r>
+              <a:rPr sz="1800"/>
+              <a:t>考核对齐：过程性成绩取自本讲工单第六节各模块得分合计（满分 100）。</a:t>
+            </a:r>
+          </a:p>
+          <a:p>
+            <a:pPr>
+              <a:spcAft>
+                <a:spcPts val="1000"/>
+              </a:spcAft>
+            </a:pPr>
+            <a:r>
+              <a:rPr sz="1800"/>
+              <a:t>达标线：综合成绩≥60 分，且无安全红线一票否决记录</a:t>
+            </a:r>
+          </a:p>
+          <a:p>
+            <a:pPr>
+              <a:spcAft>
+                <a:spcPts val="1000"/>
+              </a:spcAft>
+            </a:pPr>
+            <a:r>
+              <a:rPr sz="1800"/>
+              <a:t>无效工单判定：未打安全勾、无本人签字、无三方联签。</a:t>
+            </a:r>
+          </a:p>
+        </p:txBody>
+      </p:sp>
+    </p:spTree>
+  </p:cSld>
+  <p:clrMapOvr>
+    <a:masterClrMapping/>
+  </p:clrMapOvr>
+</p:sld>
+</file>
+
 <file path=ppt/slides/slide3.xml><?xml version="1.0" encoding="utf-8"?>
 <p:sld xmlns:a="http://schemas.openxmlformats.org/drawingml/2006/main" xmlns:p="http://schemas.openxmlformats.org/presentationml/2006/main" xmlns:r="http://schemas.openxmlformats.org/officeDocument/2006/relationships">
   <p:cSld>
@@ -9827,7 +11306,7 @@
                 </a:solidFill>
                 <a:latin typeface="微软雅黑"/>
               </a:rPr>
-              <a:t>3 / 18</a:t>
+              <a:t>3 / 20</a:t>
             </a:r>
           </a:p>
         </p:txBody>
@@ -10301,7 +11780,7 @@
                 </a:solidFill>
                 <a:latin typeface="微软雅黑"/>
               </a:rPr>
-              <a:t>4 / 18</a:t>
+              <a:t>4 / 20</a:t>
             </a:r>
           </a:p>
         </p:txBody>
@@ -11093,7 +12572,7 @@
                 </a:solidFill>
                 <a:latin typeface="微软雅黑"/>
               </a:rPr>
-              <a:t>5 / 18</a:t>
+              <a:t>5 / 20</a:t>
             </a:r>
           </a:p>
         </p:txBody>
@@ -11369,7 +12848,7 @@
                 </a:solidFill>
                 <a:latin typeface="微软雅黑"/>
               </a:rPr>
-              <a:t>6 / 18</a:t>
+              <a:t>6 / 20</a:t>
             </a:r>
           </a:p>
         </p:txBody>
@@ -12195,7 +13674,7 @@
           <a:lstStyle/>
           <a:p>
             <a:r>
-              <a:rPr sz="750" b="0">
+              <a:rPr sz="900" b="0">
                 <a:solidFill>
                   <a:srgbClr val="6B7280"/>
                 </a:solidFill>
@@ -12477,7 +13956,7 @@
                 </a:solidFill>
                 <a:latin typeface="微软雅黑"/>
               </a:rPr>
-              <a:t>7 / 18</a:t>
+              <a:t>7 / 20</a:t>
             </a:r>
           </a:p>
         </p:txBody>
@@ -12697,7 +14176,7 @@
           <a:lstStyle/>
           <a:p>
             <a:r>
-              <a:rPr sz="850" b="0">
+              <a:rPr sz="900" b="0">
                 <a:solidFill>
                   <a:srgbClr val="2B2F36"/>
                 </a:solidFill>
@@ -12765,7 +14244,7 @@
           <a:lstStyle/>
           <a:p>
             <a:r>
-              <a:rPr sz="850" b="0">
+              <a:rPr sz="900" b="0">
                 <a:solidFill>
                   <a:srgbClr val="2B2F36"/>
                 </a:solidFill>
@@ -12833,7 +14312,7 @@
           <a:lstStyle/>
           <a:p>
             <a:r>
-              <a:rPr sz="850" b="0">
+              <a:rPr sz="900" b="0">
                 <a:solidFill>
                   <a:srgbClr val="2B2F36"/>
                 </a:solidFill>
@@ -13025,7 +14504,7 @@
           <a:lstStyle/>
           <a:p>
             <a:r>
-              <a:rPr sz="850" b="0">
+              <a:rPr sz="900" b="0">
                 <a:solidFill>
                   <a:srgbClr val="2B2F36"/>
                 </a:solidFill>
@@ -13093,7 +14572,7 @@
           <a:lstStyle/>
           <a:p>
             <a:r>
-              <a:rPr sz="850" b="0">
+              <a:rPr sz="900" b="0">
                 <a:solidFill>
                   <a:srgbClr val="2B2F36"/>
                 </a:solidFill>
@@ -13161,7 +14640,7 @@
           <a:lstStyle/>
           <a:p>
             <a:r>
-              <a:rPr sz="850" b="0">
+              <a:rPr sz="900" b="0">
                 <a:solidFill>
                   <a:srgbClr val="2B2F36"/>
                 </a:solidFill>
@@ -13353,7 +14832,7 @@
           <a:lstStyle/>
           <a:p>
             <a:r>
-              <a:rPr sz="850" b="0">
+              <a:rPr sz="900" b="0">
                 <a:solidFill>
                   <a:srgbClr val="2B2F36"/>
                 </a:solidFill>
@@ -13421,7 +14900,7 @@
           <a:lstStyle/>
           <a:p>
             <a:r>
-              <a:rPr sz="850" b="0">
+              <a:rPr sz="900" b="0">
                 <a:solidFill>
                   <a:srgbClr val="2B2F36"/>
                 </a:solidFill>
@@ -13489,7 +14968,7 @@
           <a:lstStyle/>
           <a:p>
             <a:r>
-              <a:rPr sz="850" b="0">
+              <a:rPr sz="900" b="0">
                 <a:solidFill>
                   <a:srgbClr val="2B2F36"/>
                 </a:solidFill>
@@ -13771,7 +15250,7 @@
                 </a:solidFill>
                 <a:latin typeface="微软雅黑"/>
               </a:rPr>
-              <a:t>8 / 18</a:t>
+              <a:t>8 / 20</a:t>
             </a:r>
           </a:p>
         </p:txBody>
@@ -14340,7 +15819,7 @@
           <a:lstStyle/>
           <a:p>
             <a:r>
-              <a:rPr sz="750" b="0">
+              <a:rPr sz="900" b="0">
                 <a:solidFill>
                   <a:srgbClr val="6B7280"/>
                 </a:solidFill>
@@ -14459,14 +15938,14 @@
       </p:sp>
       <p:sp>
         <p:nvSpPr>
-          <p:cNvPr id="4" name="TextBox 3"/>
+          <p:cNvPr id="6" name="TextBox 5"/>
           <p:cNvSpPr txBox="1"/>
           <p:nvPr/>
         </p:nvSpPr>
         <p:spPr>
           <a:xfrm>
-            <a:off x="700000" y="300000"/>
-            <a:ext cx="10792000" cy="700000"/>
+            <a:off x="1500000" y="300000"/>
+            <a:ext cx="9992000" cy="700000"/>
           </a:xfrm>
           <a:prstGeom prst="rect">
             <a:avLst/>
@@ -14494,27 +15973,27 @@
                 </a:solidFill>
                 <a:latin typeface="微软雅黑"/>
               </a:rPr>
-              <a:t>实施任务：工单M2-3b《CNN或LSTM二选一（竞标）（下）：优化与评价》</a:t>
-            </a:r>
-          </a:p>
-        </p:txBody>
-      </p:sp>
-      <p:sp>
-        <p:nvSpPr>
-          <p:cNvPr id="5" name="Rectangle 4"/>
+              <a:t>本课知识速览卡 · 边做边对照</a:t>
+            </a:r>
+          </a:p>
+        </p:txBody>
+      </p:sp>
+      <p:sp>
+        <p:nvSpPr>
+          <p:cNvPr id="17" name="Rectangle 16"/>
           <p:cNvSpPr/>
           <p:nvPr/>
         </p:nvSpPr>
         <p:spPr>
           <a:xfrm>
-            <a:off x="800000" y="1950000"/>
-            <a:ext cx="6300000" cy="3900000"/>
+            <a:off x="500000" y="6500000"/>
+            <a:ext cx="11100000" cy="20000"/>
           </a:xfrm>
           <a:prstGeom prst="rect">
             <a:avLst/>
           </a:prstGeom>
           <a:solidFill>
-            <a:srgbClr val="F3F6FD"/>
+            <a:srgbClr val="C9D4EE"/>
           </a:solidFill>
           <a:ln>
             <a:noFill/>
@@ -14545,197 +16024,14 @@
       </p:sp>
       <p:sp>
         <p:nvSpPr>
-          <p:cNvPr id="6" name="TextBox 5"/>
+          <p:cNvPr id="18" name="TextBox 17"/>
           <p:cNvSpPr txBox="1"/>
           <p:nvPr/>
         </p:nvSpPr>
         <p:spPr>
           <a:xfrm>
-            <a:off x="1000000" y="2100000"/>
-            <a:ext cx="5900000" cy="3600000"/>
-          </a:xfrm>
-          <a:prstGeom prst="rect">
-            <a:avLst/>
-          </a:prstGeom>
-          <a:noFill/>
-        </p:spPr>
-        <p:txBody>
-          <a:bodyPr wrap="square" anchor="t">
-            <a:spAutoFit/>
-          </a:bodyPr>
-          <a:lstStyle/>
-          <a:p>
-            <a:pPr algn="l">
-              <a:lnSpc>
-                <a:spcPct val="130000"/>
-              </a:lnSpc>
-              <a:spcAft>
-                <a:spcPts val="600"/>
-              </a:spcAft>
-            </a:pPr>
-            <a:r>
-              <a:rPr sz="1500" b="1">
-                <a:solidFill>
-                  <a:srgbClr val="0545E8"/>
-                </a:solidFill>
-                <a:latin typeface="微软雅黑"/>
-              </a:rPr>
-              <a:t>实施步骤</a:t>
-            </a:r>
-          </a:p>
-          <a:p>
-            <a:pPr algn="l">
-              <a:lnSpc>
-                <a:spcPct val="130000"/>
-              </a:lnSpc>
-              <a:spcAft>
-                <a:spcPts val="600"/>
-              </a:spcAft>
-            </a:pPr>
-            <a:r>
-              <a:rPr sz="1400" b="0">
-                <a:solidFill>
-                  <a:srgbClr val="010328"/>
-                </a:solidFill>
-                <a:latin typeface="微软雅黑"/>
-              </a:rPr>
-              <a:t>1. 错误速查复盘</a:t>
-            </a:r>
-          </a:p>
-          <a:p>
-            <a:pPr algn="l">
-              <a:lnSpc>
-                <a:spcPct val="130000"/>
-              </a:lnSpc>
-              <a:spcAft>
-                <a:spcPts val="600"/>
-              </a:spcAft>
-            </a:pPr>
-            <a:r>
-              <a:rPr sz="1400" b="0">
-                <a:solidFill>
-                  <a:srgbClr val="010328"/>
-                </a:solidFill>
-                <a:latin typeface="微软雅黑"/>
-              </a:rPr>
-              <a:t>2. 优化冲刺（B/A层）</a:t>
-            </a:r>
-          </a:p>
-          <a:p>
-            <a:pPr algn="l">
-              <a:lnSpc>
-                <a:spcPct val="130000"/>
-              </a:lnSpc>
-              <a:spcAft>
-                <a:spcPts val="600"/>
-              </a:spcAft>
-            </a:pPr>
-            <a:r>
-              <a:rPr sz="1400" b="0">
-                <a:solidFill>
-                  <a:srgbClr val="010328"/>
-                </a:solidFill>
-                <a:latin typeface="微软雅黑"/>
-              </a:rPr>
-              <a:t>3. 三层质检互查</a:t>
-            </a:r>
-          </a:p>
-          <a:p>
-            <a:pPr algn="l">
-              <a:lnSpc>
-                <a:spcPct val="130000"/>
-              </a:lnSpc>
-              <a:spcAft>
-                <a:spcPts val="600"/>
-              </a:spcAft>
-            </a:pPr>
-            <a:r>
-              <a:rPr sz="1400" b="0">
-                <a:solidFill>
-                  <a:srgbClr val="010328"/>
-                </a:solidFill>
-                <a:latin typeface="微软雅黑"/>
-              </a:rPr>
-              <a:t>4. 当堂评分与反馈</a:t>
-            </a:r>
-          </a:p>
-          <a:p>
-            <a:pPr algn="l">
-              <a:lnSpc>
-                <a:spcPct val="130000"/>
-              </a:lnSpc>
-              <a:spcAft>
-                <a:spcPts val="600"/>
-              </a:spcAft>
-            </a:pPr>
-            <a:r>
-              <a:rPr sz="1400" b="0">
-                <a:solidFill>
-                  <a:srgbClr val="010328"/>
-                </a:solidFill>
-                <a:latin typeface="微软雅黑"/>
-              </a:rPr>
-              <a:t>5. 下次课预告+微课</a:t>
-            </a:r>
-          </a:p>
-        </p:txBody>
-      </p:sp>
-      <p:sp>
-        <p:nvSpPr>
-          <p:cNvPr id="7" name="Rectangle 6"/>
-          <p:cNvSpPr/>
-          <p:nvPr/>
-        </p:nvSpPr>
-        <p:spPr>
-          <a:xfrm>
-            <a:off x="7400000" y="1950000"/>
-            <a:ext cx="4000000" cy="1850000"/>
-          </a:xfrm>
-          <a:prstGeom prst="rect">
-            <a:avLst/>
-          </a:prstGeom>
-          <a:solidFill>
-            <a:srgbClr val="E8F1E8"/>
-          </a:solidFill>
-          <a:ln>
-            <a:solidFill>
-              <a:srgbClr val="0475B6"/>
-            </a:solidFill>
-          </a:ln>
-          <a:effectLst/>
-        </p:spPr>
-        <p:style>
-          <a:lnRef idx="1">
-            <a:schemeClr val="accent1"/>
-          </a:lnRef>
-          <a:fillRef idx="3">
-            <a:schemeClr val="accent1"/>
-          </a:fillRef>
-          <a:effectRef idx="2">
-            <a:schemeClr val="accent1"/>
-          </a:effectRef>
-          <a:fontRef idx="minor">
-            <a:schemeClr val="lt1"/>
-          </a:fontRef>
-        </p:style>
-        <p:txBody>
-          <a:bodyPr rtlCol="0" anchor="ctr"/>
-          <a:lstStyle/>
-          <a:p>
-            <a:pPr algn="ctr"/>
-          </a:p>
-        </p:txBody>
-      </p:sp>
-      <p:sp>
-        <p:nvSpPr>
-          <p:cNvPr id="8" name="TextBox 7"/>
-          <p:cNvSpPr txBox="1"/>
-          <p:nvPr/>
-        </p:nvSpPr>
-        <p:spPr>
-          <a:xfrm>
-            <a:off x="7550000" y="2080000"/>
-            <a:ext cx="3750000" cy="1650000"/>
+            <a:off x="500000" y="6540000"/>
+            <a:ext cx="7000000" cy="300000"/>
           </a:xfrm>
           <a:prstGeom prst="rect">
             <a:avLst/>
@@ -14757,218 +16053,6 @@
               </a:spcAft>
             </a:pPr>
             <a:r>
-              <a:rPr sz="1400" b="1">
-                <a:solidFill>
-                  <a:srgbClr val="0475B6"/>
-                </a:solidFill>
-                <a:latin typeface="微软雅黑"/>
-              </a:rPr>
-              <a:t>及格标准（D）</a:t>
-            </a:r>
-          </a:p>
-          <a:p>
-            <a:pPr algn="l">
-              <a:lnSpc>
-                <a:spcPct val="110000"/>
-              </a:lnSpc>
-              <a:spcAft>
-                <a:spcPts val="600"/>
-              </a:spcAft>
-            </a:pPr>
-            <a:r>
-              <a:rPr sz="1300" b="0">
-                <a:solidFill>
-                  <a:srgbClr val="010328"/>
-                </a:solidFill>
-                <a:latin typeface="微软雅黑"/>
-              </a:rPr>
-              <a:t>指标达标+竞标书完整</a:t>
-            </a:r>
-          </a:p>
-        </p:txBody>
-      </p:sp>
-      <p:sp>
-        <p:nvSpPr>
-          <p:cNvPr id="9" name="Rectangle 8"/>
-          <p:cNvSpPr/>
-          <p:nvPr/>
-        </p:nvSpPr>
-        <p:spPr>
-          <a:xfrm>
-            <a:off x="7400000" y="3950000"/>
-            <a:ext cx="4000000" cy="1850000"/>
-          </a:xfrm>
-          <a:prstGeom prst="rect">
-            <a:avLst/>
-          </a:prstGeom>
-          <a:solidFill>
-            <a:srgbClr val="FDF0E6"/>
-          </a:solidFill>
-          <a:ln>
-            <a:solidFill>
-              <a:srgbClr val="F5670F"/>
-            </a:solidFill>
-          </a:ln>
-          <a:effectLst/>
-        </p:spPr>
-        <p:style>
-          <a:lnRef idx="1">
-            <a:schemeClr val="accent1"/>
-          </a:lnRef>
-          <a:fillRef idx="3">
-            <a:schemeClr val="accent1"/>
-          </a:fillRef>
-          <a:effectRef idx="2">
-            <a:schemeClr val="accent1"/>
-          </a:effectRef>
-          <a:fontRef idx="minor">
-            <a:schemeClr val="lt1"/>
-          </a:fontRef>
-        </p:style>
-        <p:txBody>
-          <a:bodyPr rtlCol="0" anchor="ctr"/>
-          <a:lstStyle/>
-          <a:p>
-            <a:pPr algn="ctr"/>
-          </a:p>
-        </p:txBody>
-      </p:sp>
-      <p:sp>
-        <p:nvSpPr>
-          <p:cNvPr id="10" name="TextBox 9"/>
-          <p:cNvSpPr txBox="1"/>
-          <p:nvPr/>
-        </p:nvSpPr>
-        <p:spPr>
-          <a:xfrm>
-            <a:off x="7550000" y="4080000"/>
-            <a:ext cx="3750000" cy="1650000"/>
-          </a:xfrm>
-          <a:prstGeom prst="rect">
-            <a:avLst/>
-          </a:prstGeom>
-          <a:noFill/>
-        </p:spPr>
-        <p:txBody>
-          <a:bodyPr wrap="square" anchor="t">
-            <a:spAutoFit/>
-          </a:bodyPr>
-          <a:lstStyle/>
-          <a:p>
-            <a:pPr algn="l">
-              <a:lnSpc>
-                <a:spcPct val="110000"/>
-              </a:lnSpc>
-              <a:spcAft>
-                <a:spcPts val="600"/>
-              </a:spcAft>
-            </a:pPr>
-            <a:r>
-              <a:rPr sz="1400" b="1">
-                <a:solidFill>
-                  <a:srgbClr val="F5670F"/>
-                </a:solidFill>
-                <a:latin typeface="微软雅黑"/>
-              </a:rPr>
-              <a:t>优秀标准（B+）</a:t>
-            </a:r>
-          </a:p>
-          <a:p>
-            <a:pPr algn="l">
-              <a:lnSpc>
-                <a:spcPct val="110000"/>
-              </a:lnSpc>
-              <a:spcAft>
-                <a:spcPts val="600"/>
-              </a:spcAft>
-            </a:pPr>
-            <a:r>
-              <a:rPr sz="1300" b="0">
-                <a:solidFill>
-                  <a:srgbClr val="010328"/>
-                </a:solidFill>
-                <a:latin typeface="微软雅黑"/>
-              </a:rPr>
-              <a:t>赢得竞标且指标优秀</a:t>
-            </a:r>
-          </a:p>
-        </p:txBody>
-      </p:sp>
-      <p:sp>
-        <p:nvSpPr>
-          <p:cNvPr id="11" name="Rectangle 10"/>
-          <p:cNvSpPr/>
-          <p:nvPr/>
-        </p:nvSpPr>
-        <p:spPr>
-          <a:xfrm>
-            <a:off x="500000" y="6500000"/>
-            <a:ext cx="11100000" cy="20000"/>
-          </a:xfrm>
-          <a:prstGeom prst="rect">
-            <a:avLst/>
-          </a:prstGeom>
-          <a:solidFill>
-            <a:srgbClr val="C9D4EE"/>
-          </a:solidFill>
-          <a:ln>
-            <a:noFill/>
-          </a:ln>
-          <a:effectLst/>
-        </p:spPr>
-        <p:style>
-          <a:lnRef idx="1">
-            <a:schemeClr val="accent1"/>
-          </a:lnRef>
-          <a:fillRef idx="3">
-            <a:schemeClr val="accent1"/>
-          </a:fillRef>
-          <a:effectRef idx="2">
-            <a:schemeClr val="accent1"/>
-          </a:effectRef>
-          <a:fontRef idx="minor">
-            <a:schemeClr val="lt1"/>
-          </a:fontRef>
-        </p:style>
-        <p:txBody>
-          <a:bodyPr rtlCol="0" anchor="ctr"/>
-          <a:lstStyle/>
-          <a:p>
-            <a:pPr algn="ctr"/>
-          </a:p>
-        </p:txBody>
-      </p:sp>
-      <p:sp>
-        <p:nvSpPr>
-          <p:cNvPr id="12" name="TextBox 11"/>
-          <p:cNvSpPr txBox="1"/>
-          <p:nvPr/>
-        </p:nvSpPr>
-        <p:spPr>
-          <a:xfrm>
-            <a:off x="500000" y="6540000"/>
-            <a:ext cx="7000000" cy="300000"/>
-          </a:xfrm>
-          <a:prstGeom prst="rect">
-            <a:avLst/>
-          </a:prstGeom>
-          <a:noFill/>
-        </p:spPr>
-        <p:txBody>
-          <a:bodyPr wrap="square" anchor="t">
-            <a:spAutoFit/>
-          </a:bodyPr>
-          <a:lstStyle/>
-          <a:p>
-            <a:pPr algn="l">
-              <a:lnSpc>
-                <a:spcPct val="110000"/>
-              </a:lnSpc>
-              <a:spcAft>
-                <a:spcPts val="600"/>
-              </a:spcAft>
-            </a:pPr>
-            <a:r>
               <a:rPr sz="1000" b="0">
                 <a:solidFill>
                   <a:srgbClr val="8A97B5"/>
@@ -14982,7 +16066,7 @@
       </p:sp>
       <p:sp>
         <p:nvSpPr>
-          <p:cNvPr id="13" name="TextBox 12"/>
+          <p:cNvPr id="19" name="TextBox 18"/>
           <p:cNvSpPr txBox="1"/>
           <p:nvPr/>
         </p:nvSpPr>
@@ -15017,7 +16101,637 @@
                 </a:solidFill>
                 <a:latin typeface="微软雅黑"/>
               </a:rPr>
-              <a:t>9 / 18</a:t>
+              <a:t>9 / 20</a:t>
+            </a:r>
+          </a:p>
+        </p:txBody>
+      </p:sp>
+      <p:sp>
+        <p:nvSpPr>
+          <p:cNvPr id="20" name="TextBox 19"/>
+          <p:cNvSpPr txBox="1"/>
+          <p:nvPr/>
+        </p:nvSpPr>
+        <p:spPr>
+          <a:xfrm>
+            <a:off x="457200" y="1389888"/>
+            <a:ext cx="11274552" cy="274320"/>
+          </a:xfrm>
+          <a:prstGeom prst="rect">
+            <a:avLst/>
+          </a:prstGeom>
+          <a:noFill/>
+        </p:spPr>
+        <p:txBody>
+          <a:bodyPr wrap="square">
+            <a:spAutoFit/>
+          </a:bodyPr>
+          <a:lstStyle/>
+          <a:p>
+            <a:r>
+              <a:rPr sz="1050" b="0">
+                <a:solidFill>
+                  <a:srgbClr val="6B7280"/>
+                </a:solidFill>
+                <a:latin typeface="微软雅黑"/>
+              </a:rPr>
+              <a:t>本讲是动手冲刺课：知识点在完整讲解课已细讲——这页把它们浓缩成一张速览卡，边做边对照。</a:t>
+            </a:r>
+          </a:p>
+        </p:txBody>
+      </p:sp>
+      <p:sp>
+        <p:nvSpPr>
+          <p:cNvPr id="21" name="Rectangle 20"/>
+          <p:cNvSpPr/>
+          <p:nvPr/>
+        </p:nvSpPr>
+        <p:spPr>
+          <a:xfrm>
+            <a:off x="457200" y="1783080"/>
+            <a:ext cx="6309360" cy="4114800"/>
+          </a:xfrm>
+          <a:prstGeom prst="rect">
+            <a:avLst/>
+          </a:prstGeom>
+          <a:solidFill>
+            <a:srgbClr val="FFFFFF"/>
+          </a:solidFill>
+          <a:ln>
+            <a:solidFill>
+              <a:srgbClr val="D6DCE4"/>
+            </a:solidFill>
+          </a:ln>
+          <a:effectLst/>
+        </p:spPr>
+        <p:style>
+          <a:lnRef idx="1">
+            <a:schemeClr val="accent1"/>
+          </a:lnRef>
+          <a:fillRef idx="3">
+            <a:schemeClr val="accent1"/>
+          </a:fillRef>
+          <a:effectRef idx="2">
+            <a:schemeClr val="accent1"/>
+          </a:effectRef>
+          <a:fontRef idx="minor">
+            <a:schemeClr val="lt1"/>
+          </a:fontRef>
+        </p:style>
+        <p:txBody>
+          <a:bodyPr rtlCol="0" anchor="ctr" wrap="square"/>
+          <a:lstStyle/>
+          <a:p>
+            <a:pPr algn="ctr"/>
+          </a:p>
+        </p:txBody>
+      </p:sp>
+      <p:sp>
+        <p:nvSpPr>
+          <p:cNvPr id="22" name="Rectangle 21"/>
+          <p:cNvSpPr/>
+          <p:nvPr/>
+        </p:nvSpPr>
+        <p:spPr>
+          <a:xfrm>
+            <a:off x="457200" y="1783080"/>
+            <a:ext cx="6309360" cy="365760"/>
+          </a:xfrm>
+          <a:prstGeom prst="rect">
+            <a:avLst/>
+          </a:prstGeom>
+          <a:solidFill>
+            <a:srgbClr val="2F5D8C"/>
+          </a:solidFill>
+          <a:ln>
+            <a:noFill/>
+          </a:ln>
+          <a:effectLst/>
+        </p:spPr>
+        <p:style>
+          <a:lnRef idx="1">
+            <a:schemeClr val="accent1"/>
+          </a:lnRef>
+          <a:fillRef idx="3">
+            <a:schemeClr val="accent1"/>
+          </a:fillRef>
+          <a:effectRef idx="2">
+            <a:schemeClr val="accent1"/>
+          </a:effectRef>
+          <a:fontRef idx="minor">
+            <a:schemeClr val="lt1"/>
+          </a:fontRef>
+        </p:style>
+        <p:txBody>
+          <a:bodyPr rtlCol="0" anchor="ctr" wrap="square"/>
+          <a:lstStyle/>
+          <a:p>
+            <a:pPr algn="ctr"/>
+          </a:p>
+        </p:txBody>
+      </p:sp>
+      <p:sp>
+        <p:nvSpPr>
+          <p:cNvPr id="23" name="TextBox 22"/>
+          <p:cNvSpPr txBox="1"/>
+          <p:nvPr/>
+        </p:nvSpPr>
+        <p:spPr>
+          <a:xfrm>
+            <a:off x="566928" y="1819656"/>
+            <a:ext cx="6089904" cy="292608"/>
+          </a:xfrm>
+          <a:prstGeom prst="rect">
+            <a:avLst/>
+          </a:prstGeom>
+          <a:noFill/>
+        </p:spPr>
+        <p:txBody>
+          <a:bodyPr wrap="square">
+            <a:spAutoFit/>
+          </a:bodyPr>
+          <a:lstStyle/>
+          <a:p>
+            <a:r>
+              <a:rPr sz="1150" b="1">
+                <a:solidFill>
+                  <a:srgbClr val="FFFFFF"/>
+                </a:solidFill>
+                <a:latin typeface="微软雅黑"/>
+              </a:rPr>
+              <a:t>知识点速览（逐字摘自同周完整讲解课知识卡）</a:t>
+            </a:r>
+          </a:p>
+        </p:txBody>
+      </p:sp>
+      <p:sp>
+        <p:nvSpPr>
+          <p:cNvPr id="24" name="TextBox 23"/>
+          <p:cNvSpPr txBox="1"/>
+          <p:nvPr/>
+        </p:nvSpPr>
+        <p:spPr>
+          <a:xfrm>
+            <a:off x="621792" y="2267712"/>
+            <a:ext cx="6035040" cy="3474720"/>
+          </a:xfrm>
+          <a:prstGeom prst="rect">
+            <a:avLst/>
+          </a:prstGeom>
+          <a:noFill/>
+        </p:spPr>
+        <p:txBody>
+          <a:bodyPr wrap="square">
+            <a:spAutoFit/>
+          </a:bodyPr>
+          <a:lstStyle/>
+          <a:p>
+            <a:r>
+              <a:rPr sz="950" b="0">
+                <a:solidFill>
+                  <a:srgbClr val="2B2F36"/>
+                </a:solidFill>
+                <a:latin typeface="微软雅黑"/>
+              </a:rPr>
+              <a:t>◆ B01 卷积｜小核滑动扫全图——像拿放大镜逐格找特征</a:t>
+            </a:r>
+          </a:p>
+          <a:p>
+            <a:r>
+              <a:rPr sz="950" b="0">
+                <a:solidFill>
+                  <a:srgbClr val="2B2F36"/>
+                </a:solidFill>
+                <a:latin typeface="微软雅黑"/>
+              </a:rPr>
+              <a:t>◆ B02 池化｜MaxPool取窗口最大值——只留最强信号缩计算量</a:t>
+            </a:r>
+          </a:p>
+          <a:p>
+            <a:r>
+              <a:rPr sz="950" b="0">
+                <a:solidFill>
+                  <a:srgbClr val="2B2F36"/>
+                </a:solidFill>
+                <a:latin typeface="微软雅黑"/>
+              </a:rPr>
+              <a:t>◆ B03 滑动窗口造样本｜一段长序列按窗切片出无数训练对——序列版裁剪</a:t>
+            </a:r>
+          </a:p>
+          <a:p>
+            <a:r>
+              <a:rPr sz="950" b="0">
+                <a:solidFill>
+                  <a:srgbClr val="2B2F36"/>
+                </a:solidFill>
+                <a:latin typeface="微软雅黑"/>
+              </a:rPr>
+              <a:t>◆ B04 门控直觉｜遗忘门决定忘什么、输入门决定记什么——记忆开关</a:t>
+            </a:r>
+          </a:p>
+          <a:p>
+            <a:r>
+              <a:rPr sz="950" b="0">
+                <a:solidFill>
+                  <a:srgbClr val="2B2F36"/>
+                </a:solidFill>
+                <a:latin typeface="微软雅黑"/>
+              </a:rPr>
+              <a:t>◆ B05 竞标答辩结构｜问题-方案-指标-风险四段论——工程师讲方案的骨架</a:t>
+            </a:r>
+          </a:p>
+          <a:p>
+            <a:r>
+              <a:rPr sz="950" b="0">
+                <a:solidFill>
+                  <a:srgbClr val="2B2F36"/>
+                </a:solidFill>
+                <a:latin typeface="微软雅黑"/>
+              </a:rPr>
+              <a:t>◆ B06 选型依据｜图像缺陷选CNN、时序寿命选LSTM——数据形状定路线</a:t>
+            </a:r>
+          </a:p>
+        </p:txBody>
+      </p:sp>
+      <p:sp>
+        <p:nvSpPr>
+          <p:cNvPr id="25" name="Rectangle 24"/>
+          <p:cNvSpPr/>
+          <p:nvPr/>
+        </p:nvSpPr>
+        <p:spPr>
+          <a:xfrm>
+            <a:off x="6903720" y="1783080"/>
+            <a:ext cx="4828032" cy="1965960"/>
+          </a:xfrm>
+          <a:prstGeom prst="rect">
+            <a:avLst/>
+          </a:prstGeom>
+          <a:solidFill>
+            <a:srgbClr val="FFFFFF"/>
+          </a:solidFill>
+          <a:ln>
+            <a:solidFill>
+              <a:srgbClr val="D6DCE4"/>
+            </a:solidFill>
+          </a:ln>
+          <a:effectLst/>
+        </p:spPr>
+        <p:style>
+          <a:lnRef idx="1">
+            <a:schemeClr val="accent1"/>
+          </a:lnRef>
+          <a:fillRef idx="3">
+            <a:schemeClr val="accent1"/>
+          </a:fillRef>
+          <a:effectRef idx="2">
+            <a:schemeClr val="accent1"/>
+          </a:effectRef>
+          <a:fontRef idx="minor">
+            <a:schemeClr val="lt1"/>
+          </a:fontRef>
+        </p:style>
+        <p:txBody>
+          <a:bodyPr rtlCol="0" anchor="ctr" wrap="square"/>
+          <a:lstStyle/>
+          <a:p>
+            <a:pPr algn="ctr"/>
+          </a:p>
+        </p:txBody>
+      </p:sp>
+      <p:sp>
+        <p:nvSpPr>
+          <p:cNvPr id="26" name="Rectangle 25"/>
+          <p:cNvSpPr/>
+          <p:nvPr/>
+        </p:nvSpPr>
+        <p:spPr>
+          <a:xfrm>
+            <a:off x="6903720" y="1783080"/>
+            <a:ext cx="4828032" cy="365760"/>
+          </a:xfrm>
+          <a:prstGeom prst="rect">
+            <a:avLst/>
+          </a:prstGeom>
+          <a:solidFill>
+            <a:srgbClr val="2E7D46"/>
+          </a:solidFill>
+          <a:ln>
+            <a:noFill/>
+          </a:ln>
+          <a:effectLst/>
+        </p:spPr>
+        <p:style>
+          <a:lnRef idx="1">
+            <a:schemeClr val="accent1"/>
+          </a:lnRef>
+          <a:fillRef idx="3">
+            <a:schemeClr val="accent1"/>
+          </a:fillRef>
+          <a:effectRef idx="2">
+            <a:schemeClr val="accent1"/>
+          </a:effectRef>
+          <a:fontRef idx="minor">
+            <a:schemeClr val="lt1"/>
+          </a:fontRef>
+        </p:style>
+        <p:txBody>
+          <a:bodyPr rtlCol="0" anchor="ctr" wrap="square"/>
+          <a:lstStyle/>
+          <a:p>
+            <a:pPr algn="ctr"/>
+          </a:p>
+        </p:txBody>
+      </p:sp>
+      <p:sp>
+        <p:nvSpPr>
+          <p:cNvPr id="27" name="TextBox 26"/>
+          <p:cNvSpPr txBox="1"/>
+          <p:nvPr/>
+        </p:nvSpPr>
+        <p:spPr>
+          <a:xfrm>
+            <a:off x="7013448" y="1819656"/>
+            <a:ext cx="4608576" cy="292608"/>
+          </a:xfrm>
+          <a:prstGeom prst="rect">
+            <a:avLst/>
+          </a:prstGeom>
+          <a:noFill/>
+        </p:spPr>
+        <p:txBody>
+          <a:bodyPr wrap="square">
+            <a:spAutoFit/>
+          </a:bodyPr>
+          <a:lstStyle/>
+          <a:p>
+            <a:r>
+              <a:rPr sz="1150" b="1">
+                <a:solidFill>
+                  <a:srgbClr val="FFFFFF"/>
+                </a:solidFill>
+                <a:latin typeface="微软雅黑"/>
+              </a:rPr>
+              <a:t>本讲达标线（当堂评分同口径）</a:t>
+            </a:r>
+          </a:p>
+        </p:txBody>
+      </p:sp>
+      <p:sp>
+        <p:nvSpPr>
+          <p:cNvPr id="28" name="TextBox 27"/>
+          <p:cNvSpPr txBox="1"/>
+          <p:nvPr/>
+        </p:nvSpPr>
+        <p:spPr>
+          <a:xfrm>
+            <a:off x="7068312" y="2249424"/>
+            <a:ext cx="4526280" cy="1371600"/>
+          </a:xfrm>
+          <a:prstGeom prst="rect">
+            <a:avLst/>
+          </a:prstGeom>
+          <a:noFill/>
+        </p:spPr>
+        <p:txBody>
+          <a:bodyPr wrap="square">
+            <a:spAutoFit/>
+          </a:bodyPr>
+          <a:lstStyle/>
+          <a:p>
+            <a:r>
+              <a:rPr sz="900" b="0">
+                <a:solidFill>
+                  <a:srgbClr val="2B2F36"/>
+                </a:solidFill>
+                <a:latin typeface="微软雅黑"/>
+              </a:rPr>
+              <a:t>① 及格(D)：指标达标+竞标书完整</a:t>
+            </a:r>
+          </a:p>
+          <a:p>
+            <a:r>
+              <a:rPr sz="900" b="0">
+                <a:solidFill>
+                  <a:srgbClr val="2B2F36"/>
+                </a:solidFill>
+                <a:latin typeface="微软雅黑"/>
+              </a:rPr>
+              <a:t>② 优秀(B+)：赢得竞标且指标优秀</a:t>
+            </a:r>
+          </a:p>
+        </p:txBody>
+      </p:sp>
+      <p:sp>
+        <p:nvSpPr>
+          <p:cNvPr id="29" name="Rectangle 28"/>
+          <p:cNvSpPr/>
+          <p:nvPr/>
+        </p:nvSpPr>
+        <p:spPr>
+          <a:xfrm>
+            <a:off x="6903720" y="3886200"/>
+            <a:ext cx="4828032" cy="2011680"/>
+          </a:xfrm>
+          <a:prstGeom prst="rect">
+            <a:avLst/>
+          </a:prstGeom>
+          <a:solidFill>
+            <a:srgbClr val="FFFFFF"/>
+          </a:solidFill>
+          <a:ln>
+            <a:solidFill>
+              <a:srgbClr val="D6DCE4"/>
+            </a:solidFill>
+          </a:ln>
+          <a:effectLst/>
+        </p:spPr>
+        <p:style>
+          <a:lnRef idx="1">
+            <a:schemeClr val="accent1"/>
+          </a:lnRef>
+          <a:fillRef idx="3">
+            <a:schemeClr val="accent1"/>
+          </a:fillRef>
+          <a:effectRef idx="2">
+            <a:schemeClr val="accent1"/>
+          </a:effectRef>
+          <a:fontRef idx="minor">
+            <a:schemeClr val="lt1"/>
+          </a:fontRef>
+        </p:style>
+        <p:txBody>
+          <a:bodyPr rtlCol="0" anchor="ctr" wrap="square"/>
+          <a:lstStyle/>
+          <a:p>
+            <a:pPr algn="ctr"/>
+          </a:p>
+        </p:txBody>
+      </p:sp>
+      <p:sp>
+        <p:nvSpPr>
+          <p:cNvPr id="30" name="Rectangle 29"/>
+          <p:cNvSpPr/>
+          <p:nvPr/>
+        </p:nvSpPr>
+        <p:spPr>
+          <a:xfrm>
+            <a:off x="6903720" y="3886200"/>
+            <a:ext cx="4828032" cy="365760"/>
+          </a:xfrm>
+          <a:prstGeom prst="rect">
+            <a:avLst/>
+          </a:prstGeom>
+          <a:solidFill>
+            <a:srgbClr val="8A4B2D"/>
+          </a:solidFill>
+          <a:ln>
+            <a:noFill/>
+          </a:ln>
+          <a:effectLst/>
+        </p:spPr>
+        <p:style>
+          <a:lnRef idx="1">
+            <a:schemeClr val="accent1"/>
+          </a:lnRef>
+          <a:fillRef idx="3">
+            <a:schemeClr val="accent1"/>
+          </a:fillRef>
+          <a:effectRef idx="2">
+            <a:schemeClr val="accent1"/>
+          </a:effectRef>
+          <a:fontRef idx="minor">
+            <a:schemeClr val="lt1"/>
+          </a:fontRef>
+        </p:style>
+        <p:txBody>
+          <a:bodyPr rtlCol="0" anchor="ctr" wrap="square"/>
+          <a:lstStyle/>
+          <a:p>
+            <a:pPr algn="ctr"/>
+          </a:p>
+        </p:txBody>
+      </p:sp>
+      <p:sp>
+        <p:nvSpPr>
+          <p:cNvPr id="31" name="TextBox 30"/>
+          <p:cNvSpPr txBox="1"/>
+          <p:nvPr/>
+        </p:nvSpPr>
+        <p:spPr>
+          <a:xfrm>
+            <a:off x="7013448" y="3922776"/>
+            <a:ext cx="4608576" cy="292608"/>
+          </a:xfrm>
+          <a:prstGeom prst="rect">
+            <a:avLst/>
+          </a:prstGeom>
+          <a:noFill/>
+        </p:spPr>
+        <p:txBody>
+          <a:bodyPr wrap="square">
+            <a:spAutoFit/>
+          </a:bodyPr>
+          <a:lstStyle/>
+          <a:p>
+            <a:r>
+              <a:rPr sz="1150" b="1">
+                <a:solidFill>
+                  <a:srgbClr val="FFFFFF"/>
+                </a:solidFill>
+                <a:latin typeface="微软雅黑"/>
+              </a:rPr>
+              <a:t>动手前三个提醒（踩坑点摘录）</a:t>
+            </a:r>
+          </a:p>
+        </p:txBody>
+      </p:sp>
+      <p:sp>
+        <p:nvSpPr>
+          <p:cNvPr id="32" name="TextBox 31"/>
+          <p:cNvSpPr txBox="1"/>
+          <p:nvPr/>
+        </p:nvSpPr>
+        <p:spPr>
+          <a:xfrm>
+            <a:off x="7068312" y="4352544"/>
+            <a:ext cx="4526280" cy="1463040"/>
+          </a:xfrm>
+          <a:prstGeom prst="rect">
+            <a:avLst/>
+          </a:prstGeom>
+          <a:noFill/>
+        </p:spPr>
+        <p:txBody>
+          <a:bodyPr wrap="square">
+            <a:spAutoFit/>
+          </a:bodyPr>
+          <a:lstStyle/>
+          <a:p>
+            <a:r>
+              <a:rPr sz="900" b="0">
+                <a:solidFill>
+                  <a:srgbClr val="2B2F36"/>
+                </a:solidFill>
+                <a:latin typeface="微软雅黑"/>
+              </a:rPr>
+              <a:t>⚠ reshape成N1HW</a:t>
+            </a:r>
+          </a:p>
+          <a:p>
+            <a:r>
+              <a:rPr sz="900" b="0">
+                <a:solidFill>
+                  <a:srgbClr val="2B2F36"/>
+                </a:solidFill>
+                <a:latin typeface="微软雅黑"/>
+              </a:rPr>
+              <a:t>⚠ 统一用[:-horizon]截断</a:t>
+            </a:r>
+          </a:p>
+          <a:p>
+            <a:r>
+              <a:rPr sz="900" b="0">
+                <a:solidFill>
+                  <a:srgbClr val="2B2F36"/>
+                </a:solidFill>
+                <a:latin typeface="微软雅黑"/>
+              </a:rPr>
+              <a:t>⚠ 四段论加计时排练</a:t>
+            </a:r>
+          </a:p>
+        </p:txBody>
+      </p:sp>
+      <p:sp>
+        <p:nvSpPr>
+          <p:cNvPr id="33" name="TextBox 32"/>
+          <p:cNvSpPr txBox="1"/>
+          <p:nvPr/>
+        </p:nvSpPr>
+        <p:spPr>
+          <a:xfrm>
+            <a:off x="457200" y="6281928"/>
+            <a:ext cx="9601200" cy="182880"/>
+          </a:xfrm>
+          <a:prstGeom prst="rect">
+            <a:avLst/>
+          </a:prstGeom>
+          <a:noFill/>
+        </p:spPr>
+        <p:txBody>
+          <a:bodyPr wrap="square">
+            <a:spAutoFit/>
+          </a:bodyPr>
+          <a:lstStyle/>
+          <a:p>
+            <a:r>
+              <a:rPr sz="900" b="0">
+                <a:solidFill>
+                  <a:srgbClr val="6B7280"/>
+                </a:solidFill>
+                <a:latin typeface="微软雅黑"/>
+              </a:rPr>
+              <a:t>素材来源：同周《第11次课-CNN或LSTM二选一（》知识卡与避坑清单（逐字摘录）</a:t>
             </a:r>
           </a:p>
         </p:txBody>
